--- a/slides/OCR-Presentation.pptx
+++ b/slides/OCR-Presentation.pptx
@@ -26,14 +26,6 @@
     <p:sldId id="274" r:id="rId25"/>
     <p:sldId id="275" r:id="rId26"/>
     <p:sldId id="276" r:id="rId27"/>
-    <p:sldId id="277" r:id="rId28"/>
-    <p:sldId id="278" r:id="rId29"/>
-    <p:sldId id="279" r:id="rId30"/>
-    <p:sldId id="280" r:id="rId31"/>
-    <p:sldId id="281" r:id="rId32"/>
-    <p:sldId id="282" r:id="rId33"/>
-    <p:sldId id="283" r:id="rId34"/>
-    <p:sldId id="284" r:id="rId35"/>
   </p:sldIdLst>
   <p:sldSz cx="12191695" cy="6858000" type="screen4x3"/>
   <p:notesSz cx="6858000" cy="9144000"/>
@@ -3222,21 +3214,6 @@
               <a:t>Pipeline PaddleOCR — VietOCR — LayoutLMv3</a:t>
             </a:r>
           </a:p>
-          <a:p>
-            <a:pPr>
-              <a:spcBef>
-                <a:spcPts val="2000"/>
-              </a:spcBef>
-              <a:defRPr sz="1600">
-                <a:solidFill>
-                  <a:srgbClr val="7F8C8D"/>
-                </a:solidFill>
-              </a:defRPr>
-            </a:pPr>
-            <a:r>
-              <a:t>Đồ án Môn học</a:t>
-            </a:r>
-          </a:p>
         </p:txBody>
       </p:sp>
       <p:sp>
@@ -3283,23 +3260,12 @@
   <p:clrMapOvr>
     <a:masterClrMapping/>
   </p:clrMapOvr>
-  <p:transition spd="med" advTm="2000">
-    <p:fade/>
-  </p:transition>
 </p:sld>
 </file>
 
 <file path=ppt/slides/slide10.xml><?xml version="1.0" encoding="utf-8"?>
 <p:sld xmlns:a="http://schemas.openxmlformats.org/drawingml/2006/main" xmlns:p="http://schemas.openxmlformats.org/presentationml/2006/main" xmlns:r="http://schemas.openxmlformats.org/officeDocument/2006/relationships">
   <p:cSld>
-    <p:bg>
-      <p:bgPr>
-        <a:solidFill>
-          <a:srgbClr val="2E86DE"/>
-        </a:solidFill>
-        <a:effectLst/>
-      </p:bgPr>
-    </p:bg>
     <p:spTree>
       <p:nvGrpSpPr>
         <p:cNvPr id="1" name=""/>
@@ -3309,14 +3275,109 @@
       <p:grpSpPr/>
       <p:sp>
         <p:nvSpPr>
-          <p:cNvPr id="2" name="TextBox 1"/>
+          <p:cNvPr id="2" name="Rectangle 1"/>
+          <p:cNvSpPr/>
+          <p:nvPr/>
+        </p:nvSpPr>
+        <p:spPr>
+          <a:xfrm>
+            <a:off x="0" y="0"/>
+            <a:ext cx="12191695" cy="54864"/>
+          </a:xfrm>
+          <a:prstGeom prst="rect">
+            <a:avLst/>
+          </a:prstGeom>
+          <a:solidFill>
+            <a:srgbClr val="2E86DE"/>
+          </a:solidFill>
+          <a:ln>
+            <a:noFill/>
+          </a:ln>
+        </p:spPr>
+        <p:style>
+          <a:lnRef idx="1">
+            <a:schemeClr val="accent1"/>
+          </a:lnRef>
+          <a:fillRef idx="3">
+            <a:schemeClr val="accent1"/>
+          </a:fillRef>
+          <a:effectRef idx="2">
+            <a:schemeClr val="accent1"/>
+          </a:effectRef>
+          <a:fontRef idx="minor">
+            <a:schemeClr val="lt1"/>
+          </a:fontRef>
+        </p:style>
+        <p:txBody>
+          <a:bodyPr rtlCol="0" anchor="ctr"/>
+          <a:lstStyle/>
+          <a:p>
+            <a:pPr algn="ctr"/>
+          </a:p>
+        </p:txBody>
+      </p:sp>
+      <p:sp>
+        <p:nvSpPr>
+          <p:cNvPr id="3" name="Rectangle 2"/>
+          <p:cNvSpPr/>
+          <p:nvPr/>
+        </p:nvSpPr>
+        <p:spPr>
+          <a:xfrm>
+            <a:off x="0" y="6492240"/>
+            <a:ext cx="12191695" cy="365760"/>
+          </a:xfrm>
+          <a:prstGeom prst="rect">
+            <a:avLst/>
+          </a:prstGeom>
+          <a:solidFill>
+            <a:srgbClr val="1B2A4A"/>
+          </a:solidFill>
+          <a:ln>
+            <a:noFill/>
+          </a:ln>
+        </p:spPr>
+        <p:style>
+          <a:lnRef idx="1">
+            <a:schemeClr val="accent1"/>
+          </a:lnRef>
+          <a:fillRef idx="3">
+            <a:schemeClr val="accent1"/>
+          </a:fillRef>
+          <a:effectRef idx="2">
+            <a:schemeClr val="accent1"/>
+          </a:effectRef>
+          <a:fontRef idx="minor">
+            <a:schemeClr val="lt1"/>
+          </a:fontRef>
+        </p:style>
+        <p:txBody>
+          <a:bodyPr rtlCol="0" anchor="ctr"/>
+          <a:lstStyle/>
+          <a:p>
+            <a:pPr algn="ctr">
+              <a:defRPr sz="1000">
+                <a:solidFill>
+                  <a:srgbClr val="FFFFFF"/>
+                </a:solidFill>
+              </a:defRPr>
+            </a:pPr>
+            <a:r>
+              <a:t>Trích xuất Hóa đơn Tiếng Việt — PaddleOCR • VietOCR • LayoutLMv3</a:t>
+            </a:r>
+          </a:p>
+        </p:txBody>
+      </p:sp>
+      <p:sp>
+        <p:nvSpPr>
+          <p:cNvPr id="4" name="TextBox 3"/>
           <p:cNvSpPr txBox="1"/>
           <p:nvPr/>
         </p:nvSpPr>
         <p:spPr>
           <a:xfrm>
-            <a:off x="914400" y="2286000"/>
-            <a:ext cx="1828800" cy="1371600"/>
+            <a:off x="457200" y="137160"/>
+            <a:ext cx="10972800" cy="731520"/>
           </a:xfrm>
           <a:prstGeom prst="rect">
             <a:avLst/>
@@ -3330,49 +3391,431 @@
           <a:lstStyle/>
           <a:p>
             <a:pPr>
-              <a:defRPr sz="7200" b="1">
+              <a:defRPr sz="2600" b="1">
+                <a:solidFill>
+                  <a:srgbClr val="1B2A4A"/>
+                </a:solidFill>
+              </a:defRPr>
+            </a:pPr>
+            <a:r>
+              <a:t>KEY INFORMATION EXTRACTION — Từ rule-based đến Multi-modal</a:t>
+            </a:r>
+          </a:p>
+        </p:txBody>
+      </p:sp>
+      <p:sp>
+        <p:nvSpPr>
+          <p:cNvPr id="5" name="Rounded Rectangle 4"/>
+          <p:cNvSpPr/>
+          <p:nvPr/>
+        </p:nvSpPr>
+        <p:spPr>
+          <a:xfrm>
+            <a:off x="274320" y="1097280"/>
+            <a:ext cx="3657600" cy="365760"/>
+          </a:xfrm>
+          <a:prstGeom prst="roundRect">
+            <a:avLst/>
+          </a:prstGeom>
+          <a:solidFill>
+            <a:srgbClr val="7F8C8D"/>
+          </a:solidFill>
+          <a:ln>
+            <a:noFill/>
+          </a:ln>
+        </p:spPr>
+        <p:style>
+          <a:lnRef idx="1">
+            <a:schemeClr val="accent1"/>
+          </a:lnRef>
+          <a:fillRef idx="3">
+            <a:schemeClr val="accent1"/>
+          </a:fillRef>
+          <a:effectRef idx="2">
+            <a:schemeClr val="accent1"/>
+          </a:effectRef>
+          <a:fontRef idx="minor">
+            <a:schemeClr val="lt1"/>
+          </a:fontRef>
+        </p:style>
+        <p:txBody>
+          <a:bodyPr rtlCol="0" anchor="ctr"/>
+          <a:lstStyle/>
+          <a:p>
+            <a:pPr algn="ctr">
+              <a:defRPr sz="1300" b="1">
                 <a:solidFill>
                   <a:srgbClr val="FFFFFF"/>
                 </a:solidFill>
               </a:defRPr>
             </a:pPr>
             <a:r>
-              <a:t>03</a:t>
-            </a:r>
-          </a:p>
-        </p:txBody>
-      </p:sp>
-      <p:sp>
-        <p:nvSpPr>
-          <p:cNvPr id="3" name="TextBox 2"/>
-          <p:cNvSpPr txBox="1"/>
-          <p:nvPr/>
-        </p:nvSpPr>
-        <p:spPr>
-          <a:xfrm>
-            <a:off x="914400" y="3657600"/>
-            <a:ext cx="9144000" cy="1371600"/>
-          </a:xfrm>
-          <a:prstGeom prst="rect">
-            <a:avLst/>
-          </a:prstGeom>
-          <a:noFill/>
-        </p:spPr>
-        <p:txBody>
-          <a:bodyPr wrap="square">
-            <a:spAutoFit/>
-          </a:bodyPr>
-          <a:lstStyle/>
-          <a:p>
-            <a:pPr>
-              <a:defRPr sz="3200" b="1">
+              <a:t>Thế hệ 1 — Rule-based</a:t>
+            </a:r>
+          </a:p>
+        </p:txBody>
+      </p:sp>
+      <p:sp>
+        <p:nvSpPr>
+          <p:cNvPr id="6" name="Rounded Rectangle 5"/>
+          <p:cNvSpPr/>
+          <p:nvPr/>
+        </p:nvSpPr>
+        <p:spPr>
+          <a:xfrm>
+            <a:off x="274320" y="1463040"/>
+            <a:ext cx="3657600" cy="1920240"/>
+          </a:xfrm>
+          <a:prstGeom prst="roundRect">
+            <a:avLst/>
+          </a:prstGeom>
+          <a:solidFill>
+            <a:srgbClr val="F8F9FA"/>
+          </a:solidFill>
+          <a:ln w="12700">
+            <a:solidFill>
+              <a:srgbClr val="7F8C8D"/>
+            </a:solidFill>
+          </a:ln>
+        </p:spPr>
+        <p:style>
+          <a:lnRef idx="1">
+            <a:schemeClr val="accent1"/>
+          </a:lnRef>
+          <a:fillRef idx="3">
+            <a:schemeClr val="accent1"/>
+          </a:fillRef>
+          <a:effectRef idx="2">
+            <a:schemeClr val="accent1"/>
+          </a:effectRef>
+          <a:fontRef idx="minor">
+            <a:schemeClr val="lt1"/>
+          </a:fontRef>
+        </p:style>
+        <p:txBody>
+          <a:bodyPr rtlCol="0" anchor="ctr" wrap="square" lIns="127000" tIns="63500"/>
+          <a:lstStyle/>
+          <a:p>
+            <a:pPr algn="ctr">
+              <a:spcBef>
+                <a:spcPts val="300"/>
+              </a:spcBef>
+              <a:defRPr sz="1200">
+                <a:solidFill>
+                  <a:srgbClr val="2C3E50"/>
+                </a:solidFill>
+              </a:defRPr>
+            </a:pPr>
+            <a:r>
+              <a:t>• Regex, heuristic</a:t>
+            </a:r>
+          </a:p>
+          <a:p>
+            <a:pPr>
+              <a:spcBef>
+                <a:spcPts val="300"/>
+              </a:spcBef>
+              <a:defRPr sz="1200">
+                <a:solidFill>
+                  <a:srgbClr val="2C3E50"/>
+                </a:solidFill>
+              </a:defRPr>
+            </a:pPr>
+            <a:r>
+              <a:t>• Nhanh, không cần training</a:t>
+            </a:r>
+          </a:p>
+          <a:p>
+            <a:pPr>
+              <a:spcBef>
+                <a:spcPts val="300"/>
+              </a:spcBef>
+              <a:defRPr sz="1200">
+                <a:solidFill>
+                  <a:srgbClr val="2C3E50"/>
+                </a:solidFill>
+              </a:defRPr>
+            </a:pPr>
+            <a:r>
+              <a:t>• Vỡ ngay khi gặp format mới</a:t>
+            </a:r>
+          </a:p>
+        </p:txBody>
+      </p:sp>
+      <p:sp>
+        <p:nvSpPr>
+          <p:cNvPr id="7" name="Rounded Rectangle 6"/>
+          <p:cNvSpPr/>
+          <p:nvPr/>
+        </p:nvSpPr>
+        <p:spPr>
+          <a:xfrm>
+            <a:off x="274320" y="3566160"/>
+            <a:ext cx="3657600" cy="365760"/>
+          </a:xfrm>
+          <a:prstGeom prst="roundRect">
+            <a:avLst/>
+          </a:prstGeom>
+          <a:solidFill>
+            <a:srgbClr val="F39C12"/>
+          </a:solidFill>
+          <a:ln>
+            <a:noFill/>
+          </a:ln>
+        </p:spPr>
+        <p:style>
+          <a:lnRef idx="1">
+            <a:schemeClr val="accent1"/>
+          </a:lnRef>
+          <a:fillRef idx="3">
+            <a:schemeClr val="accent1"/>
+          </a:fillRef>
+          <a:effectRef idx="2">
+            <a:schemeClr val="accent1"/>
+          </a:effectRef>
+          <a:fontRef idx="minor">
+            <a:schemeClr val="lt1"/>
+          </a:fontRef>
+        </p:style>
+        <p:txBody>
+          <a:bodyPr rtlCol="0" anchor="ctr"/>
+          <a:lstStyle/>
+          <a:p>
+            <a:pPr algn="ctr">
+              <a:defRPr sz="1300" b="1">
                 <a:solidFill>
                   <a:srgbClr val="FFFFFF"/>
                 </a:solidFill>
               </a:defRPr>
             </a:pPr>
             <a:r>
-              <a:t>PHÂN LOẠI &amp; TIẾN HÓA</a:t>
+              <a:t>Thế hệ 2 — BERT NER</a:t>
+            </a:r>
+          </a:p>
+        </p:txBody>
+      </p:sp>
+      <p:sp>
+        <p:nvSpPr>
+          <p:cNvPr id="8" name="Rounded Rectangle 7"/>
+          <p:cNvSpPr/>
+          <p:nvPr/>
+        </p:nvSpPr>
+        <p:spPr>
+          <a:xfrm>
+            <a:off x="274320" y="3931920"/>
+            <a:ext cx="3657600" cy="1920240"/>
+          </a:xfrm>
+          <a:prstGeom prst="roundRect">
+            <a:avLst/>
+          </a:prstGeom>
+          <a:solidFill>
+            <a:srgbClr val="FFF3E0"/>
+          </a:solidFill>
+          <a:ln w="12700">
+            <a:solidFill>
+              <a:srgbClr val="F39C12"/>
+            </a:solidFill>
+          </a:ln>
+        </p:spPr>
+        <p:style>
+          <a:lnRef idx="1">
+            <a:schemeClr val="accent1"/>
+          </a:lnRef>
+          <a:fillRef idx="3">
+            <a:schemeClr val="accent1"/>
+          </a:fillRef>
+          <a:effectRef idx="2">
+            <a:schemeClr val="accent1"/>
+          </a:effectRef>
+          <a:fontRef idx="minor">
+            <a:schemeClr val="lt1"/>
+          </a:fontRef>
+        </p:style>
+        <p:txBody>
+          <a:bodyPr rtlCol="0" anchor="ctr" wrap="square" lIns="127000" tIns="63500"/>
+          <a:lstStyle/>
+          <a:p>
+            <a:pPr algn="ctr">
+              <a:spcBef>
+                <a:spcPts val="300"/>
+              </a:spcBef>
+              <a:defRPr sz="1200">
+                <a:solidFill>
+                  <a:srgbClr val="2C3E50"/>
+                </a:solidFill>
+              </a:defRPr>
+            </a:pPr>
+            <a:r>
+              <a:t>• Token classification</a:t>
+            </a:r>
+          </a:p>
+          <a:p>
+            <a:pPr>
+              <a:spcBef>
+                <a:spcPts val="300"/>
+              </a:spcBef>
+              <a:defRPr sz="1200">
+                <a:solidFill>
+                  <a:srgbClr val="2C3E50"/>
+                </a:solidFill>
+              </a:defRPr>
+            </a:pPr>
+            <a:r>
+              <a:t>• Bỏ qua thông tin vị trí không gian</a:t>
+            </a:r>
+          </a:p>
+        </p:txBody>
+      </p:sp>
+      <p:sp>
+        <p:nvSpPr>
+          <p:cNvPr id="9" name="Rounded Rectangle 8"/>
+          <p:cNvSpPr/>
+          <p:nvPr/>
+        </p:nvSpPr>
+        <p:spPr>
+          <a:xfrm>
+            <a:off x="4206240" y="1097280"/>
+            <a:ext cx="7680960" cy="365760"/>
+          </a:xfrm>
+          <a:prstGeom prst="roundRect">
+            <a:avLst/>
+          </a:prstGeom>
+          <a:solidFill>
+            <a:srgbClr val="2E86DE"/>
+          </a:solidFill>
+          <a:ln>
+            <a:noFill/>
+          </a:ln>
+        </p:spPr>
+        <p:style>
+          <a:lnRef idx="1">
+            <a:schemeClr val="accent1"/>
+          </a:lnRef>
+          <a:fillRef idx="3">
+            <a:schemeClr val="accent1"/>
+          </a:fillRef>
+          <a:effectRef idx="2">
+            <a:schemeClr val="accent1"/>
+          </a:effectRef>
+          <a:fontRef idx="minor">
+            <a:schemeClr val="lt1"/>
+          </a:fontRef>
+        </p:style>
+        <p:txBody>
+          <a:bodyPr rtlCol="0" anchor="ctr"/>
+          <a:lstStyle/>
+          <a:p>
+            <a:pPr algn="ctr">
+              <a:defRPr sz="1300" b="1">
+                <a:solidFill>
+                  <a:srgbClr val="FFFFFF"/>
+                </a:solidFill>
+              </a:defRPr>
+            </a:pPr>
+            <a:r>
+              <a:t>★ Thế hệ 3 — LayoutLMv3 (Microsoft, 2022)</a:t>
+            </a:r>
+          </a:p>
+        </p:txBody>
+      </p:sp>
+      <p:sp>
+        <p:nvSpPr>
+          <p:cNvPr id="10" name="Rounded Rectangle 9"/>
+          <p:cNvSpPr/>
+          <p:nvPr/>
+        </p:nvSpPr>
+        <p:spPr>
+          <a:xfrm>
+            <a:off x="4206240" y="1463040"/>
+            <a:ext cx="7680960" cy="4389120"/>
+          </a:xfrm>
+          <a:prstGeom prst="roundRect">
+            <a:avLst/>
+          </a:prstGeom>
+          <a:solidFill>
+            <a:srgbClr val="D6EAF8"/>
+          </a:solidFill>
+          <a:ln w="12700">
+            <a:solidFill>
+              <a:srgbClr val="2E86DE"/>
+            </a:solidFill>
+          </a:ln>
+        </p:spPr>
+        <p:style>
+          <a:lnRef idx="1">
+            <a:schemeClr val="accent1"/>
+          </a:lnRef>
+          <a:fillRef idx="3">
+            <a:schemeClr val="accent1"/>
+          </a:fillRef>
+          <a:effectRef idx="2">
+            <a:schemeClr val="accent1"/>
+          </a:effectRef>
+          <a:fontRef idx="minor">
+            <a:schemeClr val="lt1"/>
+          </a:fontRef>
+        </p:style>
+        <p:txBody>
+          <a:bodyPr rtlCol="0" anchor="ctr" wrap="square" lIns="127000" tIns="63500"/>
+          <a:lstStyle/>
+          <a:p>
+            <a:pPr algn="ctr">
+              <a:spcBef>
+                <a:spcPts val="300"/>
+              </a:spcBef>
+              <a:defRPr sz="1200">
+                <a:solidFill>
+                  <a:srgbClr val="2C3E50"/>
+                </a:solidFill>
+              </a:defRPr>
+            </a:pPr>
+            <a:r>
+              <a:t>• Kết hợp 3 nguồn: text OCR + bbox + patch ảnh</a:t>
+            </a:r>
+          </a:p>
+          <a:p>
+            <a:pPr>
+              <a:spcBef>
+                <a:spcPts val="300"/>
+              </a:spcBef>
+              <a:defRPr sz="1200">
+                <a:solidFill>
+                  <a:srgbClr val="2C3E50"/>
+                </a:solidFill>
+              </a:defRPr>
+            </a:pPr>
+            <a:r>
+              <a:t>• Unified self-attention qua cả 3 modality</a:t>
+            </a:r>
+          </a:p>
+          <a:p>
+            <a:pPr>
+              <a:spcBef>
+                <a:spcPts val="300"/>
+              </a:spcBef>
+              <a:defRPr sz="1200">
+                <a:solidFill>
+                  <a:srgbClr val="2C3E50"/>
+                </a:solidFill>
+              </a:defRPr>
+            </a:pPr>
+            <a:r>
+              <a:t>• Pre-training: MLM + MIM + Text-Image Alignment</a:t>
+            </a:r>
+          </a:p>
+          <a:p>
+            <a:pPr>
+              <a:spcBef>
+                <a:spcPts val="300"/>
+              </a:spcBef>
+              <a:defRPr sz="1200">
+                <a:solidFill>
+                  <a:srgbClr val="2C3E50"/>
+                </a:solidFill>
+              </a:defRPr>
+            </a:pPr>
+            <a:r>
+              <a:t>• Đột phá cho Document AI</a:t>
             </a:r>
           </a:p>
         </p:txBody>
@@ -3382,9 +3825,6 @@
   <p:clrMapOvr>
     <a:masterClrMapping/>
   </p:clrMapOvr>
-  <p:transition spd="med" advTm="1000">
-    <p:fade/>
-  </p:transition>
 </p:sld>
 </file>
 
@@ -3488,7 +3928,7 @@
               </a:defRPr>
             </a:pPr>
             <a:r>
-              <a:t>Trích xuất Hóa đơn Tiếng Việt — Pipeline PaddleOCR • VietOCR • LayoutLMv3</a:t>
+              <a:t>Trích xuất Hóa đơn Tiếng Việt — PaddleOCR • VietOCR • LayoutLMv3</a:t>
             </a:r>
           </a:p>
         </p:txBody>
@@ -3523,454 +3963,201 @@
               </a:defRPr>
             </a:pPr>
             <a:r>
-              <a:t>TEXT DETECTION — Từ sliding window đến anchor-free</a:t>
-            </a:r>
-          </a:p>
-        </p:txBody>
-      </p:sp>
-      <p:sp>
-        <p:nvSpPr>
-          <p:cNvPr id="5" name="Rounded Rectangle 4"/>
-          <p:cNvSpPr/>
-          <p:nvPr/>
-        </p:nvSpPr>
-        <p:spPr>
-          <a:xfrm>
-            <a:off x="274320" y="1097280"/>
-            <a:ext cx="3657600" cy="365760"/>
-          </a:xfrm>
-          <a:prstGeom prst="roundRect">
-            <a:avLst/>
-          </a:prstGeom>
-          <a:solidFill>
-            <a:srgbClr val="7F8C8D"/>
-          </a:solidFill>
-          <a:ln>
-            <a:noFill/>
-          </a:ln>
-        </p:spPr>
-        <p:style>
-          <a:lnRef idx="1">
-            <a:schemeClr val="accent1"/>
-          </a:lnRef>
-          <a:fillRef idx="3">
-            <a:schemeClr val="accent1"/>
-          </a:fillRef>
-          <a:effectRef idx="2">
-            <a:schemeClr val="accent1"/>
-          </a:effectRef>
-          <a:fontRef idx="minor">
-            <a:schemeClr val="lt1"/>
-          </a:fontRef>
-        </p:style>
-        <p:txBody>
-          <a:bodyPr rtlCol="0" anchor="ctr"/>
-          <a:lstStyle/>
-          <a:p>
-            <a:pPr algn="ctr">
-              <a:defRPr sz="1300" b="1">
-                <a:solidFill>
-                  <a:srgbClr val="FFFFFF"/>
-                </a:solidFill>
-              </a:defRPr>
-            </a:pPr>
-            <a:r>
-              <a:t>Thế hệ 1 (trước 2015)</a:t>
-            </a:r>
-          </a:p>
-        </p:txBody>
-      </p:sp>
-      <p:sp>
-        <p:nvSpPr>
-          <p:cNvPr id="6" name="Rounded Rectangle 5"/>
-          <p:cNvSpPr/>
-          <p:nvPr/>
-        </p:nvSpPr>
-        <p:spPr>
-          <a:xfrm>
-            <a:off x="274320" y="1463040"/>
-            <a:ext cx="3657600" cy="1920240"/>
-          </a:xfrm>
-          <a:prstGeom prst="roundRect">
-            <a:avLst/>
-          </a:prstGeom>
-          <a:solidFill>
-            <a:srgbClr val="F5F5F5"/>
-          </a:solidFill>
-          <a:ln w="12700">
-            <a:solidFill>
-              <a:srgbClr val="7F8C8D"/>
-            </a:solidFill>
-          </a:ln>
-        </p:spPr>
-        <p:style>
-          <a:lnRef idx="1">
-            <a:schemeClr val="accent1"/>
-          </a:lnRef>
-          <a:fillRef idx="3">
-            <a:schemeClr val="accent1"/>
-          </a:fillRef>
-          <a:effectRef idx="2">
-            <a:schemeClr val="accent1"/>
-          </a:effectRef>
-          <a:fontRef idx="minor">
-            <a:schemeClr val="lt1"/>
-          </a:fontRef>
-        </p:style>
-        <p:txBody>
-          <a:bodyPr rtlCol="0" anchor="ctr" wrap="square" lIns="127000" rIns="127000" tIns="63500"/>
-          <a:lstStyle/>
-          <a:p>
-            <a:pPr algn="ctr">
-              <a:spcBef>
-                <a:spcPts val="300"/>
-              </a:spcBef>
-              <a:defRPr sz="1200">
+              <a:t>CON NGƯỜI ĐỌC HÓA ĐƠN NHƯ THẾ NÀO?</a:t>
+            </a:r>
+          </a:p>
+        </p:txBody>
+      </p:sp>
+      <p:sp>
+        <p:nvSpPr>
+          <p:cNvPr id="5" name="TextBox 4"/>
+          <p:cNvSpPr txBox="1"/>
+          <p:nvPr/>
+        </p:nvSpPr>
+        <p:spPr>
+          <a:xfrm>
+            <a:off x="457200" y="1005840"/>
+            <a:ext cx="10972800" cy="5029200"/>
+          </a:xfrm>
+          <a:prstGeom prst="rect">
+            <a:avLst/>
+          </a:prstGeom>
+          <a:noFill/>
+        </p:spPr>
+        <p:txBody>
+          <a:bodyPr wrap="square">
+            <a:spAutoFit/>
+          </a:bodyPr>
+          <a:lstStyle/>
+          <a:p>
+            <a:pPr>
+              <a:spcBef>
+                <a:spcPts val="1400"/>
+              </a:spcBef>
+              <a:defRPr sz="1800" b="1">
+                <a:solidFill>
+                  <a:srgbClr val="2E86DE"/>
+                </a:solidFill>
+              </a:defRPr>
+            </a:pPr>
+            <a:r>
+              <a:t>1. Vị trí không gian mang ngữ nghĩa:</a:t>
+            </a:r>
+          </a:p>
+          <a:p>
+            <a:pPr>
+              <a:spcBef>
+                <a:spcPts val="500"/>
+              </a:spcBef>
+              <a:defRPr sz="1500">
                 <a:solidFill>
                   <a:srgbClr val="2C3E50"/>
                 </a:solidFill>
               </a:defRPr>
             </a:pPr>
             <a:r>
-              <a:t>• MSER, SWT</a:t>
-            </a:r>
-          </a:p>
-          <a:p>
-            <a:pPr>
-              <a:spcBef>
-                <a:spcPts val="300"/>
-              </a:spcBef>
-              <a:defRPr sz="1200">
+              <a:t>• "Tổng cộng" → góc dưới phải, font lớn, in đậm</a:t>
+            </a:r>
+          </a:p>
+          <a:p>
+            <a:pPr>
+              <a:spcBef>
+                <a:spcPts val="500"/>
+              </a:spcBef>
+              <a:defRPr sz="1500">
                 <a:solidFill>
                   <a:srgbClr val="2C3E50"/>
                 </a:solidFill>
               </a:defRPr>
             </a:pPr>
             <a:r>
-              <a:t>• Phân tích pixel theo màu sắc</a:t>
-            </a:r>
-          </a:p>
-          <a:p>
-            <a:pPr>
-              <a:spcBef>
-                <a:spcPts val="300"/>
-              </a:spcBef>
-              <a:defRPr sz="1200">
+              <a:t>• Tên cửa hàng → trên cùng, canh giữa</a:t>
+            </a:r>
+          </a:p>
+          <a:p>
+            <a:pPr>
+              <a:spcBef>
+                <a:spcPts val="500"/>
+              </a:spcBef>
+              <a:defRPr sz="1500">
                 <a:solidFill>
                   <a:srgbClr val="2C3E50"/>
                 </a:solidFill>
               </a:defRPr>
             </a:pPr>
-            <a:r>
-              <a:t>• Chỉ hoạt động với ảnh sạch</a:t>
-            </a:r>
-          </a:p>
-        </p:txBody>
-      </p:sp>
-      <p:sp>
-        <p:nvSpPr>
-          <p:cNvPr id="7" name="Rounded Rectangle 6"/>
-          <p:cNvSpPr/>
-          <p:nvPr/>
-        </p:nvSpPr>
-        <p:spPr>
-          <a:xfrm>
-            <a:off x="274320" y="3566160"/>
-            <a:ext cx="3657600" cy="365760"/>
-          </a:xfrm>
-          <a:prstGeom prst="roundRect">
-            <a:avLst/>
-          </a:prstGeom>
-          <a:solidFill>
-            <a:srgbClr val="F39C12"/>
-          </a:solidFill>
-          <a:ln>
-            <a:noFill/>
-          </a:ln>
-        </p:spPr>
-        <p:style>
-          <a:lnRef idx="1">
-            <a:schemeClr val="accent1"/>
-          </a:lnRef>
-          <a:fillRef idx="3">
-            <a:schemeClr val="accent1"/>
-          </a:fillRef>
-          <a:effectRef idx="2">
-            <a:schemeClr val="accent1"/>
-          </a:effectRef>
-          <a:fontRef idx="minor">
-            <a:schemeClr val="lt1"/>
-          </a:fontRef>
-        </p:style>
-        <p:txBody>
-          <a:bodyPr rtlCol="0" anchor="ctr"/>
-          <a:lstStyle/>
-          <a:p>
-            <a:pPr algn="ctr">
-              <a:defRPr sz="1300" b="1">
-                <a:solidFill>
-                  <a:srgbClr val="FFFFFF"/>
-                </a:solidFill>
-              </a:defRPr>
-            </a:pPr>
-            <a:r>
-              <a:t>Thế hệ 2 (2015–2017)</a:t>
-            </a:r>
-          </a:p>
-        </p:txBody>
-      </p:sp>
-      <p:sp>
-        <p:nvSpPr>
-          <p:cNvPr id="8" name="Rounded Rectangle 7"/>
-          <p:cNvSpPr/>
-          <p:nvPr/>
-        </p:nvSpPr>
-        <p:spPr>
-          <a:xfrm>
-            <a:off x="274320" y="3931920"/>
-            <a:ext cx="3657600" cy="1920240"/>
-          </a:xfrm>
-          <a:prstGeom prst="roundRect">
-            <a:avLst/>
-          </a:prstGeom>
-          <a:solidFill>
-            <a:srgbClr val="FFF3E0"/>
-          </a:solidFill>
-          <a:ln w="12700">
-            <a:solidFill>
-              <a:srgbClr val="F39C12"/>
-            </a:solidFill>
-          </a:ln>
-        </p:spPr>
-        <p:style>
-          <a:lnRef idx="1">
-            <a:schemeClr val="accent1"/>
-          </a:lnRef>
-          <a:fillRef idx="3">
-            <a:schemeClr val="accent1"/>
-          </a:fillRef>
-          <a:effectRef idx="2">
-            <a:schemeClr val="accent1"/>
-          </a:effectRef>
-          <a:fontRef idx="minor">
-            <a:schemeClr val="lt1"/>
-          </a:fontRef>
-        </p:style>
-        <p:txBody>
-          <a:bodyPr rtlCol="0" anchor="ctr" wrap="square" lIns="127000" rIns="127000" tIns="63500"/>
-          <a:lstStyle/>
-          <a:p>
-            <a:pPr algn="ctr">
-              <a:spcBef>
-                <a:spcPts val="300"/>
-              </a:spcBef>
-              <a:defRPr sz="1200">
+          </a:p>
+          <a:p>
+            <a:pPr>
+              <a:spcBef>
+                <a:spcPts val="1400"/>
+              </a:spcBef>
+              <a:defRPr sz="1800" b="1">
+                <a:solidFill>
+                  <a:srgbClr val="2E86DE"/>
+                </a:solidFill>
+              </a:defRPr>
+            </a:pPr>
+            <a:r>
+              <a:t>2. Căn lề là thông tin:</a:t>
+            </a:r>
+          </a:p>
+          <a:p>
+            <a:pPr>
+              <a:spcBef>
+                <a:spcPts val="500"/>
+              </a:spcBef>
+              <a:defRPr sz="1500">
                 <a:solidFill>
                   <a:srgbClr val="2C3E50"/>
                 </a:solidFill>
               </a:defRPr>
             </a:pPr>
             <a:r>
-              <a:t>• CTPN, TextBoxes++, SegLink</a:t>
-            </a:r>
-          </a:p>
-          <a:p>
-            <a:pPr>
-              <a:spcBef>
-                <a:spcPts val="300"/>
-              </a:spcBef>
-              <a:defRPr sz="1200">
+              <a:t>• Giá tiền căn phải, tên mặt hàng căn trái</a:t>
+            </a:r>
+          </a:p>
+          <a:p>
+            <a:pPr>
+              <a:spcBef>
+                <a:spcPts val="500"/>
+              </a:spcBef>
+              <a:defRPr sz="1500">
                 <a:solidFill>
                   <a:srgbClr val="2C3E50"/>
                 </a:solidFill>
               </a:defRPr>
             </a:pPr>
-            <a:r>
-              <a:t>• CNN-based với Anchor Boxes</a:t>
-            </a:r>
-          </a:p>
-          <a:p>
-            <a:pPr>
-              <a:spcBef>
-                <a:spcPts val="300"/>
-              </a:spcBef>
-              <a:defRPr sz="1200">
+          </a:p>
+          <a:p>
+            <a:pPr>
+              <a:spcBef>
+                <a:spcPts val="1400"/>
+              </a:spcBef>
+              <a:defRPr sz="1800" b="1">
+                <a:solidFill>
+                  <a:srgbClr val="2E86DE"/>
+                </a:solidFill>
+              </a:defRPr>
+            </a:pPr>
+            <a:r>
+              <a:t>3. Gần nhau → liên quan:</a:t>
+            </a:r>
+          </a:p>
+          <a:p>
+            <a:pPr>
+              <a:spcBef>
+                <a:spcPts val="500"/>
+              </a:spcBef>
+              <a:defRPr sz="1500">
                 <a:solidFill>
                   <a:srgbClr val="2C3E50"/>
                 </a:solidFill>
               </a:defRPr>
             </a:pPr>
             <a:r>
-              <a:t>• Khó phát hiện văn bản cong</a:t>
-            </a:r>
-          </a:p>
-        </p:txBody>
-      </p:sp>
-      <p:sp>
-        <p:nvSpPr>
-          <p:cNvPr id="9" name="Rounded Rectangle 8"/>
-          <p:cNvSpPr/>
-          <p:nvPr/>
-        </p:nvSpPr>
-        <p:spPr>
-          <a:xfrm>
-            <a:off x="4206240" y="1097280"/>
-            <a:ext cx="7680960" cy="365760"/>
-          </a:xfrm>
-          <a:prstGeom prst="roundRect">
-            <a:avLst/>
-          </a:prstGeom>
-          <a:solidFill>
-            <a:srgbClr val="2E86DE"/>
-          </a:solidFill>
-          <a:ln>
-            <a:noFill/>
-          </a:ln>
-        </p:spPr>
-        <p:style>
-          <a:lnRef idx="1">
-            <a:schemeClr val="accent1"/>
-          </a:lnRef>
-          <a:fillRef idx="3">
-            <a:schemeClr val="accent1"/>
-          </a:fillRef>
-          <a:effectRef idx="2">
-            <a:schemeClr val="accent1"/>
-          </a:effectRef>
-          <a:fontRef idx="minor">
-            <a:schemeClr val="lt1"/>
-          </a:fontRef>
-        </p:style>
-        <p:txBody>
-          <a:bodyPr rtlCol="0" anchor="ctr"/>
-          <a:lstStyle/>
-          <a:p>
-            <a:pPr algn="ctr">
-              <a:defRPr sz="1300" b="1">
-                <a:solidFill>
-                  <a:srgbClr val="FFFFFF"/>
-                </a:solidFill>
-              </a:defRPr>
-            </a:pPr>
-            <a:r>
-              <a:t>★ Thế hệ 3 (2018–nay) — DB</a:t>
-            </a:r>
-          </a:p>
-        </p:txBody>
-      </p:sp>
-      <p:sp>
-        <p:nvSpPr>
-          <p:cNvPr id="10" name="Rounded Rectangle 9"/>
-          <p:cNvSpPr/>
-          <p:nvPr/>
-        </p:nvSpPr>
-        <p:spPr>
-          <a:xfrm>
-            <a:off x="4206240" y="1463040"/>
-            <a:ext cx="7680960" cy="4389120"/>
-          </a:xfrm>
-          <a:prstGeom prst="roundRect">
-            <a:avLst/>
-          </a:prstGeom>
-          <a:solidFill>
-            <a:srgbClr val="D6EAF8"/>
-          </a:solidFill>
-          <a:ln w="12700">
-            <a:solidFill>
-              <a:srgbClr val="2E86DE"/>
-            </a:solidFill>
-          </a:ln>
-        </p:spPr>
-        <p:style>
-          <a:lnRef idx="1">
-            <a:schemeClr val="accent1"/>
-          </a:lnRef>
-          <a:fillRef idx="3">
-            <a:schemeClr val="accent1"/>
-          </a:fillRef>
-          <a:effectRef idx="2">
-            <a:schemeClr val="accent1"/>
-          </a:effectRef>
-          <a:fontRef idx="minor">
-            <a:schemeClr val="lt1"/>
-          </a:fontRef>
-        </p:style>
-        <p:txBody>
-          <a:bodyPr rtlCol="0" anchor="ctr" wrap="square" lIns="127000" rIns="127000" tIns="63500"/>
-          <a:lstStyle/>
-          <a:p>
-            <a:pPr algn="ctr">
-              <a:spcBef>
-                <a:spcPts val="300"/>
-              </a:spcBef>
-              <a:defRPr sz="1200">
+              <a:t>• "2 x 29,000" và "58,000" cùng dòng → cùng mặt hàng</a:t>
+            </a:r>
+          </a:p>
+          <a:p>
+            <a:pPr>
+              <a:spcBef>
+                <a:spcPts val="500"/>
+              </a:spcBef>
+              <a:defRPr sz="1500">
                 <a:solidFill>
                   <a:srgbClr val="2C3E50"/>
                 </a:solidFill>
               </a:defRPr>
             </a:pPr>
-            <a:r>
-              <a:t>• DB (Differentiable Binarization)</a:t>
-            </a:r>
-          </a:p>
-          <a:p>
-            <a:pPr>
-              <a:spcBef>
-                <a:spcPts val="300"/>
-              </a:spcBef>
-              <a:defRPr sz="1200">
+          </a:p>
+          <a:p>
+            <a:pPr>
+              <a:spcBef>
+                <a:spcPts val="1400"/>
+              </a:spcBef>
+              <a:defRPr sz="1800" b="1">
+                <a:solidFill>
+                  <a:srgbClr val="2E86DE"/>
+                </a:solidFill>
+              </a:defRPr>
+            </a:pPr>
+            <a:r>
+              <a:t>4. Pattern lặp lại trong vùng bảng:</a:t>
+            </a:r>
+          </a:p>
+          <a:p>
+            <a:pPr>
+              <a:spcBef>
+                <a:spcPts val="500"/>
+              </a:spcBef>
+              <a:defRPr sz="1500">
                 <a:solidFill>
                   <a:srgbClr val="2C3E50"/>
                 </a:solidFill>
               </a:defRPr>
             </a:pPr>
             <a:r>
-              <a:t>• Xương sống của PaddleOCR</a:t>
-            </a:r>
-          </a:p>
-          <a:p>
-            <a:pPr>
-              <a:spcBef>
-                <a:spcPts val="300"/>
-              </a:spcBef>
-              <a:defRPr sz="1200">
-                <a:solidFill>
-                  <a:srgbClr val="2C3E50"/>
-                </a:solidFill>
-              </a:defRPr>
-            </a:pPr>
-            <a:r>
-              <a:t>• Dự đoán probability map per pixel</a:t>
-            </a:r>
-          </a:p>
-          <a:p>
-            <a:pPr>
-              <a:spcBef>
-                <a:spcPts val="300"/>
-              </a:spcBef>
-              <a:defRPr sz="1200">
-                <a:solidFill>
-                  <a:srgbClr val="2C3E50"/>
-                </a:solidFill>
-              </a:defRPr>
-            </a:pPr>
-            <a:r>
-              <a:t>• Ngưỡng có thể học được (differentiable threshold)</a:t>
-            </a:r>
-          </a:p>
-          <a:p>
-            <a:pPr>
-              <a:spcBef>
-                <a:spcPts val="300"/>
-              </a:spcBef>
-              <a:defRPr sz="1200">
-                <a:solidFill>
-                  <a:srgbClr val="2C3E50"/>
-                </a:solidFill>
-              </a:defRPr>
-            </a:pPr>
-            <a:r>
-              <a:t>• Tối ưu cho CPU/mobile</a:t>
+              <a:t>• 5 dòng có cấu trúc [tên | số | số] → bảng mặt hàng</a:t>
             </a:r>
           </a:p>
         </p:txBody>
@@ -3980,9 +4167,6 @@
   <p:clrMapOvr>
     <a:masterClrMapping/>
   </p:clrMapOvr>
-  <p:transition spd="med" advTm="800">
-    <p:fade/>
-  </p:transition>
 </p:sld>
 </file>
 
@@ -4086,7 +4270,7 @@
               </a:defRPr>
             </a:pPr>
             <a:r>
-              <a:t>Trích xuất Hóa đơn Tiếng Việt — Pipeline PaddleOCR • VietOCR • LayoutLMv3</a:t>
+              <a:t>Trích xuất Hóa đơn Tiếng Việt — PaddleOCR • VietOCR • LayoutLMv3</a:t>
             </a:r>
           </a:p>
         </p:txBody>
@@ -4121,1617 +4305,7 @@
               </a:defRPr>
             </a:pPr>
             <a:r>
-              <a:t>TEXT RECOGNITION — Từ template matching đến Attention</a:t>
-            </a:r>
-          </a:p>
-        </p:txBody>
-      </p:sp>
-      <p:sp>
-        <p:nvSpPr>
-          <p:cNvPr id="5" name="Rounded Rectangle 4"/>
-          <p:cNvSpPr/>
-          <p:nvPr/>
-        </p:nvSpPr>
-        <p:spPr>
-          <a:xfrm>
-            <a:off x="274320" y="1097280"/>
-            <a:ext cx="3657600" cy="365760"/>
-          </a:xfrm>
-          <a:prstGeom prst="roundRect">
-            <a:avLst/>
-          </a:prstGeom>
-          <a:solidFill>
-            <a:srgbClr val="7F8C8D"/>
-          </a:solidFill>
-          <a:ln>
-            <a:noFill/>
-          </a:ln>
-        </p:spPr>
-        <p:style>
-          <a:lnRef idx="1">
-            <a:schemeClr val="accent1"/>
-          </a:lnRef>
-          <a:fillRef idx="3">
-            <a:schemeClr val="accent1"/>
-          </a:fillRef>
-          <a:effectRef idx="2">
-            <a:schemeClr val="accent1"/>
-          </a:effectRef>
-          <a:fontRef idx="minor">
-            <a:schemeClr val="lt1"/>
-          </a:fontRef>
-        </p:style>
-        <p:txBody>
-          <a:bodyPr rtlCol="0" anchor="ctr"/>
-          <a:lstStyle/>
-          <a:p>
-            <a:pPr algn="ctr">
-              <a:defRPr sz="1300" b="1">
-                <a:solidFill>
-                  <a:srgbClr val="FFFFFF"/>
-                </a:solidFill>
-              </a:defRPr>
-            </a:pPr>
-            <a:r>
-              <a:t>Thế hệ 1 (trước 2014)</a:t>
-            </a:r>
-          </a:p>
-        </p:txBody>
-      </p:sp>
-      <p:sp>
-        <p:nvSpPr>
-          <p:cNvPr id="6" name="Rounded Rectangle 5"/>
-          <p:cNvSpPr/>
-          <p:nvPr/>
-        </p:nvSpPr>
-        <p:spPr>
-          <a:xfrm>
-            <a:off x="274320" y="1463040"/>
-            <a:ext cx="3657600" cy="1920240"/>
-          </a:xfrm>
-          <a:prstGeom prst="roundRect">
-            <a:avLst/>
-          </a:prstGeom>
-          <a:solidFill>
-            <a:srgbClr val="F5F5F5"/>
-          </a:solidFill>
-          <a:ln w="12700">
-            <a:solidFill>
-              <a:srgbClr val="7F8C8D"/>
-            </a:solidFill>
-          </a:ln>
-        </p:spPr>
-        <p:style>
-          <a:lnRef idx="1">
-            <a:schemeClr val="accent1"/>
-          </a:lnRef>
-          <a:fillRef idx="3">
-            <a:schemeClr val="accent1"/>
-          </a:fillRef>
-          <a:effectRef idx="2">
-            <a:schemeClr val="accent1"/>
-          </a:effectRef>
-          <a:fontRef idx="minor">
-            <a:schemeClr val="lt1"/>
-          </a:fontRef>
-        </p:style>
-        <p:txBody>
-          <a:bodyPr rtlCol="0" anchor="ctr" wrap="square" lIns="127000" rIns="127000" tIns="63500"/>
-          <a:lstStyle/>
-          <a:p>
-            <a:pPr algn="ctr">
-              <a:spcBef>
-                <a:spcPts val="300"/>
-              </a:spcBef>
-              <a:defRPr sz="1200">
-                <a:solidFill>
-                  <a:srgbClr val="2C3E50"/>
-                </a:solidFill>
-              </a:defRPr>
-            </a:pPr>
-            <a:r>
-              <a:t>• Tesseract v3, template matching</a:t>
-            </a:r>
-          </a:p>
-          <a:p>
-            <a:pPr>
-              <a:spcBef>
-                <a:spcPts val="300"/>
-              </a:spcBef>
-              <a:defRPr sz="1200">
-                <a:solidFill>
-                  <a:srgbClr val="2C3E50"/>
-                </a:solidFill>
-              </a:defRPr>
-            </a:pPr>
-            <a:r>
-              <a:t>• Tách từng ký tự</a:t>
-            </a:r>
-          </a:p>
-          <a:p>
-            <a:pPr>
-              <a:spcBef>
-                <a:spcPts val="300"/>
-              </a:spcBef>
-              <a:defRPr sz="1200">
-                <a:solidFill>
-                  <a:srgbClr val="2C3E50"/>
-                </a:solidFill>
-              </a:defRPr>
-            </a:pPr>
-            <a:r>
-              <a:t>• Yêu cầu font rõ ràng</a:t>
-            </a:r>
-          </a:p>
-        </p:txBody>
-      </p:sp>
-      <p:sp>
-        <p:nvSpPr>
-          <p:cNvPr id="7" name="Rounded Rectangle 6"/>
-          <p:cNvSpPr/>
-          <p:nvPr/>
-        </p:nvSpPr>
-        <p:spPr>
-          <a:xfrm>
-            <a:off x="274320" y="3566160"/>
-            <a:ext cx="3657600" cy="365760"/>
-          </a:xfrm>
-          <a:prstGeom prst="roundRect">
-            <a:avLst/>
-          </a:prstGeom>
-          <a:solidFill>
-            <a:srgbClr val="F39C12"/>
-          </a:solidFill>
-          <a:ln>
-            <a:noFill/>
-          </a:ln>
-        </p:spPr>
-        <p:style>
-          <a:lnRef idx="1">
-            <a:schemeClr val="accent1"/>
-          </a:lnRef>
-          <a:fillRef idx="3">
-            <a:schemeClr val="accent1"/>
-          </a:fillRef>
-          <a:effectRef idx="2">
-            <a:schemeClr val="accent1"/>
-          </a:effectRef>
-          <a:fontRef idx="minor">
-            <a:schemeClr val="lt1"/>
-          </a:fontRef>
-        </p:style>
-        <p:txBody>
-          <a:bodyPr rtlCol="0" anchor="ctr"/>
-          <a:lstStyle/>
-          <a:p>
-            <a:pPr algn="ctr">
-              <a:defRPr sz="1300" b="1">
-                <a:solidFill>
-                  <a:srgbClr val="FFFFFF"/>
-                </a:solidFill>
-              </a:defRPr>
-            </a:pPr>
-            <a:r>
-              <a:t>Thế hệ 2 (2015–2018)</a:t>
-            </a:r>
-          </a:p>
-        </p:txBody>
-      </p:sp>
-      <p:sp>
-        <p:nvSpPr>
-          <p:cNvPr id="8" name="Rounded Rectangle 7"/>
-          <p:cNvSpPr/>
-          <p:nvPr/>
-        </p:nvSpPr>
-        <p:spPr>
-          <a:xfrm>
-            <a:off x="274320" y="3931920"/>
-            <a:ext cx="3657600" cy="1920240"/>
-          </a:xfrm>
-          <a:prstGeom prst="roundRect">
-            <a:avLst/>
-          </a:prstGeom>
-          <a:solidFill>
-            <a:srgbClr val="FFF3E0"/>
-          </a:solidFill>
-          <a:ln w="12700">
-            <a:solidFill>
-              <a:srgbClr val="F39C12"/>
-            </a:solidFill>
-          </a:ln>
-        </p:spPr>
-        <p:style>
-          <a:lnRef idx="1">
-            <a:schemeClr val="accent1"/>
-          </a:lnRef>
-          <a:fillRef idx="3">
-            <a:schemeClr val="accent1"/>
-          </a:fillRef>
-          <a:effectRef idx="2">
-            <a:schemeClr val="accent1"/>
-          </a:effectRef>
-          <a:fontRef idx="minor">
-            <a:schemeClr val="lt1"/>
-          </a:fontRef>
-        </p:style>
-        <p:txBody>
-          <a:bodyPr rtlCol="0" anchor="ctr" wrap="square" lIns="127000" rIns="127000" tIns="63500"/>
-          <a:lstStyle/>
-          <a:p>
-            <a:pPr algn="ctr">
-              <a:spcBef>
-                <a:spcPts val="300"/>
-              </a:spcBef>
-              <a:defRPr sz="1200">
-                <a:solidFill>
-                  <a:srgbClr val="2C3E50"/>
-                </a:solidFill>
-              </a:defRPr>
-            </a:pPr>
-            <a:r>
-              <a:t>• CRNN + CTC</a:t>
-            </a:r>
-          </a:p>
-          <a:p>
-            <a:pPr>
-              <a:spcBef>
-                <a:spcPts val="300"/>
-              </a:spcBef>
-              <a:defRPr sz="1200">
-                <a:solidFill>
-                  <a:srgbClr val="2C3E50"/>
-                </a:solidFill>
-              </a:defRPr>
-            </a:pPr>
-            <a:r>
-              <a:t>• CNN + BiLSTM + CTC loss</a:t>
-            </a:r>
-          </a:p>
-          <a:p>
-            <a:pPr>
-              <a:spcBef>
-                <a:spcPts val="300"/>
-              </a:spcBef>
-              <a:defRPr sz="1200">
-                <a:solidFill>
-                  <a:srgbClr val="2C3E50"/>
-                </a:solidFill>
-              </a:defRPr>
-            </a:pPr>
-            <a:r>
-              <a:t>• Nền tảng OCR hiện đại</a:t>
-            </a:r>
-          </a:p>
-        </p:txBody>
-      </p:sp>
-      <p:sp>
-        <p:nvSpPr>
-          <p:cNvPr id="9" name="Rounded Rectangle 8"/>
-          <p:cNvSpPr/>
-          <p:nvPr/>
-        </p:nvSpPr>
-        <p:spPr>
-          <a:xfrm>
-            <a:off x="4206240" y="1097280"/>
-            <a:ext cx="7680960" cy="365760"/>
-          </a:xfrm>
-          <a:prstGeom prst="roundRect">
-            <a:avLst/>
-          </a:prstGeom>
-          <a:solidFill>
-            <a:srgbClr val="2E86DE"/>
-          </a:solidFill>
-          <a:ln>
-            <a:noFill/>
-          </a:ln>
-        </p:spPr>
-        <p:style>
-          <a:lnRef idx="1">
-            <a:schemeClr val="accent1"/>
-          </a:lnRef>
-          <a:fillRef idx="3">
-            <a:schemeClr val="accent1"/>
-          </a:fillRef>
-          <a:effectRef idx="2">
-            <a:schemeClr val="accent1"/>
-          </a:effectRef>
-          <a:fontRef idx="minor">
-            <a:schemeClr val="lt1"/>
-          </a:fontRef>
-        </p:style>
-        <p:txBody>
-          <a:bodyPr rtlCol="0" anchor="ctr"/>
-          <a:lstStyle/>
-          <a:p>
-            <a:pPr algn="ctr">
-              <a:defRPr sz="1300" b="1">
-                <a:solidFill>
-                  <a:srgbClr val="FFFFFF"/>
-                </a:solidFill>
-              </a:defRPr>
-            </a:pPr>
-            <a:r>
-              <a:t>★ Thế hệ 3 (2018–nay) — VietOCR</a:t>
-            </a:r>
-          </a:p>
-        </p:txBody>
-      </p:sp>
-      <p:sp>
-        <p:nvSpPr>
-          <p:cNvPr id="10" name="Rounded Rectangle 9"/>
-          <p:cNvSpPr/>
-          <p:nvPr/>
-        </p:nvSpPr>
-        <p:spPr>
-          <a:xfrm>
-            <a:off x="4206240" y="1463040"/>
-            <a:ext cx="7680960" cy="4389120"/>
-          </a:xfrm>
-          <a:prstGeom prst="roundRect">
-            <a:avLst/>
-          </a:prstGeom>
-          <a:solidFill>
-            <a:srgbClr val="D6EAF8"/>
-          </a:solidFill>
-          <a:ln w="12700">
-            <a:solidFill>
-              <a:srgbClr val="2E86DE"/>
-            </a:solidFill>
-          </a:ln>
-        </p:spPr>
-        <p:style>
-          <a:lnRef idx="1">
-            <a:schemeClr val="accent1"/>
-          </a:lnRef>
-          <a:fillRef idx="3">
-            <a:schemeClr val="accent1"/>
-          </a:fillRef>
-          <a:effectRef idx="2">
-            <a:schemeClr val="accent1"/>
-          </a:effectRef>
-          <a:fontRef idx="minor">
-            <a:schemeClr val="lt1"/>
-          </a:fontRef>
-        </p:style>
-        <p:txBody>
-          <a:bodyPr rtlCol="0" anchor="ctr" wrap="square" lIns="127000" rIns="127000" tIns="63500"/>
-          <a:lstStyle/>
-          <a:p>
-            <a:pPr algn="ctr">
-              <a:spcBef>
-                <a:spcPts val="300"/>
-              </a:spcBef>
-              <a:defRPr sz="1200">
-                <a:solidFill>
-                  <a:srgbClr val="2C3E50"/>
-                </a:solidFill>
-              </a:defRPr>
-            </a:pPr>
-            <a:r>
-              <a:t>• Seq2Seq + Attention</a:t>
-            </a:r>
-          </a:p>
-          <a:p>
-            <a:pPr>
-              <a:spcBef>
-                <a:spcPts val="300"/>
-              </a:spcBef>
-              <a:defRPr sz="1200">
-                <a:solidFill>
-                  <a:srgbClr val="2C3E50"/>
-                </a:solidFill>
-              </a:defRPr>
-            </a:pPr>
-            <a:r>
-              <a:t>• VGG/ResNet encoder + Transformer decoder</a:t>
-            </a:r>
-          </a:p>
-          <a:p>
-            <a:pPr>
-              <a:spcBef>
-                <a:spcPts val="300"/>
-              </a:spcBef>
-              <a:defRPr sz="1200">
-                <a:solidFill>
-                  <a:srgbClr val="2C3E50"/>
-                </a:solidFill>
-              </a:defRPr>
-            </a:pPr>
-            <a:r>
-              <a:t>• Xử lý dấu thanh tiếng Việt tốt hơn</a:t>
-            </a:r>
-          </a:p>
-          <a:p>
-            <a:pPr>
-              <a:spcBef>
-                <a:spcPts val="300"/>
-              </a:spcBef>
-              <a:defRPr sz="1200">
-                <a:solidFill>
-                  <a:srgbClr val="2C3E50"/>
-                </a:solidFill>
-              </a:defRPr>
-            </a:pPr>
-            <a:r>
-              <a:t>• Pretrain trên 5M+ ảnh text tiếng Việt</a:t>
-            </a:r>
-          </a:p>
-          <a:p>
-            <a:pPr>
-              <a:spcBef>
-                <a:spcPts val="300"/>
-              </a:spcBef>
-              <a:defRPr sz="1200">
-                <a:solidFill>
-                  <a:srgbClr val="2C3E50"/>
-                </a:solidFill>
-              </a:defRPr>
-            </a:pPr>
-            <a:r>
-              <a:t>• 60+ font chữ thông dụng</a:t>
-            </a:r>
-          </a:p>
-        </p:txBody>
-      </p:sp>
-    </p:spTree>
-  </p:cSld>
-  <p:clrMapOvr>
-    <a:masterClrMapping/>
-  </p:clrMapOvr>
-  <p:transition spd="med" advTm="800">
-    <p:fade/>
-  </p:transition>
-</p:sld>
-</file>
-
-<file path=ppt/slides/slide13.xml><?xml version="1.0" encoding="utf-8"?>
-<p:sld xmlns:a="http://schemas.openxmlformats.org/drawingml/2006/main" xmlns:p="http://schemas.openxmlformats.org/presentationml/2006/main" xmlns:r="http://schemas.openxmlformats.org/officeDocument/2006/relationships">
-  <p:cSld>
-    <p:spTree>
-      <p:nvGrpSpPr>
-        <p:cNvPr id="1" name=""/>
-        <p:cNvGrpSpPr/>
-        <p:nvPr/>
-      </p:nvGrpSpPr>
-      <p:grpSpPr/>
-      <p:sp>
-        <p:nvSpPr>
-          <p:cNvPr id="2" name="Rectangle 1"/>
-          <p:cNvSpPr/>
-          <p:nvPr/>
-        </p:nvSpPr>
-        <p:spPr>
-          <a:xfrm>
-            <a:off x="0" y="0"/>
-            <a:ext cx="12191695" cy="54864"/>
-          </a:xfrm>
-          <a:prstGeom prst="rect">
-            <a:avLst/>
-          </a:prstGeom>
-          <a:solidFill>
-            <a:srgbClr val="2E86DE"/>
-          </a:solidFill>
-          <a:ln>
-            <a:noFill/>
-          </a:ln>
-        </p:spPr>
-        <p:style>
-          <a:lnRef idx="1">
-            <a:schemeClr val="accent1"/>
-          </a:lnRef>
-          <a:fillRef idx="3">
-            <a:schemeClr val="accent1"/>
-          </a:fillRef>
-          <a:effectRef idx="2">
-            <a:schemeClr val="accent1"/>
-          </a:effectRef>
-          <a:fontRef idx="minor">
-            <a:schemeClr val="lt1"/>
-          </a:fontRef>
-        </p:style>
-        <p:txBody>
-          <a:bodyPr rtlCol="0" anchor="ctr"/>
-          <a:lstStyle/>
-          <a:p>
-            <a:pPr algn="ctr"/>
-          </a:p>
-        </p:txBody>
-      </p:sp>
-      <p:sp>
-        <p:nvSpPr>
-          <p:cNvPr id="3" name="Rectangle 2"/>
-          <p:cNvSpPr/>
-          <p:nvPr/>
-        </p:nvSpPr>
-        <p:spPr>
-          <a:xfrm>
-            <a:off x="0" y="6492240"/>
-            <a:ext cx="12191695" cy="365760"/>
-          </a:xfrm>
-          <a:prstGeom prst="rect">
-            <a:avLst/>
-          </a:prstGeom>
-          <a:solidFill>
-            <a:srgbClr val="1B2A4A"/>
-          </a:solidFill>
-          <a:ln>
-            <a:noFill/>
-          </a:ln>
-        </p:spPr>
-        <p:style>
-          <a:lnRef idx="1">
-            <a:schemeClr val="accent1"/>
-          </a:lnRef>
-          <a:fillRef idx="3">
-            <a:schemeClr val="accent1"/>
-          </a:fillRef>
-          <a:effectRef idx="2">
-            <a:schemeClr val="accent1"/>
-          </a:effectRef>
-          <a:fontRef idx="minor">
-            <a:schemeClr val="lt1"/>
-          </a:fontRef>
-        </p:style>
-        <p:txBody>
-          <a:bodyPr rtlCol="0" anchor="ctr"/>
-          <a:lstStyle/>
-          <a:p>
-            <a:pPr algn="ctr">
-              <a:defRPr sz="1000">
-                <a:solidFill>
-                  <a:srgbClr val="FFFFFF"/>
-                </a:solidFill>
-              </a:defRPr>
-            </a:pPr>
-            <a:r>
-              <a:t>Trích xuất Hóa đơn Tiếng Việt — Pipeline PaddleOCR • VietOCR • LayoutLMv3</a:t>
-            </a:r>
-          </a:p>
-        </p:txBody>
-      </p:sp>
-      <p:sp>
-        <p:nvSpPr>
-          <p:cNvPr id="4" name="TextBox 3"/>
-          <p:cNvSpPr txBox="1"/>
-          <p:nvPr/>
-        </p:nvSpPr>
-        <p:spPr>
-          <a:xfrm>
-            <a:off x="457200" y="137160"/>
-            <a:ext cx="10972800" cy="731520"/>
-          </a:xfrm>
-          <a:prstGeom prst="rect">
-            <a:avLst/>
-          </a:prstGeom>
-          <a:noFill/>
-        </p:spPr>
-        <p:txBody>
-          <a:bodyPr wrap="none">
-            <a:spAutoFit/>
-          </a:bodyPr>
-          <a:lstStyle/>
-          <a:p>
-            <a:pPr>
-              <a:defRPr sz="2600" b="1">
-                <a:solidFill>
-                  <a:srgbClr val="1B2A4A"/>
-                </a:solidFill>
-              </a:defRPr>
-            </a:pPr>
-            <a:r>
-              <a:t>KEY INFORMATION EXTRACTION — Từ rule-based đến Multi-modal</a:t>
-            </a:r>
-          </a:p>
-        </p:txBody>
-      </p:sp>
-      <p:sp>
-        <p:nvSpPr>
-          <p:cNvPr id="5" name="Rounded Rectangle 4"/>
-          <p:cNvSpPr/>
-          <p:nvPr/>
-        </p:nvSpPr>
-        <p:spPr>
-          <a:xfrm>
-            <a:off x="274320" y="1097280"/>
-            <a:ext cx="3657600" cy="365760"/>
-          </a:xfrm>
-          <a:prstGeom prst="roundRect">
-            <a:avLst/>
-          </a:prstGeom>
-          <a:solidFill>
-            <a:srgbClr val="7F8C8D"/>
-          </a:solidFill>
-          <a:ln>
-            <a:noFill/>
-          </a:ln>
-        </p:spPr>
-        <p:style>
-          <a:lnRef idx="1">
-            <a:schemeClr val="accent1"/>
-          </a:lnRef>
-          <a:fillRef idx="3">
-            <a:schemeClr val="accent1"/>
-          </a:fillRef>
-          <a:effectRef idx="2">
-            <a:schemeClr val="accent1"/>
-          </a:effectRef>
-          <a:fontRef idx="minor">
-            <a:schemeClr val="lt1"/>
-          </a:fontRef>
-        </p:style>
-        <p:txBody>
-          <a:bodyPr rtlCol="0" anchor="ctr"/>
-          <a:lstStyle/>
-          <a:p>
-            <a:pPr algn="ctr">
-              <a:defRPr sz="1300" b="1">
-                <a:solidFill>
-                  <a:srgbClr val="FFFFFF"/>
-                </a:solidFill>
-              </a:defRPr>
-            </a:pPr>
-            <a:r>
-              <a:t>Thế hệ 1 — Rule-based</a:t>
-            </a:r>
-          </a:p>
-        </p:txBody>
-      </p:sp>
-      <p:sp>
-        <p:nvSpPr>
-          <p:cNvPr id="6" name="Rounded Rectangle 5"/>
-          <p:cNvSpPr/>
-          <p:nvPr/>
-        </p:nvSpPr>
-        <p:spPr>
-          <a:xfrm>
-            <a:off x="274320" y="1463040"/>
-            <a:ext cx="3657600" cy="1920240"/>
-          </a:xfrm>
-          <a:prstGeom prst="roundRect">
-            <a:avLst/>
-          </a:prstGeom>
-          <a:solidFill>
-            <a:srgbClr val="F5F5F5"/>
-          </a:solidFill>
-          <a:ln w="12700">
-            <a:solidFill>
-              <a:srgbClr val="7F8C8D"/>
-            </a:solidFill>
-          </a:ln>
-        </p:spPr>
-        <p:style>
-          <a:lnRef idx="1">
-            <a:schemeClr val="accent1"/>
-          </a:lnRef>
-          <a:fillRef idx="3">
-            <a:schemeClr val="accent1"/>
-          </a:fillRef>
-          <a:effectRef idx="2">
-            <a:schemeClr val="accent1"/>
-          </a:effectRef>
-          <a:fontRef idx="minor">
-            <a:schemeClr val="lt1"/>
-          </a:fontRef>
-        </p:style>
-        <p:txBody>
-          <a:bodyPr rtlCol="0" anchor="ctr" wrap="square" lIns="127000" rIns="127000" tIns="63500"/>
-          <a:lstStyle/>
-          <a:p>
-            <a:pPr algn="ctr">
-              <a:spcBef>
-                <a:spcPts val="300"/>
-              </a:spcBef>
-              <a:defRPr sz="1200">
-                <a:solidFill>
-                  <a:srgbClr val="2C3E50"/>
-                </a:solidFill>
-              </a:defRPr>
-            </a:pPr>
-            <a:r>
-              <a:t>• Regex, heuristic</a:t>
-            </a:r>
-          </a:p>
-          <a:p>
-            <a:pPr>
-              <a:spcBef>
-                <a:spcPts val="300"/>
-              </a:spcBef>
-              <a:defRPr sz="1200">
-                <a:solidFill>
-                  <a:srgbClr val="2C3E50"/>
-                </a:solidFill>
-              </a:defRPr>
-            </a:pPr>
-            <a:r>
-              <a:t>• Nhanh, không cần training</a:t>
-            </a:r>
-          </a:p>
-          <a:p>
-            <a:pPr>
-              <a:spcBef>
-                <a:spcPts val="300"/>
-              </a:spcBef>
-              <a:defRPr sz="1200">
-                <a:solidFill>
-                  <a:srgbClr val="2C3E50"/>
-                </a:solidFill>
-              </a:defRPr>
-            </a:pPr>
-            <a:r>
-              <a:t>• Vỡ ngay khi gặp format mới</a:t>
-            </a:r>
-          </a:p>
-        </p:txBody>
-      </p:sp>
-      <p:sp>
-        <p:nvSpPr>
-          <p:cNvPr id="7" name="Rounded Rectangle 6"/>
-          <p:cNvSpPr/>
-          <p:nvPr/>
-        </p:nvSpPr>
-        <p:spPr>
-          <a:xfrm>
-            <a:off x="274320" y="3566160"/>
-            <a:ext cx="3657600" cy="365760"/>
-          </a:xfrm>
-          <a:prstGeom prst="roundRect">
-            <a:avLst/>
-          </a:prstGeom>
-          <a:solidFill>
-            <a:srgbClr val="F39C12"/>
-          </a:solidFill>
-          <a:ln>
-            <a:noFill/>
-          </a:ln>
-        </p:spPr>
-        <p:style>
-          <a:lnRef idx="1">
-            <a:schemeClr val="accent1"/>
-          </a:lnRef>
-          <a:fillRef idx="3">
-            <a:schemeClr val="accent1"/>
-          </a:fillRef>
-          <a:effectRef idx="2">
-            <a:schemeClr val="accent1"/>
-          </a:effectRef>
-          <a:fontRef idx="minor">
-            <a:schemeClr val="lt1"/>
-          </a:fontRef>
-        </p:style>
-        <p:txBody>
-          <a:bodyPr rtlCol="0" anchor="ctr"/>
-          <a:lstStyle/>
-          <a:p>
-            <a:pPr algn="ctr">
-              <a:defRPr sz="1300" b="1">
-                <a:solidFill>
-                  <a:srgbClr val="FFFFFF"/>
-                </a:solidFill>
-              </a:defRPr>
-            </a:pPr>
-            <a:r>
-              <a:t>Thế hệ 2 — BERT NER</a:t>
-            </a:r>
-          </a:p>
-        </p:txBody>
-      </p:sp>
-      <p:sp>
-        <p:nvSpPr>
-          <p:cNvPr id="8" name="Rounded Rectangle 7"/>
-          <p:cNvSpPr/>
-          <p:nvPr/>
-        </p:nvSpPr>
-        <p:spPr>
-          <a:xfrm>
-            <a:off x="274320" y="3931920"/>
-            <a:ext cx="3657600" cy="1920240"/>
-          </a:xfrm>
-          <a:prstGeom prst="roundRect">
-            <a:avLst/>
-          </a:prstGeom>
-          <a:solidFill>
-            <a:srgbClr val="FFF3E0"/>
-          </a:solidFill>
-          <a:ln w="12700">
-            <a:solidFill>
-              <a:srgbClr val="F39C12"/>
-            </a:solidFill>
-          </a:ln>
-        </p:spPr>
-        <p:style>
-          <a:lnRef idx="1">
-            <a:schemeClr val="accent1"/>
-          </a:lnRef>
-          <a:fillRef idx="3">
-            <a:schemeClr val="accent1"/>
-          </a:fillRef>
-          <a:effectRef idx="2">
-            <a:schemeClr val="accent1"/>
-          </a:effectRef>
-          <a:fontRef idx="minor">
-            <a:schemeClr val="lt1"/>
-          </a:fontRef>
-        </p:style>
-        <p:txBody>
-          <a:bodyPr rtlCol="0" anchor="ctr" wrap="square" lIns="127000" rIns="127000" tIns="63500"/>
-          <a:lstStyle/>
-          <a:p>
-            <a:pPr algn="ctr">
-              <a:spcBef>
-                <a:spcPts val="300"/>
-              </a:spcBef>
-              <a:defRPr sz="1200">
-                <a:solidFill>
-                  <a:srgbClr val="2C3E50"/>
-                </a:solidFill>
-              </a:defRPr>
-            </a:pPr>
-            <a:r>
-              <a:t>• Token classification</a:t>
-            </a:r>
-          </a:p>
-          <a:p>
-            <a:pPr>
-              <a:spcBef>
-                <a:spcPts val="300"/>
-              </a:spcBef>
-              <a:defRPr sz="1200">
-                <a:solidFill>
-                  <a:srgbClr val="2C3E50"/>
-                </a:solidFill>
-              </a:defRPr>
-            </a:pPr>
-            <a:r>
-              <a:t>• Bỏ qua thông tin vị trí không gian</a:t>
-            </a:r>
-          </a:p>
-        </p:txBody>
-      </p:sp>
-      <p:sp>
-        <p:nvSpPr>
-          <p:cNvPr id="9" name="Rounded Rectangle 8"/>
-          <p:cNvSpPr/>
-          <p:nvPr/>
-        </p:nvSpPr>
-        <p:spPr>
-          <a:xfrm>
-            <a:off x="4206240" y="1097280"/>
-            <a:ext cx="7680960" cy="365760"/>
-          </a:xfrm>
-          <a:prstGeom prst="roundRect">
-            <a:avLst/>
-          </a:prstGeom>
-          <a:solidFill>
-            <a:srgbClr val="2E86DE"/>
-          </a:solidFill>
-          <a:ln>
-            <a:noFill/>
-          </a:ln>
-        </p:spPr>
-        <p:style>
-          <a:lnRef idx="1">
-            <a:schemeClr val="accent1"/>
-          </a:lnRef>
-          <a:fillRef idx="3">
-            <a:schemeClr val="accent1"/>
-          </a:fillRef>
-          <a:effectRef idx="2">
-            <a:schemeClr val="accent1"/>
-          </a:effectRef>
-          <a:fontRef idx="minor">
-            <a:schemeClr val="lt1"/>
-          </a:fontRef>
-        </p:style>
-        <p:txBody>
-          <a:bodyPr rtlCol="0" anchor="ctr"/>
-          <a:lstStyle/>
-          <a:p>
-            <a:pPr algn="ctr">
-              <a:defRPr sz="1300" b="1">
-                <a:solidFill>
-                  <a:srgbClr val="FFFFFF"/>
-                </a:solidFill>
-              </a:defRPr>
-            </a:pPr>
-            <a:r>
-              <a:t>★ Thế hệ 3 — LayoutLMv3 (Microsoft, 2022)</a:t>
-            </a:r>
-          </a:p>
-        </p:txBody>
-      </p:sp>
-      <p:sp>
-        <p:nvSpPr>
-          <p:cNvPr id="10" name="Rounded Rectangle 9"/>
-          <p:cNvSpPr/>
-          <p:nvPr/>
-        </p:nvSpPr>
-        <p:spPr>
-          <a:xfrm>
-            <a:off x="4206240" y="1463040"/>
-            <a:ext cx="7680960" cy="4389120"/>
-          </a:xfrm>
-          <a:prstGeom prst="roundRect">
-            <a:avLst/>
-          </a:prstGeom>
-          <a:solidFill>
-            <a:srgbClr val="D6EAF8"/>
-          </a:solidFill>
-          <a:ln w="12700">
-            <a:solidFill>
-              <a:srgbClr val="2E86DE"/>
-            </a:solidFill>
-          </a:ln>
-        </p:spPr>
-        <p:style>
-          <a:lnRef idx="1">
-            <a:schemeClr val="accent1"/>
-          </a:lnRef>
-          <a:fillRef idx="3">
-            <a:schemeClr val="accent1"/>
-          </a:fillRef>
-          <a:effectRef idx="2">
-            <a:schemeClr val="accent1"/>
-          </a:effectRef>
-          <a:fontRef idx="minor">
-            <a:schemeClr val="lt1"/>
-          </a:fontRef>
-        </p:style>
-        <p:txBody>
-          <a:bodyPr rtlCol="0" anchor="ctr" wrap="square" lIns="127000" rIns="127000" tIns="63500"/>
-          <a:lstStyle/>
-          <a:p>
-            <a:pPr algn="ctr">
-              <a:spcBef>
-                <a:spcPts val="300"/>
-              </a:spcBef>
-              <a:defRPr sz="1200">
-                <a:solidFill>
-                  <a:srgbClr val="2C3E50"/>
-                </a:solidFill>
-              </a:defRPr>
-            </a:pPr>
-            <a:r>
-              <a:t>• Kết hợp 3 nguồn: text OCR + bbox + patch ảnh</a:t>
-            </a:r>
-          </a:p>
-          <a:p>
-            <a:pPr>
-              <a:spcBef>
-                <a:spcPts val="300"/>
-              </a:spcBef>
-              <a:defRPr sz="1200">
-                <a:solidFill>
-                  <a:srgbClr val="2C3E50"/>
-                </a:solidFill>
-              </a:defRPr>
-            </a:pPr>
-            <a:r>
-              <a:t>• Unified self-attention qua cả 3 modality</a:t>
-            </a:r>
-          </a:p>
-          <a:p>
-            <a:pPr>
-              <a:spcBef>
-                <a:spcPts val="300"/>
-              </a:spcBef>
-              <a:defRPr sz="1200">
-                <a:solidFill>
-                  <a:srgbClr val="2C3E50"/>
-                </a:solidFill>
-              </a:defRPr>
-            </a:pPr>
-            <a:r>
-              <a:t>• Pre-training: MLM + MIM + Text-Image Alignment</a:t>
-            </a:r>
-          </a:p>
-          <a:p>
-            <a:pPr>
-              <a:spcBef>
-                <a:spcPts val="300"/>
-              </a:spcBef>
-              <a:defRPr sz="1200">
-                <a:solidFill>
-                  <a:srgbClr val="2C3E50"/>
-                </a:solidFill>
-              </a:defRPr>
-            </a:pPr>
-            <a:r>
-              <a:t>• Đột phá cho Document AI</a:t>
-            </a:r>
-          </a:p>
-        </p:txBody>
-      </p:sp>
-    </p:spTree>
-  </p:cSld>
-  <p:clrMapOvr>
-    <a:masterClrMapping/>
-  </p:clrMapOvr>
-  <p:transition spd="med" advTm="800">
-    <p:fade/>
-  </p:transition>
-</p:sld>
-</file>
-
-<file path=ppt/slides/slide14.xml><?xml version="1.0" encoding="utf-8"?>
-<p:sld xmlns:a="http://schemas.openxmlformats.org/drawingml/2006/main" xmlns:p="http://schemas.openxmlformats.org/presentationml/2006/main" xmlns:r="http://schemas.openxmlformats.org/officeDocument/2006/relationships">
-  <p:cSld>
-    <p:bg>
-      <p:bgPr>
-        <a:solidFill>
-          <a:srgbClr val="2E86DE"/>
-        </a:solidFill>
-        <a:effectLst/>
-      </p:bgPr>
-    </p:bg>
-    <p:spTree>
-      <p:nvGrpSpPr>
-        <p:cNvPr id="1" name=""/>
-        <p:cNvGrpSpPr/>
-        <p:nvPr/>
-      </p:nvGrpSpPr>
-      <p:grpSpPr/>
-      <p:sp>
-        <p:nvSpPr>
-          <p:cNvPr id="2" name="TextBox 1"/>
-          <p:cNvSpPr txBox="1"/>
-          <p:nvPr/>
-        </p:nvSpPr>
-        <p:spPr>
-          <a:xfrm>
-            <a:off x="914400" y="2286000"/>
-            <a:ext cx="1828800" cy="1371600"/>
-          </a:xfrm>
-          <a:prstGeom prst="rect">
-            <a:avLst/>
-          </a:prstGeom>
-          <a:noFill/>
-        </p:spPr>
-        <p:txBody>
-          <a:bodyPr wrap="none">
-            <a:spAutoFit/>
-          </a:bodyPr>
-          <a:lstStyle/>
-          <a:p>
-            <a:pPr>
-              <a:defRPr sz="7200" b="1">
-                <a:solidFill>
-                  <a:srgbClr val="FFFFFF"/>
-                </a:solidFill>
-              </a:defRPr>
-            </a:pPr>
-            <a:r>
-              <a:t>04</a:t>
-            </a:r>
-          </a:p>
-        </p:txBody>
-      </p:sp>
-      <p:sp>
-        <p:nvSpPr>
-          <p:cNvPr id="3" name="TextBox 2"/>
-          <p:cNvSpPr txBox="1"/>
-          <p:nvPr/>
-        </p:nvSpPr>
-        <p:spPr>
-          <a:xfrm>
-            <a:off x="914400" y="3657600"/>
-            <a:ext cx="9144000" cy="1371600"/>
-          </a:xfrm>
-          <a:prstGeom prst="rect">
-            <a:avLst/>
-          </a:prstGeom>
-          <a:noFill/>
-        </p:spPr>
-        <p:txBody>
-          <a:bodyPr wrap="square">
-            <a:spAutoFit/>
-          </a:bodyPr>
-          <a:lstStyle/>
-          <a:p>
-            <a:pPr>
-              <a:defRPr sz="3200" b="1">
-                <a:solidFill>
-                  <a:srgbClr val="FFFFFF"/>
-                </a:solidFill>
-              </a:defRPr>
-            </a:pPr>
-            <a:r>
-              <a:t>TRỰC GIÁC &amp; TƯ DUY</a:t>
-            </a:r>
-          </a:p>
-        </p:txBody>
-      </p:sp>
-    </p:spTree>
-  </p:cSld>
-  <p:clrMapOvr>
-    <a:masterClrMapping/>
-  </p:clrMapOvr>
-  <p:transition spd="med" advTm="1000">
-    <p:fade/>
-  </p:transition>
-</p:sld>
-</file>
-
-<file path=ppt/slides/slide15.xml><?xml version="1.0" encoding="utf-8"?>
-<p:sld xmlns:a="http://schemas.openxmlformats.org/drawingml/2006/main" xmlns:p="http://schemas.openxmlformats.org/presentationml/2006/main" xmlns:r="http://schemas.openxmlformats.org/officeDocument/2006/relationships">
-  <p:cSld>
-    <p:spTree>
-      <p:nvGrpSpPr>
-        <p:cNvPr id="1" name=""/>
-        <p:cNvGrpSpPr/>
-        <p:nvPr/>
-      </p:nvGrpSpPr>
-      <p:grpSpPr/>
-      <p:sp>
-        <p:nvSpPr>
-          <p:cNvPr id="2" name="Rectangle 1"/>
-          <p:cNvSpPr/>
-          <p:nvPr/>
-        </p:nvSpPr>
-        <p:spPr>
-          <a:xfrm>
-            <a:off x="0" y="0"/>
-            <a:ext cx="12191695" cy="54864"/>
-          </a:xfrm>
-          <a:prstGeom prst="rect">
-            <a:avLst/>
-          </a:prstGeom>
-          <a:solidFill>
-            <a:srgbClr val="2E86DE"/>
-          </a:solidFill>
-          <a:ln>
-            <a:noFill/>
-          </a:ln>
-        </p:spPr>
-        <p:style>
-          <a:lnRef idx="1">
-            <a:schemeClr val="accent1"/>
-          </a:lnRef>
-          <a:fillRef idx="3">
-            <a:schemeClr val="accent1"/>
-          </a:fillRef>
-          <a:effectRef idx="2">
-            <a:schemeClr val="accent1"/>
-          </a:effectRef>
-          <a:fontRef idx="minor">
-            <a:schemeClr val="lt1"/>
-          </a:fontRef>
-        </p:style>
-        <p:txBody>
-          <a:bodyPr rtlCol="0" anchor="ctr"/>
-          <a:lstStyle/>
-          <a:p>
-            <a:pPr algn="ctr"/>
-          </a:p>
-        </p:txBody>
-      </p:sp>
-      <p:sp>
-        <p:nvSpPr>
-          <p:cNvPr id="3" name="Rectangle 2"/>
-          <p:cNvSpPr/>
-          <p:nvPr/>
-        </p:nvSpPr>
-        <p:spPr>
-          <a:xfrm>
-            <a:off x="0" y="6492240"/>
-            <a:ext cx="12191695" cy="365760"/>
-          </a:xfrm>
-          <a:prstGeom prst="rect">
-            <a:avLst/>
-          </a:prstGeom>
-          <a:solidFill>
-            <a:srgbClr val="1B2A4A"/>
-          </a:solidFill>
-          <a:ln>
-            <a:noFill/>
-          </a:ln>
-        </p:spPr>
-        <p:style>
-          <a:lnRef idx="1">
-            <a:schemeClr val="accent1"/>
-          </a:lnRef>
-          <a:fillRef idx="3">
-            <a:schemeClr val="accent1"/>
-          </a:fillRef>
-          <a:effectRef idx="2">
-            <a:schemeClr val="accent1"/>
-          </a:effectRef>
-          <a:fontRef idx="minor">
-            <a:schemeClr val="lt1"/>
-          </a:fontRef>
-        </p:style>
-        <p:txBody>
-          <a:bodyPr rtlCol="0" anchor="ctr"/>
-          <a:lstStyle/>
-          <a:p>
-            <a:pPr algn="ctr">
-              <a:defRPr sz="1000">
-                <a:solidFill>
-                  <a:srgbClr val="FFFFFF"/>
-                </a:solidFill>
-              </a:defRPr>
-            </a:pPr>
-            <a:r>
-              <a:t>Trích xuất Hóa đơn Tiếng Việt — Pipeline PaddleOCR • VietOCR • LayoutLMv3</a:t>
-            </a:r>
-          </a:p>
-        </p:txBody>
-      </p:sp>
-      <p:sp>
-        <p:nvSpPr>
-          <p:cNvPr id="4" name="TextBox 3"/>
-          <p:cNvSpPr txBox="1"/>
-          <p:nvPr/>
-        </p:nvSpPr>
-        <p:spPr>
-          <a:xfrm>
-            <a:off x="457200" y="137160"/>
-            <a:ext cx="10972800" cy="731520"/>
-          </a:xfrm>
-          <a:prstGeom prst="rect">
-            <a:avLst/>
-          </a:prstGeom>
-          <a:noFill/>
-        </p:spPr>
-        <p:txBody>
-          <a:bodyPr wrap="none">
-            <a:spAutoFit/>
-          </a:bodyPr>
-          <a:lstStyle/>
-          <a:p>
-            <a:pPr>
-              <a:defRPr sz="2600" b="1">
-                <a:solidFill>
-                  <a:srgbClr val="1B2A4A"/>
-                </a:solidFill>
-              </a:defRPr>
-            </a:pPr>
-            <a:r>
-              <a:t>CON NGƯỜI ĐỌC HÓA ĐƠN NHƯ THẾ NÀO?</a:t>
-            </a:r>
-          </a:p>
-        </p:txBody>
-      </p:sp>
-      <p:sp>
-        <p:nvSpPr>
-          <p:cNvPr id="5" name="TextBox 4"/>
-          <p:cNvSpPr txBox="1"/>
-          <p:nvPr/>
-        </p:nvSpPr>
-        <p:spPr>
-          <a:xfrm>
-            <a:off x="457200" y="1005840"/>
-            <a:ext cx="10972800" cy="5029200"/>
-          </a:xfrm>
-          <a:prstGeom prst="rect">
-            <a:avLst/>
-          </a:prstGeom>
-          <a:noFill/>
-        </p:spPr>
-        <p:txBody>
-          <a:bodyPr wrap="square">
-            <a:spAutoFit/>
-          </a:bodyPr>
-          <a:lstStyle/>
-          <a:p>
-            <a:pPr>
-              <a:spcBef>
-                <a:spcPts val="1400"/>
-              </a:spcBef>
-              <a:defRPr sz="1800" b="1">
-                <a:solidFill>
-                  <a:srgbClr val="2E86DE"/>
-                </a:solidFill>
-              </a:defRPr>
-            </a:pPr>
-            <a:r>
-              <a:t>1. Vị trí không gian mang ngữ nghĩa:</a:t>
-            </a:r>
-          </a:p>
-          <a:p>
-            <a:pPr>
-              <a:spcBef>
-                <a:spcPts val="500"/>
-              </a:spcBef>
-              <a:defRPr sz="1500">
-                <a:solidFill>
-                  <a:srgbClr val="2C3E50"/>
-                </a:solidFill>
-              </a:defRPr>
-            </a:pPr>
-            <a:r>
-              <a:t>• "Tổng cộng" → góc dưới phải, font lớn, in đậm</a:t>
-            </a:r>
-          </a:p>
-          <a:p>
-            <a:pPr>
-              <a:spcBef>
-                <a:spcPts val="500"/>
-              </a:spcBef>
-              <a:defRPr sz="1500">
-                <a:solidFill>
-                  <a:srgbClr val="2C3E50"/>
-                </a:solidFill>
-              </a:defRPr>
-            </a:pPr>
-            <a:r>
-              <a:t>• Tên cửa hàng → trên cùng, canh giữa</a:t>
-            </a:r>
-          </a:p>
-          <a:p>
-            <a:pPr>
-              <a:spcBef>
-                <a:spcPts val="500"/>
-              </a:spcBef>
-              <a:defRPr sz="1500">
-                <a:solidFill>
-                  <a:srgbClr val="2C3E50"/>
-                </a:solidFill>
-              </a:defRPr>
-            </a:pPr>
-          </a:p>
-          <a:p>
-            <a:pPr>
-              <a:spcBef>
-                <a:spcPts val="1400"/>
-              </a:spcBef>
-              <a:defRPr sz="1800" b="1">
-                <a:solidFill>
-                  <a:srgbClr val="2E86DE"/>
-                </a:solidFill>
-              </a:defRPr>
-            </a:pPr>
-            <a:r>
-              <a:t>2. Căn lề là thông tin:</a:t>
-            </a:r>
-          </a:p>
-          <a:p>
-            <a:pPr>
-              <a:spcBef>
-                <a:spcPts val="500"/>
-              </a:spcBef>
-              <a:defRPr sz="1500">
-                <a:solidFill>
-                  <a:srgbClr val="2C3E50"/>
-                </a:solidFill>
-              </a:defRPr>
-            </a:pPr>
-            <a:r>
-              <a:t>• Giá tiền căn phải, tên mặt hàng căn trái</a:t>
-            </a:r>
-          </a:p>
-          <a:p>
-            <a:pPr>
-              <a:spcBef>
-                <a:spcPts val="500"/>
-              </a:spcBef>
-              <a:defRPr sz="1500">
-                <a:solidFill>
-                  <a:srgbClr val="2C3E50"/>
-                </a:solidFill>
-              </a:defRPr>
-            </a:pPr>
-          </a:p>
-          <a:p>
-            <a:pPr>
-              <a:spcBef>
-                <a:spcPts val="1400"/>
-              </a:spcBef>
-              <a:defRPr sz="1800" b="1">
-                <a:solidFill>
-                  <a:srgbClr val="2E86DE"/>
-                </a:solidFill>
-              </a:defRPr>
-            </a:pPr>
-            <a:r>
-              <a:t>3. Gần nhau → liên quan:</a:t>
-            </a:r>
-          </a:p>
-          <a:p>
-            <a:pPr>
-              <a:spcBef>
-                <a:spcPts val="500"/>
-              </a:spcBef>
-              <a:defRPr sz="1500">
-                <a:solidFill>
-                  <a:srgbClr val="2C3E50"/>
-                </a:solidFill>
-              </a:defRPr>
-            </a:pPr>
-            <a:r>
-              <a:t>• "2 x 29,000" và "58,000" cùng dòng → cùng mặt hàng</a:t>
-            </a:r>
-          </a:p>
-          <a:p>
-            <a:pPr>
-              <a:spcBef>
-                <a:spcPts val="500"/>
-              </a:spcBef>
-              <a:defRPr sz="1500">
-                <a:solidFill>
-                  <a:srgbClr val="2C3E50"/>
-                </a:solidFill>
-              </a:defRPr>
-            </a:pPr>
-          </a:p>
-          <a:p>
-            <a:pPr>
-              <a:spcBef>
-                <a:spcPts val="1400"/>
-              </a:spcBef>
-              <a:defRPr sz="1800" b="1">
-                <a:solidFill>
-                  <a:srgbClr val="2E86DE"/>
-                </a:solidFill>
-              </a:defRPr>
-            </a:pPr>
-            <a:r>
-              <a:t>4. Pattern lặp lại trong vùng bảng:</a:t>
-            </a:r>
-          </a:p>
-          <a:p>
-            <a:pPr>
-              <a:spcBef>
-                <a:spcPts val="500"/>
-              </a:spcBef>
-              <a:defRPr sz="1500">
-                <a:solidFill>
-                  <a:srgbClr val="2C3E50"/>
-                </a:solidFill>
-              </a:defRPr>
-            </a:pPr>
-            <a:r>
-              <a:t>• 5 dòng có cấu trúc [tên | số | số] → bảng mặt hàng</a:t>
-            </a:r>
-          </a:p>
-        </p:txBody>
-      </p:sp>
-    </p:spTree>
-  </p:cSld>
-  <p:clrMapOvr>
-    <a:masterClrMapping/>
-  </p:clrMapOvr>
-  <p:transition spd="med" advTm="800">
-    <p:fade/>
-  </p:transition>
-</p:sld>
-</file>
-
-<file path=ppt/slides/slide16.xml><?xml version="1.0" encoding="utf-8"?>
-<p:sld xmlns:a="http://schemas.openxmlformats.org/drawingml/2006/main" xmlns:p="http://schemas.openxmlformats.org/presentationml/2006/main" xmlns:r="http://schemas.openxmlformats.org/officeDocument/2006/relationships">
-  <p:cSld>
-    <p:spTree>
-      <p:nvGrpSpPr>
-        <p:cNvPr id="1" name=""/>
-        <p:cNvGrpSpPr/>
-        <p:nvPr/>
-      </p:nvGrpSpPr>
-      <p:grpSpPr/>
-      <p:sp>
-        <p:nvSpPr>
-          <p:cNvPr id="2" name="Rectangle 1"/>
-          <p:cNvSpPr/>
-          <p:nvPr/>
-        </p:nvSpPr>
-        <p:spPr>
-          <a:xfrm>
-            <a:off x="0" y="0"/>
-            <a:ext cx="12191695" cy="54864"/>
-          </a:xfrm>
-          <a:prstGeom prst="rect">
-            <a:avLst/>
-          </a:prstGeom>
-          <a:solidFill>
-            <a:srgbClr val="2E86DE"/>
-          </a:solidFill>
-          <a:ln>
-            <a:noFill/>
-          </a:ln>
-        </p:spPr>
-        <p:style>
-          <a:lnRef idx="1">
-            <a:schemeClr val="accent1"/>
-          </a:lnRef>
-          <a:fillRef idx="3">
-            <a:schemeClr val="accent1"/>
-          </a:fillRef>
-          <a:effectRef idx="2">
-            <a:schemeClr val="accent1"/>
-          </a:effectRef>
-          <a:fontRef idx="minor">
-            <a:schemeClr val="lt1"/>
-          </a:fontRef>
-        </p:style>
-        <p:txBody>
-          <a:bodyPr rtlCol="0" anchor="ctr"/>
-          <a:lstStyle/>
-          <a:p>
-            <a:pPr algn="ctr"/>
-          </a:p>
-        </p:txBody>
-      </p:sp>
-      <p:sp>
-        <p:nvSpPr>
-          <p:cNvPr id="3" name="Rectangle 2"/>
-          <p:cNvSpPr/>
-          <p:nvPr/>
-        </p:nvSpPr>
-        <p:spPr>
-          <a:xfrm>
-            <a:off x="0" y="6492240"/>
-            <a:ext cx="12191695" cy="365760"/>
-          </a:xfrm>
-          <a:prstGeom prst="rect">
-            <a:avLst/>
-          </a:prstGeom>
-          <a:solidFill>
-            <a:srgbClr val="1B2A4A"/>
-          </a:solidFill>
-          <a:ln>
-            <a:noFill/>
-          </a:ln>
-        </p:spPr>
-        <p:style>
-          <a:lnRef idx="1">
-            <a:schemeClr val="accent1"/>
-          </a:lnRef>
-          <a:fillRef idx="3">
-            <a:schemeClr val="accent1"/>
-          </a:fillRef>
-          <a:effectRef idx="2">
-            <a:schemeClr val="accent1"/>
-          </a:effectRef>
-          <a:fontRef idx="minor">
-            <a:schemeClr val="lt1"/>
-          </a:fontRef>
-        </p:style>
-        <p:txBody>
-          <a:bodyPr rtlCol="0" anchor="ctr"/>
-          <a:lstStyle/>
-          <a:p>
-            <a:pPr algn="ctr">
-              <a:defRPr sz="1000">
-                <a:solidFill>
-                  <a:srgbClr val="FFFFFF"/>
-                </a:solidFill>
-              </a:defRPr>
-            </a:pPr>
-            <a:r>
-              <a:t>Trích xuất Hóa đơn Tiếng Việt — Pipeline PaddleOCR • VietOCR • LayoutLMv3</a:t>
-            </a:r>
-          </a:p>
-        </p:txBody>
-      </p:sp>
-      <p:sp>
-        <p:nvSpPr>
-          <p:cNvPr id="4" name="TextBox 3"/>
-          <p:cNvSpPr txBox="1"/>
-          <p:nvPr/>
-        </p:nvSpPr>
-        <p:spPr>
-          <a:xfrm>
-            <a:off x="457200" y="137160"/>
-            <a:ext cx="10972800" cy="731520"/>
-          </a:xfrm>
-          <a:prstGeom prst="rect">
-            <a:avLst/>
-          </a:prstGeom>
-          <a:noFill/>
-        </p:spPr>
-        <p:txBody>
-          <a:bodyPr wrap="none">
-            <a:spAutoFit/>
-          </a:bodyPr>
-          <a:lstStyle/>
-          <a:p>
-            <a:pPr>
-              <a:defRPr sz="2600" b="1">
-                <a:solidFill>
-                  <a:srgbClr val="1B2A4A"/>
-                </a:solidFill>
-              </a:defRPr>
-            </a:pPr>
-            <a:r>
-              <a:t>MÔ HÌNH MÔ PHỎNG TRỰC GIÁC CON NGƯỜI</a:t>
+              <a:t>MÔ HÌNH MÔ PHỎNG TRỰC GIÁC</a:t>
             </a:r>
           </a:p>
         </p:txBody>
@@ -5946,226 +4520,15 @@
           </a:graphicData>
         </a:graphic>
       </p:graphicFrame>
-      <p:sp>
-        <p:nvSpPr>
-          <p:cNvPr id="6" name="Rounded Rectangle 5"/>
-          <p:cNvSpPr/>
-          <p:nvPr/>
-        </p:nvSpPr>
-        <p:spPr>
-          <a:xfrm>
-            <a:off x="457200" y="5669280"/>
-            <a:ext cx="10972800" cy="365760"/>
-          </a:xfrm>
-          <a:prstGeom prst="roundRect">
-            <a:avLst/>
-          </a:prstGeom>
-          <a:solidFill>
-            <a:srgbClr val="F39C12"/>
-          </a:solidFill>
-          <a:ln>
-            <a:noFill/>
-          </a:ln>
-        </p:spPr>
-        <p:style>
-          <a:lnRef idx="1">
-            <a:schemeClr val="accent1"/>
-          </a:lnRef>
-          <a:fillRef idx="3">
-            <a:schemeClr val="accent1"/>
-          </a:fillRef>
-          <a:effectRef idx="2">
-            <a:schemeClr val="accent1"/>
-          </a:effectRef>
-          <a:fontRef idx="minor">
-            <a:schemeClr val="lt1"/>
-          </a:fontRef>
-        </p:style>
-        <p:txBody>
-          <a:bodyPr rtlCol="0" anchor="ctr"/>
-          <a:lstStyle/>
-          <a:p>
-            <a:pPr algn="ctr">
-              <a:defRPr sz="1300" b="1">
-                <a:solidFill>
-                  <a:srgbClr val="FFFFFF"/>
-                </a:solidFill>
-              </a:defRPr>
-            </a:pPr>
-            <a:r>
-              <a:t>Giả định ngầm</a:t>
-            </a:r>
-          </a:p>
-        </p:txBody>
-      </p:sp>
-      <p:sp>
-        <p:nvSpPr>
-          <p:cNvPr id="7" name="Rounded Rectangle 6"/>
-          <p:cNvSpPr/>
-          <p:nvPr/>
-        </p:nvSpPr>
-        <p:spPr>
-          <a:xfrm>
-            <a:off x="457200" y="6035040"/>
-            <a:ext cx="10972800" cy="365760"/>
-          </a:xfrm>
-          <a:prstGeom prst="roundRect">
-            <a:avLst/>
-          </a:prstGeom>
-          <a:solidFill>
-            <a:srgbClr val="FFF3E0"/>
-          </a:solidFill>
-          <a:ln w="12700">
-            <a:solidFill>
-              <a:srgbClr val="F39C12"/>
-            </a:solidFill>
-          </a:ln>
-        </p:spPr>
-        <p:style>
-          <a:lnRef idx="1">
-            <a:schemeClr val="accent1"/>
-          </a:lnRef>
-          <a:fillRef idx="3">
-            <a:schemeClr val="accent1"/>
-          </a:fillRef>
-          <a:effectRef idx="2">
-            <a:schemeClr val="accent1"/>
-          </a:effectRef>
-          <a:fontRef idx="minor">
-            <a:schemeClr val="lt1"/>
-          </a:fontRef>
-        </p:style>
-        <p:txBody>
-          <a:bodyPr rtlCol="0" anchor="ctr" wrap="square" lIns="127000" rIns="127000" tIns="63500"/>
-          <a:lstStyle/>
-          <a:p>
-            <a:pPr algn="ctr">
-              <a:spcBef>
-                <a:spcPts val="300"/>
-              </a:spcBef>
-              <a:defRPr sz="1200">
-                <a:solidFill>
-                  <a:srgbClr val="2C3E50"/>
-                </a:solidFill>
-              </a:defRPr>
-            </a:pPr>
-            <a:r>
-              <a:t>• Mỗi mô hình đều có giả định riêng → khi giả định vi phạm, mô hình suy giảm chất lượng</a:t>
-            </a:r>
-          </a:p>
-        </p:txBody>
-      </p:sp>
     </p:spTree>
   </p:cSld>
   <p:clrMapOvr>
     <a:masterClrMapping/>
   </p:clrMapOvr>
-  <p:transition spd="med" advTm="800">
-    <p:fade/>
-  </p:transition>
 </p:sld>
 </file>
 
-<file path=ppt/slides/slide17.xml><?xml version="1.0" encoding="utf-8"?>
-<p:sld xmlns:a="http://schemas.openxmlformats.org/drawingml/2006/main" xmlns:p="http://schemas.openxmlformats.org/presentationml/2006/main" xmlns:r="http://schemas.openxmlformats.org/officeDocument/2006/relationships">
-  <p:cSld>
-    <p:bg>
-      <p:bgPr>
-        <a:solidFill>
-          <a:srgbClr val="2E86DE"/>
-        </a:solidFill>
-        <a:effectLst/>
-      </p:bgPr>
-    </p:bg>
-    <p:spTree>
-      <p:nvGrpSpPr>
-        <p:cNvPr id="1" name=""/>
-        <p:cNvGrpSpPr/>
-        <p:nvPr/>
-      </p:nvGrpSpPr>
-      <p:grpSpPr/>
-      <p:sp>
-        <p:nvSpPr>
-          <p:cNvPr id="2" name="TextBox 1"/>
-          <p:cNvSpPr txBox="1"/>
-          <p:nvPr/>
-        </p:nvSpPr>
-        <p:spPr>
-          <a:xfrm>
-            <a:off x="914400" y="2286000"/>
-            <a:ext cx="1828800" cy="1371600"/>
-          </a:xfrm>
-          <a:prstGeom prst="rect">
-            <a:avLst/>
-          </a:prstGeom>
-          <a:noFill/>
-        </p:spPr>
-        <p:txBody>
-          <a:bodyPr wrap="none">
-            <a:spAutoFit/>
-          </a:bodyPr>
-          <a:lstStyle/>
-          <a:p>
-            <a:pPr>
-              <a:defRPr sz="7200" b="1">
-                <a:solidFill>
-                  <a:srgbClr val="FFFFFF"/>
-                </a:solidFill>
-              </a:defRPr>
-            </a:pPr>
-            <a:r>
-              <a:t>05</a:t>
-            </a:r>
-          </a:p>
-        </p:txBody>
-      </p:sp>
-      <p:sp>
-        <p:nvSpPr>
-          <p:cNvPr id="3" name="TextBox 2"/>
-          <p:cNvSpPr txBox="1"/>
-          <p:nvPr/>
-        </p:nvSpPr>
-        <p:spPr>
-          <a:xfrm>
-            <a:off x="914400" y="3657600"/>
-            <a:ext cx="9144000" cy="1371600"/>
-          </a:xfrm>
-          <a:prstGeom prst="rect">
-            <a:avLst/>
-          </a:prstGeom>
-          <a:noFill/>
-        </p:spPr>
-        <p:txBody>
-          <a:bodyPr wrap="square">
-            <a:spAutoFit/>
-          </a:bodyPr>
-          <a:lstStyle/>
-          <a:p>
-            <a:pPr>
-              <a:defRPr sz="3200" b="1">
-                <a:solidFill>
-                  <a:srgbClr val="FFFFFF"/>
-                </a:solidFill>
-              </a:defRPr>
-            </a:pPr>
-            <a:r>
-              <a:t>TOÁN HỌC HÓA</a:t>
-            </a:r>
-          </a:p>
-        </p:txBody>
-      </p:sp>
-    </p:spTree>
-  </p:cSld>
-  <p:clrMapOvr>
-    <a:masterClrMapping/>
-  </p:clrMapOvr>
-  <p:transition spd="med" advTm="1000">
-    <p:fade/>
-  </p:transition>
-</p:sld>
-</file>
-
-<file path=ppt/slides/slide18.xml><?xml version="1.0" encoding="utf-8"?>
+<file path=ppt/slides/slide13.xml><?xml version="1.0" encoding="utf-8"?>
 <p:sld xmlns:a="http://schemas.openxmlformats.org/drawingml/2006/main" xmlns:p="http://schemas.openxmlformats.org/presentationml/2006/main" xmlns:r="http://schemas.openxmlformats.org/officeDocument/2006/relationships">
   <p:cSld>
     <p:spTree>
@@ -6265,7 +4628,7 @@
               </a:defRPr>
             </a:pPr>
             <a:r>
-              <a:t>Trích xuất Hóa đơn Tiếng Việt — Pipeline PaddleOCR • VietOCR • LayoutLMv3</a:t>
+              <a:t>Trích xuất Hóa đơn Tiếng Việt — PaddleOCR • VietOCR • LayoutLMv3</a:t>
             </a:r>
           </a:p>
         </p:txBody>
@@ -6305,113 +4668,40 @@
           </a:p>
         </p:txBody>
       </p:sp>
-      <p:sp>
-        <p:nvSpPr>
-          <p:cNvPr id="5" name="Rounded Rectangle 4"/>
-          <p:cNvSpPr/>
-          <p:nvPr/>
-        </p:nvSpPr>
-        <p:spPr>
-          <a:xfrm>
-            <a:off x="457200" y="1097280"/>
-            <a:ext cx="10972800" cy="365760"/>
-          </a:xfrm>
-          <a:prstGeom prst="roundRect">
-            <a:avLst/>
-          </a:prstGeom>
-          <a:solidFill>
-            <a:srgbClr val="2E86DE"/>
-          </a:solidFill>
-          <a:ln>
-            <a:noFill/>
-          </a:ln>
-        </p:spPr>
-        <p:style>
-          <a:lnRef idx="1">
-            <a:schemeClr val="accent1"/>
-          </a:lnRef>
-          <a:fillRef idx="3">
-            <a:schemeClr val="accent1"/>
-          </a:fillRef>
-          <a:effectRef idx="2">
-            <a:schemeClr val="accent1"/>
-          </a:effectRef>
-          <a:fontRef idx="minor">
-            <a:schemeClr val="lt1"/>
-          </a:fontRef>
-        </p:style>
-        <p:txBody>
-          <a:bodyPr rtlCol="0" anchor="ctr"/>
-          <a:lstStyle/>
-          <a:p>
-            <a:pPr algn="ctr">
-              <a:defRPr sz="1300" b="1">
-                <a:solidFill>
-                  <a:srgbClr val="FFFFFF"/>
-                </a:solidFill>
-              </a:defRPr>
-            </a:pPr>
-            <a:r>
-              <a:t>Phép toán chủ đạo: Segmentation + Adaptive Thresholding</a:t>
-            </a:r>
-          </a:p>
-        </p:txBody>
-      </p:sp>
-      <p:sp>
-        <p:nvSpPr>
-          <p:cNvPr id="6" name="Rounded Rectangle 5"/>
-          <p:cNvSpPr/>
-          <p:nvPr/>
-        </p:nvSpPr>
-        <p:spPr>
-          <a:xfrm>
-            <a:off x="457200" y="1463040"/>
-            <a:ext cx="10972800" cy="365760"/>
-          </a:xfrm>
-          <a:prstGeom prst="roundRect">
-            <a:avLst/>
-          </a:prstGeom>
-          <a:solidFill>
-            <a:srgbClr val="D6EAF8"/>
-          </a:solidFill>
-          <a:ln w="12700">
-            <a:solidFill>
-              <a:srgbClr val="2E86DE"/>
-            </a:solidFill>
-          </a:ln>
-        </p:spPr>
-        <p:style>
-          <a:lnRef idx="1">
-            <a:schemeClr val="accent1"/>
-          </a:lnRef>
-          <a:fillRef idx="3">
-            <a:schemeClr val="accent1"/>
-          </a:fillRef>
-          <a:effectRef idx="2">
-            <a:schemeClr val="accent1"/>
-          </a:effectRef>
-          <a:fontRef idx="minor">
-            <a:schemeClr val="lt1"/>
-          </a:fontRef>
-        </p:style>
-        <p:txBody>
-          <a:bodyPr rtlCol="0" anchor="ctr" wrap="square" lIns="127000" rIns="127000" tIns="63500"/>
-          <a:lstStyle/>
-          <a:p>
-            <a:pPr algn="ctr"/>
-          </a:p>
-        </p:txBody>
-      </p:sp>
-      <p:sp>
-        <p:nvSpPr>
-          <p:cNvPr id="7" name="TextBox 6"/>
+      <p:pic>
+        <p:nvPicPr>
+          <p:cNvPr id="5" name="Picture 4" descr="db-algorithm.png"/>
+          <p:cNvPicPr>
+            <a:picLocks noChangeAspect="1"/>
+          </p:cNvPicPr>
+          <p:nvPr/>
+        </p:nvPicPr>
+        <p:blipFill>
+          <a:blip r:embed="rId2"/>
+          <a:stretch>
+            <a:fillRect/>
+          </a:stretch>
+        </p:blipFill>
+        <p:spPr>
+          <a:xfrm>
+            <a:off x="6400800" y="1188720"/>
+            <a:ext cx="5303520" cy="2743200"/>
+          </a:xfrm>
+          <a:prstGeom prst="rect">
+            <a:avLst/>
+          </a:prstGeom>
+        </p:spPr>
+      </p:pic>
+      <p:sp>
+        <p:nvSpPr>
+          <p:cNvPr id="6" name="TextBox 5"/>
           <p:cNvSpPr txBox="1"/>
           <p:nvPr/>
         </p:nvSpPr>
         <p:spPr>
           <a:xfrm>
-            <a:off x="457200" y="2011680"/>
-            <a:ext cx="10972800" cy="5029200"/>
+            <a:off x="457200" y="1005840"/>
+            <a:ext cx="5943600" cy="5029200"/>
           </a:xfrm>
           <a:prstGeom prst="rect">
             <a:avLst/>
@@ -6435,6 +4725,33 @@
               </a:defRPr>
             </a:pPr>
             <a:r>
+              <a:t>Phép toán chủ đạo: Segmentation + Adaptive Thresholding</a:t>
+            </a:r>
+          </a:p>
+          <a:p>
+            <a:pPr>
+              <a:spcBef>
+                <a:spcPts val="500"/>
+              </a:spcBef>
+              <a:defRPr sz="1500">
+                <a:solidFill>
+                  <a:srgbClr val="2C3E50"/>
+                </a:solidFill>
+              </a:defRPr>
+            </a:pPr>
+          </a:p>
+          <a:p>
+            <a:pPr>
+              <a:spcBef>
+                <a:spcPts val="1400"/>
+              </a:spcBef>
+              <a:defRPr sz="1800" b="1">
+                <a:solidFill>
+                  <a:srgbClr val="2E86DE"/>
+                </a:solidFill>
+              </a:defRPr>
+            </a:pPr>
+            <a:r>
               <a:t>Mô hình học 2 map song song từ feature map F:</a:t>
             </a:r>
           </a:p>
@@ -6480,7 +4797,7 @@
               </a:defRPr>
             </a:pPr>
             <a:r>
-              <a:t>• B̂ = σ((P - T) / k)  ← Binary map (differentiable)</a:t>
+              <a:t>• B̂ = σ((P-T)/k)  ← Binary map (differentiable)</a:t>
             </a:r>
           </a:p>
           <a:p>
@@ -6507,7 +4824,7 @@
               </a:defRPr>
             </a:pPr>
             <a:r>
-              <a:t>Bí quyết:</a:t>
+              <a:t>Bí quyết: σ((P-T)/k) với k=50 xấp xỉ hàm step nhưng vẫn có gradient</a:t>
             </a:r>
           </a:p>
           <a:p>
@@ -6521,21 +4838,6 @@
                 </a:solidFill>
               </a:defRPr>
             </a:pPr>
-            <a:r>
-              <a:t>• σ((P-T)/k) với k=50 xấp xỉ hàm step nhưng vẫn có gradient để backprop</a:t>
-            </a:r>
-          </a:p>
-          <a:p>
-            <a:pPr>
-              <a:spcBef>
-                <a:spcPts val="500"/>
-              </a:spcBef>
-              <a:defRPr sz="1500">
-                <a:solidFill>
-                  <a:srgbClr val="2C3E50"/>
-                </a:solidFill>
-              </a:defRPr>
-            </a:pPr>
           </a:p>
           <a:p>
             <a:pPr>
@@ -6549,35 +4851,8 @@
               </a:defRPr>
             </a:pPr>
             <a:r>
-              <a:t>Loss:</a:t>
-            </a:r>
-          </a:p>
-          <a:p>
-            <a:pPr>
-              <a:spcBef>
-                <a:spcPts val="500"/>
-              </a:spcBef>
-              <a:defRPr sz="1500">
-                <a:solidFill>
-                  <a:srgbClr val="2C3E50"/>
-                </a:solidFill>
-              </a:defRPr>
-            </a:pPr>
-            <a:r>
-              <a:t>• L = L_bce(P, Gp) + α·L_bce(B̂, Gb) + β·L1(T, Gt)</a:t>
-            </a:r>
-          </a:p>
-          <a:p>
-            <a:pPr>
-              <a:spcBef>
-                <a:spcPts val="500"/>
-              </a:spcBef>
-              <a:defRPr sz="1500">
-                <a:solidFill>
-                  <a:srgbClr val="2C3E50"/>
-                </a:solidFill>
-              </a:defRPr>
-            </a:pPr>
+              <a:t>Loss: L = L_bce(P, Gp) + α·L_bce(B̂, Gb) + β·L1(T, Gt)</a:t>
+            </a:r>
           </a:p>
           <a:p>
             <a:pPr>
@@ -6591,7 +4866,7 @@
               </a:defRPr>
             </a:pPr>
             <a:r>
-              <a:t>Tham số: ResNet-18/50 + FPN, khoảng 10–27M tham số</a:t>
+              <a:t>Tham số: ResNet-18/50 + FPN, khoảng 10–27M</a:t>
             </a:r>
           </a:p>
         </p:txBody>
@@ -6601,13 +4876,10 @@
   <p:clrMapOvr>
     <a:masterClrMapping/>
   </p:clrMapOvr>
-  <p:transition spd="med" advTm="800">
-    <p:fade/>
-  </p:transition>
 </p:sld>
 </file>
 
-<file path=ppt/slides/slide19.xml><?xml version="1.0" encoding="utf-8"?>
+<file path=ppt/slides/slide14.xml><?xml version="1.0" encoding="utf-8"?>
 <p:sld xmlns:a="http://schemas.openxmlformats.org/drawingml/2006/main" xmlns:p="http://schemas.openxmlformats.org/presentationml/2006/main" xmlns:r="http://schemas.openxmlformats.org/officeDocument/2006/relationships">
   <p:cSld>
     <p:spTree>
@@ -6707,7 +4979,7 @@
               </a:defRPr>
             </a:pPr>
             <a:r>
-              <a:t>Trích xuất Hóa đơn Tiếng Việt — Pipeline PaddleOCR • VietOCR • LayoutLMv3</a:t>
+              <a:t>Trích xuất Hóa đơn Tiếng Việt — PaddleOCR • VietOCR • LayoutLMv3</a:t>
             </a:r>
           </a:p>
         </p:txBody>
@@ -6747,113 +5019,40 @@
           </a:p>
         </p:txBody>
       </p:sp>
-      <p:sp>
-        <p:nvSpPr>
-          <p:cNvPr id="5" name="Rounded Rectangle 4"/>
-          <p:cNvSpPr/>
-          <p:nvPr/>
-        </p:nvSpPr>
-        <p:spPr>
-          <a:xfrm>
-            <a:off x="457200" y="1097280"/>
-            <a:ext cx="10972800" cy="365760"/>
-          </a:xfrm>
-          <a:prstGeom prst="roundRect">
-            <a:avLst/>
-          </a:prstGeom>
-          <a:solidFill>
-            <a:srgbClr val="2E86DE"/>
-          </a:solidFill>
-          <a:ln>
-            <a:noFill/>
-          </a:ln>
-        </p:spPr>
-        <p:style>
-          <a:lnRef idx="1">
-            <a:schemeClr val="accent1"/>
-          </a:lnRef>
-          <a:fillRef idx="3">
-            <a:schemeClr val="accent1"/>
-          </a:fillRef>
-          <a:effectRef idx="2">
-            <a:schemeClr val="accent1"/>
-          </a:effectRef>
-          <a:fontRef idx="minor">
-            <a:schemeClr val="lt1"/>
-          </a:fontRef>
-        </p:style>
-        <p:txBody>
-          <a:bodyPr rtlCol="0" anchor="ctr"/>
-          <a:lstStyle/>
-          <a:p>
-            <a:pPr algn="ctr">
-              <a:defRPr sz="1300" b="1">
-                <a:solidFill>
-                  <a:srgbClr val="FFFFFF"/>
-                </a:solidFill>
-              </a:defRPr>
-            </a:pPr>
-            <a:r>
-              <a:t>Phép toán chủ đạo: Cross-Attention trong Transformer decoder</a:t>
-            </a:r>
-          </a:p>
-        </p:txBody>
-      </p:sp>
-      <p:sp>
-        <p:nvSpPr>
-          <p:cNvPr id="6" name="Rounded Rectangle 5"/>
-          <p:cNvSpPr/>
-          <p:nvPr/>
-        </p:nvSpPr>
-        <p:spPr>
-          <a:xfrm>
-            <a:off x="457200" y="1463040"/>
-            <a:ext cx="10972800" cy="365760"/>
-          </a:xfrm>
-          <a:prstGeom prst="roundRect">
-            <a:avLst/>
-          </a:prstGeom>
-          <a:solidFill>
-            <a:srgbClr val="D6EAF8"/>
-          </a:solidFill>
-          <a:ln w="12700">
-            <a:solidFill>
-              <a:srgbClr val="2E86DE"/>
-            </a:solidFill>
-          </a:ln>
-        </p:spPr>
-        <p:style>
-          <a:lnRef idx="1">
-            <a:schemeClr val="accent1"/>
-          </a:lnRef>
-          <a:fillRef idx="3">
-            <a:schemeClr val="accent1"/>
-          </a:fillRef>
-          <a:effectRef idx="2">
-            <a:schemeClr val="accent1"/>
-          </a:effectRef>
-          <a:fontRef idx="minor">
-            <a:schemeClr val="lt1"/>
-          </a:fontRef>
-        </p:style>
-        <p:txBody>
-          <a:bodyPr rtlCol="0" anchor="ctr" wrap="square" lIns="127000" rIns="127000" tIns="63500"/>
-          <a:lstStyle/>
-          <a:p>
-            <a:pPr algn="ctr"/>
-          </a:p>
-        </p:txBody>
-      </p:sp>
-      <p:sp>
-        <p:nvSpPr>
-          <p:cNvPr id="7" name="TextBox 6"/>
+      <p:pic>
+        <p:nvPicPr>
+          <p:cNvPr id="5" name="Picture 4" descr="vietocr-attention.png"/>
+          <p:cNvPicPr>
+            <a:picLocks noChangeAspect="1"/>
+          </p:cNvPicPr>
+          <p:nvPr/>
+        </p:nvPicPr>
+        <p:blipFill>
+          <a:blip r:embed="rId2"/>
+          <a:stretch>
+            <a:fillRect/>
+          </a:stretch>
+        </p:blipFill>
+        <p:spPr>
+          <a:xfrm>
+            <a:off x="6400800" y="1188720"/>
+            <a:ext cx="5303520" cy="2743200"/>
+          </a:xfrm>
+          <a:prstGeom prst="rect">
+            <a:avLst/>
+          </a:prstGeom>
+        </p:spPr>
+      </p:pic>
+      <p:sp>
+        <p:nvSpPr>
+          <p:cNvPr id="6" name="TextBox 5"/>
           <p:cNvSpPr txBox="1"/>
           <p:nvPr/>
         </p:nvSpPr>
         <p:spPr>
           <a:xfrm>
-            <a:off x="457200" y="2011680"/>
-            <a:ext cx="10972800" cy="5029200"/>
+            <a:off x="457200" y="1005840"/>
+            <a:ext cx="5943600" cy="5029200"/>
           </a:xfrm>
           <a:prstGeom prst="rect">
             <a:avLst/>
@@ -6877,6 +5076,33 @@
               </a:defRPr>
             </a:pPr>
             <a:r>
+              <a:t>Phép toán chủ đạo: Cross-Attention trong Transformer decoder</a:t>
+            </a:r>
+          </a:p>
+          <a:p>
+            <a:pPr>
+              <a:spcBef>
+                <a:spcPts val="500"/>
+              </a:spcBef>
+              <a:defRPr sz="1500">
+                <a:solidFill>
+                  <a:srgbClr val="2C3E50"/>
+                </a:solidFill>
+              </a:defRPr>
+            </a:pPr>
+          </a:p>
+          <a:p>
+            <a:pPr>
+              <a:spcBef>
+                <a:spcPts val="1400"/>
+              </a:spcBef>
+              <a:defRPr sz="1800" b="1">
+                <a:solidFill>
+                  <a:srgbClr val="2E86DE"/>
+                </a:solidFill>
+              </a:defRPr>
+            </a:pPr>
+            <a:r>
               <a:t>Pipeline:</a:t>
             </a:r>
           </a:p>
@@ -6892,7 +5118,7 @@
               </a:defRPr>
             </a:pPr>
             <a:r>
-              <a:t>• F = CNN_Encoder(ảnh)  → shape: (H/4, W/4, C)</a:t>
+              <a:t>• F = CNN_Encoder(ảnh) → shape: (H/4, W/4, C)</a:t>
             </a:r>
           </a:p>
           <a:p>
@@ -6964,7 +5190,7 @@
               </a:defRPr>
             </a:pPr>
             <a:r>
-              <a:t>Attention:</a:t>
+              <a:t>Đặc biệt tiếng Việt:</a:t>
             </a:r>
           </a:p>
           <a:p>
@@ -6979,7 +5205,7 @@
               </a:defRPr>
             </a:pPr>
             <a:r>
-              <a:t>• α_{t,s} = softmax(Q_t · K_s / √d_k) — cho phép 'nhìn' vào vùng feature tương ứng</a:t>
+              <a:t>• Khi sinh "ề", decoder attend mạnh vào vùng có dấu phụ kép</a:t>
             </a:r>
           </a:p>
           <a:p>
@@ -6993,50 +5219,8 @@
                 </a:solidFill>
               </a:defRPr>
             </a:pPr>
-          </a:p>
-          <a:p>
-            <a:pPr>
-              <a:spcBef>
-                <a:spcPts val="1400"/>
-              </a:spcBef>
-              <a:defRPr sz="1800" b="1">
-                <a:solidFill>
-                  <a:srgbClr val="2E86DE"/>
-                </a:solidFill>
-              </a:defRPr>
-            </a:pPr>
-            <a:r>
-              <a:t>Đặc biệt tiếng Việt:</a:t>
-            </a:r>
-          </a:p>
-          <a:p>
-            <a:pPr>
-              <a:spcBef>
-                <a:spcPts val="500"/>
-              </a:spcBef>
-              <a:defRPr sz="1500">
-                <a:solidFill>
-                  <a:srgbClr val="2C3E50"/>
-                </a:solidFill>
-              </a:defRPr>
-            </a:pPr>
-            <a:r>
-              <a:t>• Khi sinh "ề", decoder attend mạnh vào vùng có dấu phụ kép (mũ + huyền)</a:t>
-            </a:r>
-          </a:p>
-          <a:p>
-            <a:pPr>
-              <a:spcBef>
-                <a:spcPts val="500"/>
-              </a:spcBef>
-              <a:defRPr sz="1500">
-                <a:solidFill>
-                  <a:srgbClr val="2C3E50"/>
-                </a:solidFill>
-              </a:defRPr>
-            </a:pPr>
-            <a:r>
-              <a:t>• Vocab: 130–150 ký tự Unicode tiếng Việt + dấu câu + số</a:t>
+            <a:r>
+              <a:t>• Vocab: 130–150 ký tự Unicode tiếng Việt</a:t>
             </a:r>
           </a:p>
         </p:txBody>
@@ -7046,13 +5230,10 @@
   <p:clrMapOvr>
     <a:masterClrMapping/>
   </p:clrMapOvr>
-  <p:transition spd="med" advTm="800">
-    <p:fade/>
-  </p:transition>
 </p:sld>
 </file>
 
-<file path=ppt/slides/slide2.xml><?xml version="1.0" encoding="utf-8"?>
+<file path=ppt/slides/slide15.xml><?xml version="1.0" encoding="utf-8"?>
 <p:sld xmlns:a="http://schemas.openxmlformats.org/drawingml/2006/main" xmlns:p="http://schemas.openxmlformats.org/presentationml/2006/main" xmlns:r="http://schemas.openxmlformats.org/officeDocument/2006/relationships">
   <p:cSld>
     <p:spTree>
@@ -7152,7 +5333,7 @@
               </a:defRPr>
             </a:pPr>
             <a:r>
-              <a:t>Trích xuất Hóa đơn Tiếng Việt — Pipeline PaddleOCR • VietOCR • LayoutLMv3</a:t>
+              <a:t>Trích xuất Hóa đơn Tiếng Việt — PaddleOCR • VietOCR • LayoutLMv3</a:t>
             </a:r>
           </a:p>
         </p:txBody>
@@ -7187,21 +5368,45 @@
               </a:defRPr>
             </a:pPr>
             <a:r>
-              <a:t>NỘI DUNG TRÌNH BÀY</a:t>
-            </a:r>
-          </a:p>
-        </p:txBody>
-      </p:sp>
-      <p:sp>
-        <p:nvSpPr>
-          <p:cNvPr id="5" name="TextBox 4"/>
+              <a:t>LayoutLMv3 — Multi-modal Transformer</a:t>
+            </a:r>
+          </a:p>
+        </p:txBody>
+      </p:sp>
+      <p:pic>
+        <p:nvPicPr>
+          <p:cNvPr id="5" name="Picture 4" descr="layoutlmv3.png"/>
+          <p:cNvPicPr>
+            <a:picLocks noChangeAspect="1"/>
+          </p:cNvPicPr>
+          <p:nvPr/>
+        </p:nvPicPr>
+        <p:blipFill>
+          <a:blip r:embed="rId2"/>
+          <a:stretch>
+            <a:fillRect/>
+          </a:stretch>
+        </p:blipFill>
+        <p:spPr>
+          <a:xfrm>
+            <a:off x="6400800" y="1188720"/>
+            <a:ext cx="5303520" cy="2743200"/>
+          </a:xfrm>
+          <a:prstGeom prst="rect">
+            <a:avLst/>
+          </a:prstGeom>
+        </p:spPr>
+      </p:pic>
+      <p:sp>
+        <p:nvSpPr>
+          <p:cNvPr id="6" name="TextBox 5"/>
           <p:cNvSpPr txBox="1"/>
           <p:nvPr/>
         </p:nvSpPr>
         <p:spPr>
           <a:xfrm>
             <a:off x="457200" y="1005840"/>
-            <a:ext cx="10972800" cy="5029200"/>
+            <a:ext cx="5943600" cy="5029200"/>
           </a:xfrm>
           <a:prstGeom prst="rect">
             <a:avLst/>
@@ -7225,8 +5430,20 @@
               </a:defRPr>
             </a:pPr>
             <a:r>
-              <a:t>1. Mở đầu — Bối cảnh bài toán</a:t>
-            </a:r>
+              <a:t>Phép toán chủ đạo: Unified Self-Attention qua cả 3 modality</a:t>
+            </a:r>
+          </a:p>
+          <a:p>
+            <a:pPr>
+              <a:spcBef>
+                <a:spcPts val="500"/>
+              </a:spcBef>
+              <a:defRPr sz="1500">
+                <a:solidFill>
+                  <a:srgbClr val="2C3E50"/>
+                </a:solidFill>
+              </a:defRPr>
+            </a:pPr>
           </a:p>
           <a:p>
             <a:pPr>
@@ -7240,8 +5457,35 @@
               </a:defRPr>
             </a:pPr>
             <a:r>
-              <a:t>2. Tổng quan — Mô hình hóa &amp; Pipeline</a:t>
-            </a:r>
+              <a:t>Input token i:</a:t>
+            </a:r>
+          </a:p>
+          <a:p>
+            <a:pPr>
+              <a:spcBef>
+                <a:spcPts val="500"/>
+              </a:spcBef>
+              <a:defRPr sz="1500">
+                <a:solidFill>
+                  <a:srgbClr val="2C3E50"/>
+                </a:solidFill>
+              </a:defRPr>
+            </a:pPr>
+            <a:r>
+              <a:t>• e_i = E_text(token_i) + E_1D(pos_i) + E_2D(x1,y1,x2,y2,w,h)</a:t>
+            </a:r>
+          </a:p>
+          <a:p>
+            <a:pPr>
+              <a:spcBef>
+                <a:spcPts val="500"/>
+              </a:spcBef>
+              <a:defRPr sz="1500">
+                <a:solidFill>
+                  <a:srgbClr val="2C3E50"/>
+                </a:solidFill>
+              </a:defRPr>
+            </a:pPr>
           </a:p>
           <a:p>
             <a:pPr>
@@ -7255,8 +5499,35 @@
               </a:defRPr>
             </a:pPr>
             <a:r>
-              <a:t>3. Phân loại &amp; Tiến hóa — 3 thế hệ thuật toán</a:t>
-            </a:r>
+              <a:t>Image patch j:</a:t>
+            </a:r>
+          </a:p>
+          <a:p>
+            <a:pPr>
+              <a:spcBef>
+                <a:spcPts val="500"/>
+              </a:spcBef>
+              <a:defRPr sz="1500">
+                <a:solidFill>
+                  <a:srgbClr val="2C3E50"/>
+                </a:solidFill>
+              </a:defRPr>
+            </a:pPr>
+            <a:r>
+              <a:t>• v_j = LinearProj(patch_j) + E_img_pos(j)</a:t>
+            </a:r>
+          </a:p>
+          <a:p>
+            <a:pPr>
+              <a:spcBef>
+                <a:spcPts val="500"/>
+              </a:spcBef>
+              <a:defRPr sz="1500">
+                <a:solidFill>
+                  <a:srgbClr val="2C3E50"/>
+                </a:solidFill>
+              </a:defRPr>
+            </a:pPr>
           </a:p>
           <a:p>
             <a:pPr>
@@ -7270,67 +5541,52 @@
               </a:defRPr>
             </a:pPr>
             <a:r>
-              <a:t>4. Trực giác — Con người đọc hóa đơn ra sao?</a:t>
-            </a:r>
-          </a:p>
-          <a:p>
-            <a:pPr>
-              <a:spcBef>
-                <a:spcPts val="1400"/>
-              </a:spcBef>
-              <a:defRPr sz="1800" b="1">
-                <a:solidFill>
-                  <a:srgbClr val="2E86DE"/>
-                </a:solidFill>
-              </a:defRPr>
-            </a:pPr>
-            <a:r>
-              <a:t>5. Toán học hóa — Công thức cốt lõi</a:t>
-            </a:r>
-          </a:p>
-          <a:p>
-            <a:pPr>
-              <a:spcBef>
-                <a:spcPts val="1400"/>
-              </a:spcBef>
-              <a:defRPr sz="1800" b="1">
-                <a:solidFill>
-                  <a:srgbClr val="2E86DE"/>
-                </a:solidFill>
-              </a:defRPr>
-            </a:pPr>
-            <a:r>
-              <a:t>6. Khoảng cách — Lý thuyết vs Thực tế</a:t>
-            </a:r>
-          </a:p>
-          <a:p>
-            <a:pPr>
-              <a:spcBef>
-                <a:spcPts val="1400"/>
-              </a:spcBef>
-              <a:defRPr sz="1800" b="1">
-                <a:solidFill>
-                  <a:srgbClr val="2E86DE"/>
-                </a:solidFill>
-              </a:defRPr>
-            </a:pPr>
-            <a:r>
-              <a:t>7. Thách thức — Rào cản &amp; Hướng phát triển</a:t>
-            </a:r>
-          </a:p>
-          <a:p>
-            <a:pPr>
-              <a:spcBef>
-                <a:spcPts val="1400"/>
-              </a:spcBef>
-              <a:defRPr sz="1800" b="1">
-                <a:solidFill>
-                  <a:srgbClr val="2E86DE"/>
-                </a:solidFill>
-              </a:defRPr>
-            </a:pPr>
-            <a:r>
-              <a:t>8. Kết luận</a:t>
+              <a:t>Pre-training objectives:</a:t>
+            </a:r>
+          </a:p>
+          <a:p>
+            <a:pPr>
+              <a:spcBef>
+                <a:spcPts val="500"/>
+              </a:spcBef>
+              <a:defRPr sz="1500">
+                <a:solidFill>
+                  <a:srgbClr val="2C3E50"/>
+                </a:solidFill>
+              </a:defRPr>
+            </a:pPr>
+            <a:r>
+              <a:t>• Masked Language Modeling (MLM) trên text</a:t>
+            </a:r>
+          </a:p>
+          <a:p>
+            <a:pPr>
+              <a:spcBef>
+                <a:spcPts val="500"/>
+              </a:spcBef>
+              <a:defRPr sz="1500">
+                <a:solidFill>
+                  <a:srgbClr val="2C3E50"/>
+                </a:solidFill>
+              </a:defRPr>
+            </a:pPr>
+            <a:r>
+              <a:t>• Masked Image Modeling (MIM) trên ảnh</a:t>
+            </a:r>
+          </a:p>
+          <a:p>
+            <a:pPr>
+              <a:spcBef>
+                <a:spcPts val="500"/>
+              </a:spcBef>
+              <a:defRPr sz="1500">
+                <a:solidFill>
+                  <a:srgbClr val="2C3E50"/>
+                </a:solidFill>
+              </a:defRPr>
+            </a:pPr>
+            <a:r>
+              <a:t>• Text-Image Alignment</a:t>
             </a:r>
           </a:p>
         </p:txBody>
@@ -7340,13 +5596,10 @@
   <p:clrMapOvr>
     <a:masterClrMapping/>
   </p:clrMapOvr>
-  <p:transition spd="med" advTm="800">
-    <p:fade/>
-  </p:transition>
 </p:sld>
 </file>
 
-<file path=ppt/slides/slide20.xml><?xml version="1.0" encoding="utf-8"?>
+<file path=ppt/slides/slide16.xml><?xml version="1.0" encoding="utf-8"?>
 <p:sld xmlns:a="http://schemas.openxmlformats.org/drawingml/2006/main" xmlns:p="http://schemas.openxmlformats.org/presentationml/2006/main" xmlns:r="http://schemas.openxmlformats.org/officeDocument/2006/relationships">
   <p:cSld>
     <p:spTree>
@@ -7446,548 +5699,7 @@
               </a:defRPr>
             </a:pPr>
             <a:r>
-              <a:t>Trích xuất Hóa đơn Tiếng Việt — Pipeline PaddleOCR • VietOCR • LayoutLMv3</a:t>
-            </a:r>
-          </a:p>
-        </p:txBody>
-      </p:sp>
-      <p:sp>
-        <p:nvSpPr>
-          <p:cNvPr id="4" name="TextBox 3"/>
-          <p:cNvSpPr txBox="1"/>
-          <p:nvPr/>
-        </p:nvSpPr>
-        <p:spPr>
-          <a:xfrm>
-            <a:off x="457200" y="137160"/>
-            <a:ext cx="10972800" cy="731520"/>
-          </a:xfrm>
-          <a:prstGeom prst="rect">
-            <a:avLst/>
-          </a:prstGeom>
-          <a:noFill/>
-        </p:spPr>
-        <p:txBody>
-          <a:bodyPr wrap="none">
-            <a:spAutoFit/>
-          </a:bodyPr>
-          <a:lstStyle/>
-          <a:p>
-            <a:pPr>
-              <a:defRPr sz="2600" b="1">
-                <a:solidFill>
-                  <a:srgbClr val="1B2A4A"/>
-                </a:solidFill>
-              </a:defRPr>
-            </a:pPr>
-            <a:r>
-              <a:t>LayoutLMv3 — Multi-modal Transformer</a:t>
-            </a:r>
-          </a:p>
-        </p:txBody>
-      </p:sp>
-      <p:sp>
-        <p:nvSpPr>
-          <p:cNvPr id="5" name="Rounded Rectangle 4"/>
-          <p:cNvSpPr/>
-          <p:nvPr/>
-        </p:nvSpPr>
-        <p:spPr>
-          <a:xfrm>
-            <a:off x="457200" y="1097280"/>
-            <a:ext cx="10972800" cy="365760"/>
-          </a:xfrm>
-          <a:prstGeom prst="roundRect">
-            <a:avLst/>
-          </a:prstGeom>
-          <a:solidFill>
-            <a:srgbClr val="2E86DE"/>
-          </a:solidFill>
-          <a:ln>
-            <a:noFill/>
-          </a:ln>
-        </p:spPr>
-        <p:style>
-          <a:lnRef idx="1">
-            <a:schemeClr val="accent1"/>
-          </a:lnRef>
-          <a:fillRef idx="3">
-            <a:schemeClr val="accent1"/>
-          </a:fillRef>
-          <a:effectRef idx="2">
-            <a:schemeClr val="accent1"/>
-          </a:effectRef>
-          <a:fontRef idx="minor">
-            <a:schemeClr val="lt1"/>
-          </a:fontRef>
-        </p:style>
-        <p:txBody>
-          <a:bodyPr rtlCol="0" anchor="ctr"/>
-          <a:lstStyle/>
-          <a:p>
-            <a:pPr algn="ctr">
-              <a:defRPr sz="1300" b="1">
-                <a:solidFill>
-                  <a:srgbClr val="FFFFFF"/>
-                </a:solidFill>
-              </a:defRPr>
-            </a:pPr>
-            <a:r>
-              <a:t>Phép toán chủ đạo: Unified Self-Attention qua cả 3 modality</a:t>
-            </a:r>
-          </a:p>
-        </p:txBody>
-      </p:sp>
-      <p:sp>
-        <p:nvSpPr>
-          <p:cNvPr id="6" name="Rounded Rectangle 5"/>
-          <p:cNvSpPr/>
-          <p:nvPr/>
-        </p:nvSpPr>
-        <p:spPr>
-          <a:xfrm>
-            <a:off x="457200" y="1463040"/>
-            <a:ext cx="10972800" cy="365760"/>
-          </a:xfrm>
-          <a:prstGeom prst="roundRect">
-            <a:avLst/>
-          </a:prstGeom>
-          <a:solidFill>
-            <a:srgbClr val="D6EAF8"/>
-          </a:solidFill>
-          <a:ln w="12700">
-            <a:solidFill>
-              <a:srgbClr val="2E86DE"/>
-            </a:solidFill>
-          </a:ln>
-        </p:spPr>
-        <p:style>
-          <a:lnRef idx="1">
-            <a:schemeClr val="accent1"/>
-          </a:lnRef>
-          <a:fillRef idx="3">
-            <a:schemeClr val="accent1"/>
-          </a:fillRef>
-          <a:effectRef idx="2">
-            <a:schemeClr val="accent1"/>
-          </a:effectRef>
-          <a:fontRef idx="minor">
-            <a:schemeClr val="lt1"/>
-          </a:fontRef>
-        </p:style>
-        <p:txBody>
-          <a:bodyPr rtlCol="0" anchor="ctr" wrap="square" lIns="127000" rIns="127000" tIns="63500"/>
-          <a:lstStyle/>
-          <a:p>
-            <a:pPr algn="ctr"/>
-          </a:p>
-        </p:txBody>
-      </p:sp>
-      <p:sp>
-        <p:nvSpPr>
-          <p:cNvPr id="7" name="TextBox 6"/>
-          <p:cNvSpPr txBox="1"/>
-          <p:nvPr/>
-        </p:nvSpPr>
-        <p:spPr>
-          <a:xfrm>
-            <a:off x="457200" y="2011680"/>
-            <a:ext cx="10972800" cy="5029200"/>
-          </a:xfrm>
-          <a:prstGeom prst="rect">
-            <a:avLst/>
-          </a:prstGeom>
-          <a:noFill/>
-        </p:spPr>
-        <p:txBody>
-          <a:bodyPr wrap="square">
-            <a:spAutoFit/>
-          </a:bodyPr>
-          <a:lstStyle/>
-          <a:p>
-            <a:pPr>
-              <a:spcBef>
-                <a:spcPts val="1400"/>
-              </a:spcBef>
-              <a:defRPr sz="1800" b="1">
-                <a:solidFill>
-                  <a:srgbClr val="2E86DE"/>
-                </a:solidFill>
-              </a:defRPr>
-            </a:pPr>
-            <a:r>
-              <a:t>Input token i:</a:t>
-            </a:r>
-          </a:p>
-          <a:p>
-            <a:pPr>
-              <a:spcBef>
-                <a:spcPts val="500"/>
-              </a:spcBef>
-              <a:defRPr sz="1500">
-                <a:solidFill>
-                  <a:srgbClr val="2C3E50"/>
-                </a:solidFill>
-              </a:defRPr>
-            </a:pPr>
-            <a:r>
-              <a:t>• e_i = E_text(token_i) + E_1D(pos_i) + E_2D(x1,y1,x2,y2,w,h)</a:t>
-            </a:r>
-          </a:p>
-          <a:p>
-            <a:pPr>
-              <a:spcBef>
-                <a:spcPts val="500"/>
-              </a:spcBef>
-              <a:defRPr sz="1500">
-                <a:solidFill>
-                  <a:srgbClr val="2C3E50"/>
-                </a:solidFill>
-              </a:defRPr>
-            </a:pPr>
-          </a:p>
-          <a:p>
-            <a:pPr>
-              <a:spcBef>
-                <a:spcPts val="1400"/>
-              </a:spcBef>
-              <a:defRPr sz="1800" b="1">
-                <a:solidFill>
-                  <a:srgbClr val="2E86DE"/>
-                </a:solidFill>
-              </a:defRPr>
-            </a:pPr>
-            <a:r>
-              <a:t>Image patch j:</a:t>
-            </a:r>
-          </a:p>
-          <a:p>
-            <a:pPr>
-              <a:spcBef>
-                <a:spcPts val="500"/>
-              </a:spcBef>
-              <a:defRPr sz="1500">
-                <a:solidFill>
-                  <a:srgbClr val="2C3E50"/>
-                </a:solidFill>
-              </a:defRPr>
-            </a:pPr>
-            <a:r>
-              <a:t>• v_j = LinearProj(patch_j) + E_img_pos(j)</a:t>
-            </a:r>
-          </a:p>
-          <a:p>
-            <a:pPr>
-              <a:spcBef>
-                <a:spcPts val="500"/>
-              </a:spcBef>
-              <a:defRPr sz="1500">
-                <a:solidFill>
-                  <a:srgbClr val="2C3E50"/>
-                </a:solidFill>
-              </a:defRPr>
-            </a:pPr>
-          </a:p>
-          <a:p>
-            <a:pPr>
-              <a:spcBef>
-                <a:spcPts val="1400"/>
-              </a:spcBef>
-              <a:defRPr sz="1800" b="1">
-                <a:solidFill>
-                  <a:srgbClr val="2E86DE"/>
-                </a:solidFill>
-              </a:defRPr>
-            </a:pPr>
-            <a:r>
-              <a:t>Concatenate → Transformer → Contextualized representations</a:t>
-            </a:r>
-          </a:p>
-          <a:p>
-            <a:pPr>
-              <a:spcBef>
-                <a:spcPts val="500"/>
-              </a:spcBef>
-              <a:defRPr sz="1500">
-                <a:solidFill>
-                  <a:srgbClr val="2C3E50"/>
-                </a:solidFill>
-              </a:defRPr>
-            </a:pPr>
-          </a:p>
-          <a:p>
-            <a:pPr>
-              <a:spcBef>
-                <a:spcPts val="1400"/>
-              </a:spcBef>
-              <a:defRPr sz="1800" b="1">
-                <a:solidFill>
-                  <a:srgbClr val="2E86DE"/>
-                </a:solidFill>
-              </a:defRPr>
-            </a:pPr>
-            <a:r>
-              <a:t>Pre-training objectives:</a:t>
-            </a:r>
-          </a:p>
-          <a:p>
-            <a:pPr>
-              <a:spcBef>
-                <a:spcPts val="500"/>
-              </a:spcBef>
-              <a:defRPr sz="1500">
-                <a:solidFill>
-                  <a:srgbClr val="2C3E50"/>
-                </a:solidFill>
-              </a:defRPr>
-            </a:pPr>
-            <a:r>
-              <a:t>• Masked Language Modeling (MLM) trên text</a:t>
-            </a:r>
-          </a:p>
-          <a:p>
-            <a:pPr>
-              <a:spcBef>
-                <a:spcPts val="500"/>
-              </a:spcBef>
-              <a:defRPr sz="1500">
-                <a:solidFill>
-                  <a:srgbClr val="2C3E50"/>
-                </a:solidFill>
-              </a:defRPr>
-            </a:pPr>
-            <a:r>
-              <a:t>• Masked Image Modeling (MIM) trên ảnh</a:t>
-            </a:r>
-          </a:p>
-          <a:p>
-            <a:pPr>
-              <a:spcBef>
-                <a:spcPts val="500"/>
-              </a:spcBef>
-              <a:defRPr sz="1500">
-                <a:solidFill>
-                  <a:srgbClr val="2C3E50"/>
-                </a:solidFill>
-              </a:defRPr>
-            </a:pPr>
-            <a:r>
-              <a:t>• Text-Image Alignment</a:t>
-            </a:r>
-          </a:p>
-        </p:txBody>
-      </p:sp>
-    </p:spTree>
-  </p:cSld>
-  <p:clrMapOvr>
-    <a:masterClrMapping/>
-  </p:clrMapOvr>
-  <p:transition spd="med" advTm="800">
-    <p:fade/>
-  </p:transition>
-</p:sld>
-</file>
-
-<file path=ppt/slides/slide21.xml><?xml version="1.0" encoding="utf-8"?>
-<p:sld xmlns:a="http://schemas.openxmlformats.org/drawingml/2006/main" xmlns:p="http://schemas.openxmlformats.org/presentationml/2006/main" xmlns:r="http://schemas.openxmlformats.org/officeDocument/2006/relationships">
-  <p:cSld>
-    <p:bg>
-      <p:bgPr>
-        <a:solidFill>
-          <a:srgbClr val="2E86DE"/>
-        </a:solidFill>
-        <a:effectLst/>
-      </p:bgPr>
-    </p:bg>
-    <p:spTree>
-      <p:nvGrpSpPr>
-        <p:cNvPr id="1" name=""/>
-        <p:cNvGrpSpPr/>
-        <p:nvPr/>
-      </p:nvGrpSpPr>
-      <p:grpSpPr/>
-      <p:sp>
-        <p:nvSpPr>
-          <p:cNvPr id="2" name="TextBox 1"/>
-          <p:cNvSpPr txBox="1"/>
-          <p:nvPr/>
-        </p:nvSpPr>
-        <p:spPr>
-          <a:xfrm>
-            <a:off x="914400" y="2286000"/>
-            <a:ext cx="1828800" cy="1371600"/>
-          </a:xfrm>
-          <a:prstGeom prst="rect">
-            <a:avLst/>
-          </a:prstGeom>
-          <a:noFill/>
-        </p:spPr>
-        <p:txBody>
-          <a:bodyPr wrap="none">
-            <a:spAutoFit/>
-          </a:bodyPr>
-          <a:lstStyle/>
-          <a:p>
-            <a:pPr>
-              <a:defRPr sz="7200" b="1">
-                <a:solidFill>
-                  <a:srgbClr val="FFFFFF"/>
-                </a:solidFill>
-              </a:defRPr>
-            </a:pPr>
-            <a:r>
-              <a:t>06</a:t>
-            </a:r>
-          </a:p>
-        </p:txBody>
-      </p:sp>
-      <p:sp>
-        <p:nvSpPr>
-          <p:cNvPr id="3" name="TextBox 2"/>
-          <p:cNvSpPr txBox="1"/>
-          <p:nvPr/>
-        </p:nvSpPr>
-        <p:spPr>
-          <a:xfrm>
-            <a:off x="914400" y="3657600"/>
-            <a:ext cx="9144000" cy="1371600"/>
-          </a:xfrm>
-          <a:prstGeom prst="rect">
-            <a:avLst/>
-          </a:prstGeom>
-          <a:noFill/>
-        </p:spPr>
-        <p:txBody>
-          <a:bodyPr wrap="square">
-            <a:spAutoFit/>
-          </a:bodyPr>
-          <a:lstStyle/>
-          <a:p>
-            <a:pPr>
-              <a:defRPr sz="3200" b="1">
-                <a:solidFill>
-                  <a:srgbClr val="FFFFFF"/>
-                </a:solidFill>
-              </a:defRPr>
-            </a:pPr>
-            <a:r>
-              <a:t>KHOẢNG CÁCH GIỮA LÝ THUYẾT VÀ THỰC TẾ</a:t>
-            </a:r>
-          </a:p>
-        </p:txBody>
-      </p:sp>
-    </p:spTree>
-  </p:cSld>
-  <p:clrMapOvr>
-    <a:masterClrMapping/>
-  </p:clrMapOvr>
-  <p:transition spd="med" advTm="1000">
-    <p:fade/>
-  </p:transition>
-</p:sld>
-</file>
-
-<file path=ppt/slides/slide22.xml><?xml version="1.0" encoding="utf-8"?>
-<p:sld xmlns:a="http://schemas.openxmlformats.org/drawingml/2006/main" xmlns:p="http://schemas.openxmlformats.org/presentationml/2006/main" xmlns:r="http://schemas.openxmlformats.org/officeDocument/2006/relationships">
-  <p:cSld>
-    <p:spTree>
-      <p:nvGrpSpPr>
-        <p:cNvPr id="1" name=""/>
-        <p:cNvGrpSpPr/>
-        <p:nvPr/>
-      </p:nvGrpSpPr>
-      <p:grpSpPr/>
-      <p:sp>
-        <p:nvSpPr>
-          <p:cNvPr id="2" name="Rectangle 1"/>
-          <p:cNvSpPr/>
-          <p:nvPr/>
-        </p:nvSpPr>
-        <p:spPr>
-          <a:xfrm>
-            <a:off x="0" y="0"/>
-            <a:ext cx="12191695" cy="54864"/>
-          </a:xfrm>
-          <a:prstGeom prst="rect">
-            <a:avLst/>
-          </a:prstGeom>
-          <a:solidFill>
-            <a:srgbClr val="2E86DE"/>
-          </a:solidFill>
-          <a:ln>
-            <a:noFill/>
-          </a:ln>
-        </p:spPr>
-        <p:style>
-          <a:lnRef idx="1">
-            <a:schemeClr val="accent1"/>
-          </a:lnRef>
-          <a:fillRef idx="3">
-            <a:schemeClr val="accent1"/>
-          </a:fillRef>
-          <a:effectRef idx="2">
-            <a:schemeClr val="accent1"/>
-          </a:effectRef>
-          <a:fontRef idx="minor">
-            <a:schemeClr val="lt1"/>
-          </a:fontRef>
-        </p:style>
-        <p:txBody>
-          <a:bodyPr rtlCol="0" anchor="ctr"/>
-          <a:lstStyle/>
-          <a:p>
-            <a:pPr algn="ctr"/>
-          </a:p>
-        </p:txBody>
-      </p:sp>
-      <p:sp>
-        <p:nvSpPr>
-          <p:cNvPr id="3" name="Rectangle 2"/>
-          <p:cNvSpPr/>
-          <p:nvPr/>
-        </p:nvSpPr>
-        <p:spPr>
-          <a:xfrm>
-            <a:off x="0" y="6492240"/>
-            <a:ext cx="12191695" cy="365760"/>
-          </a:xfrm>
-          <a:prstGeom prst="rect">
-            <a:avLst/>
-          </a:prstGeom>
-          <a:solidFill>
-            <a:srgbClr val="1B2A4A"/>
-          </a:solidFill>
-          <a:ln>
-            <a:noFill/>
-          </a:ln>
-        </p:spPr>
-        <p:style>
-          <a:lnRef idx="1">
-            <a:schemeClr val="accent1"/>
-          </a:lnRef>
-          <a:fillRef idx="3">
-            <a:schemeClr val="accent1"/>
-          </a:fillRef>
-          <a:effectRef idx="2">
-            <a:schemeClr val="accent1"/>
-          </a:effectRef>
-          <a:fontRef idx="minor">
-            <a:schemeClr val="lt1"/>
-          </a:fontRef>
-        </p:style>
-        <p:txBody>
-          <a:bodyPr rtlCol="0" anchor="ctr"/>
-          <a:lstStyle/>
-          <a:p>
-            <a:pPr algn="ctr">
-              <a:defRPr sz="1000">
-                <a:solidFill>
-                  <a:srgbClr val="FFFFFF"/>
-                </a:solidFill>
-              </a:defRPr>
-            </a:pPr>
-            <a:r>
-              <a:t>Trích xuất Hóa đơn Tiếng Việt — Pipeline PaddleOCR • VietOCR • LayoutLMv3</a:t>
+              <a:t>Trích xuất Hóa đơn Tiếng Việt — PaddleOCR • VietOCR • LayoutLMv3</a:t>
             </a:r>
           </a:p>
         </p:txBody>
@@ -8365,46 +6077,46 @@
           <a:p>
             <a:pPr>
               <a:spcBef>
-                <a:spcPts val="600"/>
+                <a:spcPts val="500"/>
               </a:spcBef>
               <a:defRPr sz="1500">
                 <a:solidFill>
-                  <a:srgbClr val="E74C3C"/>
-                </a:solidFill>
-              </a:defRPr>
-            </a:pPr>
-            <a:r>
-              <a:t>⚠ Field Exact Match: không có gradient</a:t>
-            </a:r>
-          </a:p>
-          <a:p>
-            <a:pPr>
-              <a:spcBef>
-                <a:spcPts val="600"/>
+                  <a:srgbClr val="2C3E50"/>
+                </a:solidFill>
+              </a:defRPr>
+            </a:pPr>
+            <a:r>
+              <a:t>• Field Exact Match: không có gradient</a:t>
+            </a:r>
+          </a:p>
+          <a:p>
+            <a:pPr>
+              <a:spcBef>
+                <a:spcPts val="500"/>
               </a:spcBef>
               <a:defRPr sz="1500">
                 <a:solidFill>
-                  <a:srgbClr val="E74C3C"/>
-                </a:solidFill>
-              </a:defRPr>
-            </a:pPr>
-            <a:r>
-              <a:t>⚠ CER (edit distance): không liên tục</a:t>
-            </a:r>
-          </a:p>
-          <a:p>
-            <a:pPr>
-              <a:spcBef>
-                <a:spcPts val="600"/>
+                  <a:srgbClr val="2C3E50"/>
+                </a:solidFill>
+              </a:defRPr>
+            </a:pPr>
+            <a:r>
+              <a:t>• CER (edit distance): không liên tục</a:t>
+            </a:r>
+          </a:p>
+          <a:p>
+            <a:pPr>
+              <a:spcBef>
+                <a:spcPts val="500"/>
               </a:spcBef>
               <a:defRPr sz="1500">
                 <a:solidFill>
-                  <a:srgbClr val="E74C3C"/>
-                </a:solidFill>
-              </a:defRPr>
-            </a:pPr>
-            <a:r>
-              <a:t>⚠ Entity F1: phụ thuộc ngưỡng confidence</a:t>
+                  <a:srgbClr val="2C3E50"/>
+                </a:solidFill>
+              </a:defRPr>
+            </a:pPr>
+            <a:r>
+              <a:t>• Entity F1: phụ thuộc ngưỡng confidence</a:t>
             </a:r>
           </a:p>
           <a:p>
@@ -8441,13 +6153,10 @@
   <p:clrMapOvr>
     <a:masterClrMapping/>
   </p:clrMapOvr>
-  <p:transition spd="med" advTm="800">
-    <p:fade/>
-  </p:transition>
 </p:sld>
 </file>
 
-<file path=ppt/slides/slide23.xml><?xml version="1.0" encoding="utf-8"?>
+<file path=ppt/slides/slide17.xml><?xml version="1.0" encoding="utf-8"?>
 <p:sld xmlns:a="http://schemas.openxmlformats.org/drawingml/2006/main" xmlns:p="http://schemas.openxmlformats.org/presentationml/2006/main" xmlns:r="http://schemas.openxmlformats.org/officeDocument/2006/relationships">
   <p:cSld>
     <p:spTree>
@@ -8547,7 +6256,7 @@
               </a:defRPr>
             </a:pPr>
             <a:r>
-              <a:t>Trích xuất Hóa đơn Tiếng Việt — Pipeline PaddleOCR • VietOCR • LayoutLMv3</a:t>
+              <a:t>Trích xuất Hóa đơn Tiếng Việt — PaddleOCR • VietOCR • LayoutLMv3</a:t>
             </a:r>
           </a:p>
         </p:txBody>
@@ -8634,7 +6343,7 @@
               </a:defRPr>
             </a:pPr>
             <a:r>
-              <a:t>⚠ Điểm đau lớn nhất</a:t>
+              <a:t>Điểm đau lớn nhất</a:t>
             </a:r>
           </a:p>
         </p:txBody>
@@ -8677,7 +6386,7 @@
           </a:fontRef>
         </p:style>
         <p:txBody>
-          <a:bodyPr rtlCol="0" anchor="ctr" wrap="square" lIns="127000" rIns="127000" tIns="63500"/>
+          <a:bodyPr rtlCol="0" anchor="ctr" wrap="square" lIns="127000" tIns="63500"/>
           <a:lstStyle/>
           <a:p>
             <a:pPr algn="ctr">
@@ -8691,7 +6400,7 @@
               </a:defRPr>
             </a:pPr>
             <a:r>
-              <a:t>• Mô hình có thể đạt CER rất thấp (98% ký tự đúng) nhưng Field Exact Match chỉ 70%</a:t>
+              <a:t>• Mô hình đạt CER 98% nhưng Field Exact Match chỉ 70%</a:t>
             </a:r>
           </a:p>
           <a:p>
@@ -8706,7 +6415,7 @@
               </a:defRPr>
             </a:pPr>
             <a:r>
-              <a:t>• Chỉ cần sai 1 ký tự trong '87.000' thành '87.500' là cả trường total sai hoàn toàn</a:t>
+              <a:t>• Chỉ cần sai 1 ký tự trong "87.000" thành "87.500" là cả trường total sai hoàn toàn</a:t>
             </a:r>
           </a:p>
         </p:txBody>
@@ -8799,112 +6508,10 @@
   <p:clrMapOvr>
     <a:masterClrMapping/>
   </p:clrMapOvr>
-  <p:transition spd="med" advTm="800">
-    <p:fade/>
-  </p:transition>
 </p:sld>
 </file>
 
-<file path=ppt/slides/slide24.xml><?xml version="1.0" encoding="utf-8"?>
-<p:sld xmlns:a="http://schemas.openxmlformats.org/drawingml/2006/main" xmlns:p="http://schemas.openxmlformats.org/presentationml/2006/main" xmlns:r="http://schemas.openxmlformats.org/officeDocument/2006/relationships">
-  <p:cSld>
-    <p:bg>
-      <p:bgPr>
-        <a:solidFill>
-          <a:srgbClr val="2E86DE"/>
-        </a:solidFill>
-        <a:effectLst/>
-      </p:bgPr>
-    </p:bg>
-    <p:spTree>
-      <p:nvGrpSpPr>
-        <p:cNvPr id="1" name=""/>
-        <p:cNvGrpSpPr/>
-        <p:nvPr/>
-      </p:nvGrpSpPr>
-      <p:grpSpPr/>
-      <p:sp>
-        <p:nvSpPr>
-          <p:cNvPr id="2" name="TextBox 1"/>
-          <p:cNvSpPr txBox="1"/>
-          <p:nvPr/>
-        </p:nvSpPr>
-        <p:spPr>
-          <a:xfrm>
-            <a:off x="914400" y="2286000"/>
-            <a:ext cx="1828800" cy="1371600"/>
-          </a:xfrm>
-          <a:prstGeom prst="rect">
-            <a:avLst/>
-          </a:prstGeom>
-          <a:noFill/>
-        </p:spPr>
-        <p:txBody>
-          <a:bodyPr wrap="none">
-            <a:spAutoFit/>
-          </a:bodyPr>
-          <a:lstStyle/>
-          <a:p>
-            <a:pPr>
-              <a:defRPr sz="7200" b="1">
-                <a:solidFill>
-                  <a:srgbClr val="FFFFFF"/>
-                </a:solidFill>
-              </a:defRPr>
-            </a:pPr>
-            <a:r>
-              <a:t>07</a:t>
-            </a:r>
-          </a:p>
-        </p:txBody>
-      </p:sp>
-      <p:sp>
-        <p:nvSpPr>
-          <p:cNvPr id="3" name="TextBox 2"/>
-          <p:cNvSpPr txBox="1"/>
-          <p:nvPr/>
-        </p:nvSpPr>
-        <p:spPr>
-          <a:xfrm>
-            <a:off x="914400" y="3657600"/>
-            <a:ext cx="9144000" cy="1371600"/>
-          </a:xfrm>
-          <a:prstGeom prst="rect">
-            <a:avLst/>
-          </a:prstGeom>
-          <a:noFill/>
-        </p:spPr>
-        <p:txBody>
-          <a:bodyPr wrap="square">
-            <a:spAutoFit/>
-          </a:bodyPr>
-          <a:lstStyle/>
-          <a:p>
-            <a:pPr>
-              <a:defRPr sz="3200" b="1">
-                <a:solidFill>
-                  <a:srgbClr val="FFFFFF"/>
-                </a:solidFill>
-              </a:defRPr>
-            </a:pPr>
-            <a:r>
-              <a:t>THÁCH THỨC &amp; RÀO CẢN</a:t>
-            </a:r>
-          </a:p>
-        </p:txBody>
-      </p:sp>
-    </p:spTree>
-  </p:cSld>
-  <p:clrMapOvr>
-    <a:masterClrMapping/>
-  </p:clrMapOvr>
-  <p:transition spd="med" advTm="1000">
-    <p:fade/>
-  </p:transition>
-</p:sld>
-</file>
-
-<file path=ppt/slides/slide25.xml><?xml version="1.0" encoding="utf-8"?>
+<file path=ppt/slides/slide18.xml><?xml version="1.0" encoding="utf-8"?>
 <p:sld xmlns:a="http://schemas.openxmlformats.org/drawingml/2006/main" xmlns:p="http://schemas.openxmlformats.org/presentationml/2006/main" xmlns:r="http://schemas.openxmlformats.org/officeDocument/2006/relationships">
   <p:cSld>
     <p:spTree>
@@ -9004,7 +6611,7 @@
               </a:defRPr>
             </a:pPr>
             <a:r>
-              <a:t>Trích xuất Hóa đơn Tiếng Việt — Pipeline PaddleOCR • VietOCR • LayoutLMv3</a:t>
+              <a:t>Trích xuất Hóa đơn Tiếng Việt — PaddleOCR • VietOCR • LayoutLMv3</a:t>
             </a:r>
           </a:p>
         </p:txBody>
@@ -9134,7 +6741,7 @@
           </a:fontRef>
         </p:style>
         <p:txBody>
-          <a:bodyPr rtlCol="0" anchor="ctr" wrap="square" lIns="127000" rIns="127000" tIns="63500"/>
+          <a:bodyPr rtlCol="0" anchor="ctr" wrap="square" lIns="127000" tIns="63500"/>
           <a:lstStyle/>
           <a:p>
             <a:pPr algn="ctr">
@@ -9148,7 +6755,7 @@
               </a:defRPr>
             </a:pPr>
             <a:r>
-              <a:t>• Văn bản đa hướng, cong → DB, ABCNet (bezier curves)</a:t>
+              <a:t>• Văn bản đa hướng, cong → DB, ABCNet</a:t>
             </a:r>
           </a:p>
           <a:p>
@@ -9163,7 +6770,7 @@
               </a:defRPr>
             </a:pPr>
             <a:r>
-              <a:t>• Font chữ đa dạng tiếng Việt → VietOCR pretrained + augmentation</a:t>
+              <a:t>• Font chữ đa dạng tiếng Việt → VietOCR pretrained</a:t>
             </a:r>
           </a:p>
           <a:p>
@@ -9178,7 +6785,7 @@
               </a:defRPr>
             </a:pPr>
             <a:r>
-              <a:t>• Hiểu layout cơ bản → 2D positional embedding (LayoutLM)</a:t>
+              <a:t>• Hiểu layout cơ bản → 2D positional embedding</a:t>
             </a:r>
           </a:p>
         </p:txBody>
@@ -9273,7 +6880,7 @@
           </a:fontRef>
         </p:style>
         <p:txBody>
-          <a:bodyPr rtlCol="0" anchor="ctr" wrap="square" lIns="127000" rIns="127000" tIns="63500"/>
+          <a:bodyPr rtlCol="0" anchor="ctr" wrap="square" lIns="127000" tIns="63500"/>
           <a:lstStyle/>
           <a:p>
             <a:pPr algn="ctr">
@@ -9287,7 +6894,7 @@
               </a:defRPr>
             </a:pPr>
             <a:r>
-              <a:t>• Ảnh chất lượng thấp (run, nhòe, phản chiếu) — CER tụt 85–90%</a:t>
+              <a:t>• Ảnh chất lượng thấp — CER tụt 85–90%</a:t>
             </a:r>
           </a:p>
           <a:p>
@@ -9302,7 +6909,7 @@
               </a:defRPr>
             </a:pPr>
             <a:r>
-              <a:t>• Hóa đơn in nhiệt bị phai — contrast rất thấp</a:t>
+              <a:t>• Hóa đơn in nhiệt bị phai</a:t>
             </a:r>
           </a:p>
           <a:p>
@@ -9317,7 +6924,7 @@
               </a:defRPr>
             </a:pPr>
             <a:r>
-              <a:t>• Zero-shot generalization — cần fine-tune cho mỗi template mới</a:t>
+              <a:t>• Zero-shot generalization — cần fine-tune</a:t>
             </a:r>
           </a:p>
           <a:p>
@@ -9332,7 +6939,7 @@
               </a:defRPr>
             </a:pPr>
             <a:r>
-              <a:t>• Dữ liệu tiếng Việt khan hiếm, hạ tầng GPU đắt</a:t>
+              <a:t>• Dữ liệu tiếng Việt khan hiếm</a:t>
             </a:r>
           </a:p>
           <a:p>
@@ -9347,7 +6954,7 @@
               </a:defRPr>
             </a:pPr>
             <a:r>
-              <a:t>• Relation Extraction phức tạp (20+ mặt hàng)</a:t>
+              <a:t>• Relation Extraction phức tạp</a:t>
             </a:r>
           </a:p>
         </p:txBody>
@@ -9357,13 +6964,10 @@
   <p:clrMapOvr>
     <a:masterClrMapping/>
   </p:clrMapOvr>
-  <p:transition spd="med" advTm="800">
-    <p:fade/>
-  </p:transition>
 </p:sld>
 </file>
 
-<file path=ppt/slides/slide26.xml><?xml version="1.0" encoding="utf-8"?>
+<file path=ppt/slides/slide19.xml><?xml version="1.0" encoding="utf-8"?>
 <p:sld xmlns:a="http://schemas.openxmlformats.org/drawingml/2006/main" xmlns:p="http://schemas.openxmlformats.org/presentationml/2006/main" xmlns:r="http://schemas.openxmlformats.org/officeDocument/2006/relationships">
   <p:cSld>
     <p:spTree>
@@ -9463,7 +7067,7 @@
               </a:defRPr>
             </a:pPr>
             <a:r>
-              <a:t>Trích xuất Hóa đơn Tiếng Việt — Pipeline PaddleOCR • VietOCR • LayoutLMv3</a:t>
+              <a:t>Trích xuất Hóa đơn Tiếng Việt — PaddleOCR • VietOCR • LayoutLMv3</a:t>
             </a:r>
           </a:p>
         </p:txBody>
@@ -9687,112 +7291,10 @@
   <p:clrMapOvr>
     <a:masterClrMapping/>
   </p:clrMapOvr>
-  <p:transition spd="med" advTm="800">
-    <p:fade/>
-  </p:transition>
 </p:sld>
 </file>
 
-<file path=ppt/slides/slide27.xml><?xml version="1.0" encoding="utf-8"?>
-<p:sld xmlns:a="http://schemas.openxmlformats.org/drawingml/2006/main" xmlns:p="http://schemas.openxmlformats.org/presentationml/2006/main" xmlns:r="http://schemas.openxmlformats.org/officeDocument/2006/relationships">
-  <p:cSld>
-    <p:bg>
-      <p:bgPr>
-        <a:solidFill>
-          <a:srgbClr val="2E86DE"/>
-        </a:solidFill>
-        <a:effectLst/>
-      </p:bgPr>
-    </p:bg>
-    <p:spTree>
-      <p:nvGrpSpPr>
-        <p:cNvPr id="1" name=""/>
-        <p:cNvGrpSpPr/>
-        <p:nvPr/>
-      </p:nvGrpSpPr>
-      <p:grpSpPr/>
-      <p:sp>
-        <p:nvSpPr>
-          <p:cNvPr id="2" name="TextBox 1"/>
-          <p:cNvSpPr txBox="1"/>
-          <p:nvPr/>
-        </p:nvSpPr>
-        <p:spPr>
-          <a:xfrm>
-            <a:off x="914400" y="2286000"/>
-            <a:ext cx="1828800" cy="1371600"/>
-          </a:xfrm>
-          <a:prstGeom prst="rect">
-            <a:avLst/>
-          </a:prstGeom>
-          <a:noFill/>
-        </p:spPr>
-        <p:txBody>
-          <a:bodyPr wrap="none">
-            <a:spAutoFit/>
-          </a:bodyPr>
-          <a:lstStyle/>
-          <a:p>
-            <a:pPr>
-              <a:defRPr sz="7200" b="1">
-                <a:solidFill>
-                  <a:srgbClr val="FFFFFF"/>
-                </a:solidFill>
-              </a:defRPr>
-            </a:pPr>
-            <a:r>
-              <a:t>08</a:t>
-            </a:r>
-          </a:p>
-        </p:txBody>
-      </p:sp>
-      <p:sp>
-        <p:nvSpPr>
-          <p:cNvPr id="3" name="TextBox 2"/>
-          <p:cNvSpPr txBox="1"/>
-          <p:nvPr/>
-        </p:nvSpPr>
-        <p:spPr>
-          <a:xfrm>
-            <a:off x="914400" y="3657600"/>
-            <a:ext cx="9144000" cy="1371600"/>
-          </a:xfrm>
-          <a:prstGeom prst="rect">
-            <a:avLst/>
-          </a:prstGeom>
-          <a:noFill/>
-        </p:spPr>
-        <p:txBody>
-          <a:bodyPr wrap="square">
-            <a:spAutoFit/>
-          </a:bodyPr>
-          <a:lstStyle/>
-          <a:p>
-            <a:pPr>
-              <a:defRPr sz="3200" b="1">
-                <a:solidFill>
-                  <a:srgbClr val="FFFFFF"/>
-                </a:solidFill>
-              </a:defRPr>
-            </a:pPr>
-            <a:r>
-              <a:t>KẾT LUẬN</a:t>
-            </a:r>
-          </a:p>
-        </p:txBody>
-      </p:sp>
-    </p:spTree>
-  </p:cSld>
-  <p:clrMapOvr>
-    <a:masterClrMapping/>
-  </p:clrMapOvr>
-  <p:transition spd="med" advTm="1000">
-    <p:fade/>
-  </p:transition>
-</p:sld>
-</file>
-
-<file path=ppt/slides/slide28.xml><?xml version="1.0" encoding="utf-8"?>
+<file path=ppt/slides/slide2.xml><?xml version="1.0" encoding="utf-8"?>
 <p:sld xmlns:a="http://schemas.openxmlformats.org/drawingml/2006/main" xmlns:p="http://schemas.openxmlformats.org/presentationml/2006/main" xmlns:r="http://schemas.openxmlformats.org/officeDocument/2006/relationships">
   <p:cSld>
     <p:spTree>
@@ -9892,7 +7394,7 @@
               </a:defRPr>
             </a:pPr>
             <a:r>
-              <a:t>Trích xuất Hóa đơn Tiếng Việt — Pipeline PaddleOCR • VietOCR • LayoutLMv3</a:t>
+              <a:t>Trích xuất Hóa đơn Tiếng Việt — PaddleOCR • VietOCR • LayoutLMv3</a:t>
             </a:r>
           </a:p>
         </p:txBody>
@@ -9927,7 +7429,7 @@
               </a:defRPr>
             </a:pPr>
             <a:r>
-              <a:t>KẾT LUẬN</a:t>
+              <a:t>NỘI DUNG TRÌNH BÀY</a:t>
             </a:r>
           </a:p>
         </p:txBody>
@@ -9956,97 +7458,121 @@
           <a:p>
             <a:pPr>
               <a:spcBef>
-                <a:spcPts val="500"/>
-              </a:spcBef>
-              <a:defRPr sz="1500">
-                <a:solidFill>
-                  <a:srgbClr val="2C3E50"/>
-                </a:solidFill>
-              </a:defRPr>
-            </a:pPr>
-            <a:r>
-              <a:t>• Bài toán trích xuất hóa đơn tiếng Việt đòi hỏi giải quyết đồng thời 3 thách thức: **phát hiện vùng chữ**, **nhận dạng ký tự**, **hiểu cấu trúc ngữ nghĩa**</a:t>
-            </a:r>
-          </a:p>
-          <a:p>
-            <a:pPr>
-              <a:spcBef>
-                <a:spcPts val="500"/>
-              </a:spcBef>
-              <a:defRPr sz="1500">
-                <a:solidFill>
-                  <a:srgbClr val="2C3E50"/>
-                </a:solidFill>
-              </a:defRPr>
-            </a:pPr>
-          </a:p>
-          <a:p>
-            <a:pPr>
-              <a:spcBef>
-                <a:spcPts val="500"/>
-              </a:spcBef>
-              <a:defRPr sz="1500">
-                <a:solidFill>
-                  <a:srgbClr val="2C3E50"/>
-                </a:solidFill>
-              </a:defRPr>
-            </a:pPr>
-            <a:r>
-              <a:t>• Pipeline **PaddleOCR → VietOCR → LayoutLMv3** là lựa chọn hợp lý hiện tại với pretrained weights chất lượng tốt</a:t>
-            </a:r>
-          </a:p>
-          <a:p>
-            <a:pPr>
-              <a:spcBef>
-                <a:spcPts val="500"/>
-              </a:spcBef>
-              <a:defRPr sz="1500">
-                <a:solidFill>
-                  <a:srgbClr val="2C3E50"/>
-                </a:solidFill>
-              </a:defRPr>
-            </a:pPr>
-          </a:p>
-          <a:p>
-            <a:pPr>
-              <a:spcBef>
-                <a:spcPts val="500"/>
-              </a:spcBef>
-              <a:defRPr sz="1500">
-                <a:solidFill>
-                  <a:srgbClr val="2C3E50"/>
-                </a:solidFill>
-              </a:defRPr>
-            </a:pPr>
-            <a:r>
-              <a:t>• Nhược điểm cố hữu: **lỗi tích lũy qua từng tầng**</a:t>
-            </a:r>
-          </a:p>
-          <a:p>
-            <a:pPr>
-              <a:spcBef>
-                <a:spcPts val="500"/>
-              </a:spcBef>
-              <a:defRPr sz="1500">
-                <a:solidFill>
-                  <a:srgbClr val="2C3E50"/>
-                </a:solidFill>
-              </a:defRPr>
-            </a:pPr>
-          </a:p>
-          <a:p>
-            <a:pPr>
-              <a:spcBef>
-                <a:spcPts val="500"/>
-              </a:spcBef>
-              <a:defRPr sz="1500">
-                <a:solidFill>
-                  <a:srgbClr val="2C3E50"/>
-                </a:solidFill>
-              </a:defRPr>
-            </a:pPr>
-            <a:r>
-              <a:t>• Ranh giới giữa OCR+NLP pipeline và end-to-end LVLM đang dần mờ đi</a:t>
+                <a:spcPts val="1400"/>
+              </a:spcBef>
+              <a:defRPr sz="1800" b="1">
+                <a:solidFill>
+                  <a:srgbClr val="2E86DE"/>
+                </a:solidFill>
+              </a:defRPr>
+            </a:pPr>
+            <a:r>
+              <a:t>1. Mở đầu — Bối cảnh bài toán</a:t>
+            </a:r>
+          </a:p>
+          <a:p>
+            <a:pPr>
+              <a:spcBef>
+                <a:spcPts val="1400"/>
+              </a:spcBef>
+              <a:defRPr sz="1800" b="1">
+                <a:solidFill>
+                  <a:srgbClr val="2E86DE"/>
+                </a:solidFill>
+              </a:defRPr>
+            </a:pPr>
+            <a:r>
+              <a:t>2. Tổng quan — Mô hình hóa &amp; Pipeline</a:t>
+            </a:r>
+          </a:p>
+          <a:p>
+            <a:pPr>
+              <a:spcBef>
+                <a:spcPts val="1400"/>
+              </a:spcBef>
+              <a:defRPr sz="1800" b="1">
+                <a:solidFill>
+                  <a:srgbClr val="2E86DE"/>
+                </a:solidFill>
+              </a:defRPr>
+            </a:pPr>
+            <a:r>
+              <a:t>3. Phân loại &amp; Tiến hóa — 3 thế hệ thuật toán</a:t>
+            </a:r>
+          </a:p>
+          <a:p>
+            <a:pPr>
+              <a:spcBef>
+                <a:spcPts val="1400"/>
+              </a:spcBef>
+              <a:defRPr sz="1800" b="1">
+                <a:solidFill>
+                  <a:srgbClr val="2E86DE"/>
+                </a:solidFill>
+              </a:defRPr>
+            </a:pPr>
+            <a:r>
+              <a:t>4. Trực giác — Con người đọc hóa đơn ra sao?</a:t>
+            </a:r>
+          </a:p>
+          <a:p>
+            <a:pPr>
+              <a:spcBef>
+                <a:spcPts val="1400"/>
+              </a:spcBef>
+              <a:defRPr sz="1800" b="1">
+                <a:solidFill>
+                  <a:srgbClr val="2E86DE"/>
+                </a:solidFill>
+              </a:defRPr>
+            </a:pPr>
+            <a:r>
+              <a:t>5. Toán học hóa — Công thức cốt lõi</a:t>
+            </a:r>
+          </a:p>
+          <a:p>
+            <a:pPr>
+              <a:spcBef>
+                <a:spcPts val="1400"/>
+              </a:spcBef>
+              <a:defRPr sz="1800" b="1">
+                <a:solidFill>
+                  <a:srgbClr val="2E86DE"/>
+                </a:solidFill>
+              </a:defRPr>
+            </a:pPr>
+            <a:r>
+              <a:t>6. Khoảng cách — Lý thuyết vs Thực tế</a:t>
+            </a:r>
+          </a:p>
+          <a:p>
+            <a:pPr>
+              <a:spcBef>
+                <a:spcPts val="1400"/>
+              </a:spcBef>
+              <a:defRPr sz="1800" b="1">
+                <a:solidFill>
+                  <a:srgbClr val="2E86DE"/>
+                </a:solidFill>
+              </a:defRPr>
+            </a:pPr>
+            <a:r>
+              <a:t>7. Thách thức — Rào cản &amp; Hướng phát triển</a:t>
+            </a:r>
+          </a:p>
+          <a:p>
+            <a:pPr>
+              <a:spcBef>
+                <a:spcPts val="1400"/>
+              </a:spcBef>
+              <a:defRPr sz="1800" b="1">
+                <a:solidFill>
+                  <a:srgbClr val="2E86DE"/>
+                </a:solidFill>
+              </a:defRPr>
+            </a:pPr>
+            <a:r>
+              <a:t>8. Kết luận</a:t>
             </a:r>
           </a:p>
         </p:txBody>
@@ -10056,13 +7582,292 @@
   <p:clrMapOvr>
     <a:masterClrMapping/>
   </p:clrMapOvr>
-  <p:transition spd="med" advTm="800">
-    <p:fade/>
-  </p:transition>
 </p:sld>
 </file>
 
-<file path=ppt/slides/slide29.xml><?xml version="1.0" encoding="utf-8"?>
+<file path=ppt/slides/slide20.xml><?xml version="1.0" encoding="utf-8"?>
+<p:sld xmlns:a="http://schemas.openxmlformats.org/drawingml/2006/main" xmlns:p="http://schemas.openxmlformats.org/presentationml/2006/main" xmlns:r="http://schemas.openxmlformats.org/officeDocument/2006/relationships">
+  <p:cSld>
+    <p:spTree>
+      <p:nvGrpSpPr>
+        <p:cNvPr id="1" name=""/>
+        <p:cNvGrpSpPr/>
+        <p:nvPr/>
+      </p:nvGrpSpPr>
+      <p:grpSpPr/>
+      <p:sp>
+        <p:nvSpPr>
+          <p:cNvPr id="2" name="Rectangle 1"/>
+          <p:cNvSpPr/>
+          <p:nvPr/>
+        </p:nvSpPr>
+        <p:spPr>
+          <a:xfrm>
+            <a:off x="0" y="0"/>
+            <a:ext cx="12191695" cy="54864"/>
+          </a:xfrm>
+          <a:prstGeom prst="rect">
+            <a:avLst/>
+          </a:prstGeom>
+          <a:solidFill>
+            <a:srgbClr val="2E86DE"/>
+          </a:solidFill>
+          <a:ln>
+            <a:noFill/>
+          </a:ln>
+        </p:spPr>
+        <p:style>
+          <a:lnRef idx="1">
+            <a:schemeClr val="accent1"/>
+          </a:lnRef>
+          <a:fillRef idx="3">
+            <a:schemeClr val="accent1"/>
+          </a:fillRef>
+          <a:effectRef idx="2">
+            <a:schemeClr val="accent1"/>
+          </a:effectRef>
+          <a:fontRef idx="minor">
+            <a:schemeClr val="lt1"/>
+          </a:fontRef>
+        </p:style>
+        <p:txBody>
+          <a:bodyPr rtlCol="0" anchor="ctr"/>
+          <a:lstStyle/>
+          <a:p>
+            <a:pPr algn="ctr"/>
+          </a:p>
+        </p:txBody>
+      </p:sp>
+      <p:sp>
+        <p:nvSpPr>
+          <p:cNvPr id="3" name="Rectangle 2"/>
+          <p:cNvSpPr/>
+          <p:nvPr/>
+        </p:nvSpPr>
+        <p:spPr>
+          <a:xfrm>
+            <a:off x="0" y="6492240"/>
+            <a:ext cx="12191695" cy="365760"/>
+          </a:xfrm>
+          <a:prstGeom prst="rect">
+            <a:avLst/>
+          </a:prstGeom>
+          <a:solidFill>
+            <a:srgbClr val="1B2A4A"/>
+          </a:solidFill>
+          <a:ln>
+            <a:noFill/>
+          </a:ln>
+        </p:spPr>
+        <p:style>
+          <a:lnRef idx="1">
+            <a:schemeClr val="accent1"/>
+          </a:lnRef>
+          <a:fillRef idx="3">
+            <a:schemeClr val="accent1"/>
+          </a:fillRef>
+          <a:effectRef idx="2">
+            <a:schemeClr val="accent1"/>
+          </a:effectRef>
+          <a:fontRef idx="minor">
+            <a:schemeClr val="lt1"/>
+          </a:fontRef>
+        </p:style>
+        <p:txBody>
+          <a:bodyPr rtlCol="0" anchor="ctr"/>
+          <a:lstStyle/>
+          <a:p>
+            <a:pPr algn="ctr">
+              <a:defRPr sz="1000">
+                <a:solidFill>
+                  <a:srgbClr val="FFFFFF"/>
+                </a:solidFill>
+              </a:defRPr>
+            </a:pPr>
+            <a:r>
+              <a:t>Trích xuất Hóa đơn Tiếng Việt — PaddleOCR • VietOCR • LayoutLMv3</a:t>
+            </a:r>
+          </a:p>
+        </p:txBody>
+      </p:sp>
+      <p:sp>
+        <p:nvSpPr>
+          <p:cNvPr id="4" name="TextBox 3"/>
+          <p:cNvSpPr txBox="1"/>
+          <p:nvPr/>
+        </p:nvSpPr>
+        <p:spPr>
+          <a:xfrm>
+            <a:off x="457200" y="137160"/>
+            <a:ext cx="10972800" cy="731520"/>
+          </a:xfrm>
+          <a:prstGeom prst="rect">
+            <a:avLst/>
+          </a:prstGeom>
+          <a:noFill/>
+        </p:spPr>
+        <p:txBody>
+          <a:bodyPr wrap="none">
+            <a:spAutoFit/>
+          </a:bodyPr>
+          <a:lstStyle/>
+          <a:p>
+            <a:pPr>
+              <a:defRPr sz="2600" b="1">
+                <a:solidFill>
+                  <a:srgbClr val="1B2A4A"/>
+                </a:solidFill>
+              </a:defRPr>
+            </a:pPr>
+            <a:r>
+              <a:t>KẾT LUẬN</a:t>
+            </a:r>
+          </a:p>
+        </p:txBody>
+      </p:sp>
+      <p:sp>
+        <p:nvSpPr>
+          <p:cNvPr id="5" name="TextBox 4"/>
+          <p:cNvSpPr txBox="1"/>
+          <p:nvPr/>
+        </p:nvSpPr>
+        <p:spPr>
+          <a:xfrm>
+            <a:off x="457200" y="1005840"/>
+            <a:ext cx="10972800" cy="5029200"/>
+          </a:xfrm>
+          <a:prstGeom prst="rect">
+            <a:avLst/>
+          </a:prstGeom>
+          <a:noFill/>
+        </p:spPr>
+        <p:txBody>
+          <a:bodyPr wrap="square">
+            <a:spAutoFit/>
+          </a:bodyPr>
+          <a:lstStyle/>
+          <a:p>
+            <a:pPr>
+              <a:spcBef>
+                <a:spcPts val="500"/>
+              </a:spcBef>
+              <a:defRPr sz="1500">
+                <a:solidFill>
+                  <a:srgbClr val="2C3E50"/>
+                </a:solidFill>
+              </a:defRPr>
+            </a:pPr>
+            <a:r>
+              <a:t>• Bài toán trích xuất hóa đơn tiếng Việt đòi hỏi giải quyết đồng thời 3 thách thức:</a:t>
+            </a:r>
+          </a:p>
+          <a:p>
+            <a:pPr>
+              <a:spcBef>
+                <a:spcPts val="500"/>
+              </a:spcBef>
+              <a:defRPr sz="1500">
+                <a:solidFill>
+                  <a:srgbClr val="2C3E50"/>
+                </a:solidFill>
+              </a:defRPr>
+            </a:pPr>
+            <a:r>
+              <a:t>**phát hiện vùng chữ**, **nhận dạng ký tự**, **hiểu cấu trúc ngữ nghĩa**</a:t>
+            </a:r>
+          </a:p>
+          <a:p>
+            <a:pPr>
+              <a:spcBef>
+                <a:spcPts val="500"/>
+              </a:spcBef>
+              <a:defRPr sz="1500">
+                <a:solidFill>
+                  <a:srgbClr val="2C3E50"/>
+                </a:solidFill>
+              </a:defRPr>
+            </a:pPr>
+          </a:p>
+          <a:p>
+            <a:pPr>
+              <a:spcBef>
+                <a:spcPts val="500"/>
+              </a:spcBef>
+              <a:defRPr sz="1500">
+                <a:solidFill>
+                  <a:srgbClr val="2C3E50"/>
+                </a:solidFill>
+              </a:defRPr>
+            </a:pPr>
+            <a:r>
+              <a:t>• Pipeline **PaddleOCR → VietOCR → LayoutLMv3** là lựa chọn hợp lý hiện tại</a:t>
+            </a:r>
+          </a:p>
+          <a:p>
+            <a:pPr>
+              <a:spcBef>
+                <a:spcPts val="500"/>
+              </a:spcBef>
+              <a:defRPr sz="1500">
+                <a:solidFill>
+                  <a:srgbClr val="2C3E50"/>
+                </a:solidFill>
+              </a:defRPr>
+            </a:pPr>
+          </a:p>
+          <a:p>
+            <a:pPr>
+              <a:spcBef>
+                <a:spcPts val="500"/>
+              </a:spcBef>
+              <a:defRPr sz="1500">
+                <a:solidFill>
+                  <a:srgbClr val="2C3E50"/>
+                </a:solidFill>
+              </a:defRPr>
+            </a:pPr>
+            <a:r>
+              <a:t>• Nhược điểm cố hữu: **lỗi tích lũy qua từng tầng**</a:t>
+            </a:r>
+          </a:p>
+          <a:p>
+            <a:pPr>
+              <a:spcBef>
+                <a:spcPts val="500"/>
+              </a:spcBef>
+              <a:defRPr sz="1500">
+                <a:solidFill>
+                  <a:srgbClr val="2C3E50"/>
+                </a:solidFill>
+              </a:defRPr>
+            </a:pPr>
+          </a:p>
+          <a:p>
+            <a:pPr>
+              <a:spcBef>
+                <a:spcPts val="500"/>
+              </a:spcBef>
+              <a:defRPr sz="1500">
+                <a:solidFill>
+                  <a:srgbClr val="2C3E50"/>
+                </a:solidFill>
+              </a:defRPr>
+            </a:pPr>
+            <a:r>
+              <a:t>• Ranh giới giữa OCR+NLP pipeline và end-to-end LVLM đang dần mờ đi</a:t>
+            </a:r>
+          </a:p>
+        </p:txBody>
+      </p:sp>
+    </p:spTree>
+  </p:cSld>
+  <p:clrMapOvr>
+    <a:masterClrMapping/>
+  </p:clrMapOvr>
+</p:sld>
+</file>
+
+<file path=ppt/slides/slide21.xml><?xml version="1.0" encoding="utf-8"?>
 <p:sld xmlns:a="http://schemas.openxmlformats.org/drawingml/2006/main" xmlns:p="http://schemas.openxmlformats.org/presentationml/2006/main" xmlns:r="http://schemas.openxmlformats.org/officeDocument/2006/relationships">
   <p:cSld>
     <p:bg>
@@ -10208,10 +8013,6 @@
             <a:r>
               <a:t>Học viện Công nghệ Bưu chính Viễn thông — Khoa CNTT2</a:t>
             </a:r>
-            <a:br/>
-            <a:r>
-              <a:t>Tháng 6, 2026</a:t>
-            </a:r>
           </a:p>
         </p:txBody>
       </p:sp>
@@ -10220,23 +8021,12 @@
   <p:clrMapOvr>
     <a:masterClrMapping/>
   </p:clrMapOvr>
-  <p:transition spd="med" advTm="2000">
-    <p:fade/>
-  </p:transition>
 </p:sld>
 </file>
 
 <file path=ppt/slides/slide3.xml><?xml version="1.0" encoding="utf-8"?>
 <p:sld xmlns:a="http://schemas.openxmlformats.org/drawingml/2006/main" xmlns:p="http://schemas.openxmlformats.org/presentationml/2006/main" xmlns:r="http://schemas.openxmlformats.org/officeDocument/2006/relationships">
   <p:cSld>
-    <p:bg>
-      <p:bgPr>
-        <a:solidFill>
-          <a:srgbClr val="2E86DE"/>
-        </a:solidFill>
-        <a:effectLst/>
-      </p:bgPr>
-    </p:bg>
     <p:spTree>
       <p:nvGrpSpPr>
         <p:cNvPr id="1" name=""/>
@@ -10246,14 +8036,109 @@
       <p:grpSpPr/>
       <p:sp>
         <p:nvSpPr>
-          <p:cNvPr id="2" name="TextBox 1"/>
+          <p:cNvPr id="2" name="Rectangle 1"/>
+          <p:cNvSpPr/>
+          <p:nvPr/>
+        </p:nvSpPr>
+        <p:spPr>
+          <a:xfrm>
+            <a:off x="0" y="0"/>
+            <a:ext cx="12191695" cy="54864"/>
+          </a:xfrm>
+          <a:prstGeom prst="rect">
+            <a:avLst/>
+          </a:prstGeom>
+          <a:solidFill>
+            <a:srgbClr val="2E86DE"/>
+          </a:solidFill>
+          <a:ln>
+            <a:noFill/>
+          </a:ln>
+        </p:spPr>
+        <p:style>
+          <a:lnRef idx="1">
+            <a:schemeClr val="accent1"/>
+          </a:lnRef>
+          <a:fillRef idx="3">
+            <a:schemeClr val="accent1"/>
+          </a:fillRef>
+          <a:effectRef idx="2">
+            <a:schemeClr val="accent1"/>
+          </a:effectRef>
+          <a:fontRef idx="minor">
+            <a:schemeClr val="lt1"/>
+          </a:fontRef>
+        </p:style>
+        <p:txBody>
+          <a:bodyPr rtlCol="0" anchor="ctr"/>
+          <a:lstStyle/>
+          <a:p>
+            <a:pPr algn="ctr"/>
+          </a:p>
+        </p:txBody>
+      </p:sp>
+      <p:sp>
+        <p:nvSpPr>
+          <p:cNvPr id="3" name="Rectangle 2"/>
+          <p:cNvSpPr/>
+          <p:nvPr/>
+        </p:nvSpPr>
+        <p:spPr>
+          <a:xfrm>
+            <a:off x="0" y="6492240"/>
+            <a:ext cx="12191695" cy="365760"/>
+          </a:xfrm>
+          <a:prstGeom prst="rect">
+            <a:avLst/>
+          </a:prstGeom>
+          <a:solidFill>
+            <a:srgbClr val="1B2A4A"/>
+          </a:solidFill>
+          <a:ln>
+            <a:noFill/>
+          </a:ln>
+        </p:spPr>
+        <p:style>
+          <a:lnRef idx="1">
+            <a:schemeClr val="accent1"/>
+          </a:lnRef>
+          <a:fillRef idx="3">
+            <a:schemeClr val="accent1"/>
+          </a:fillRef>
+          <a:effectRef idx="2">
+            <a:schemeClr val="accent1"/>
+          </a:effectRef>
+          <a:fontRef idx="minor">
+            <a:schemeClr val="lt1"/>
+          </a:fontRef>
+        </p:style>
+        <p:txBody>
+          <a:bodyPr rtlCol="0" anchor="ctr"/>
+          <a:lstStyle/>
+          <a:p>
+            <a:pPr algn="ctr">
+              <a:defRPr sz="1000">
+                <a:solidFill>
+                  <a:srgbClr val="FFFFFF"/>
+                </a:solidFill>
+              </a:defRPr>
+            </a:pPr>
+            <a:r>
+              <a:t>Trích xuất Hóa đơn Tiếng Việt — PaddleOCR • VietOCR • LayoutLMv3</a:t>
+            </a:r>
+          </a:p>
+        </p:txBody>
+      </p:sp>
+      <p:sp>
+        <p:nvSpPr>
+          <p:cNvPr id="4" name="TextBox 3"/>
           <p:cNvSpPr txBox="1"/>
           <p:nvPr/>
         </p:nvSpPr>
         <p:spPr>
           <a:xfrm>
-            <a:off x="914400" y="2286000"/>
-            <a:ext cx="1828800" cy="1371600"/>
+            <a:off x="457200" y="137160"/>
+            <a:ext cx="10972800" cy="731520"/>
           </a:xfrm>
           <a:prstGeom prst="rect">
             <a:avLst/>
@@ -10267,28 +8152,28 @@
           <a:lstStyle/>
           <a:p>
             <a:pPr>
-              <a:defRPr sz="7200" b="1">
-                <a:solidFill>
-                  <a:srgbClr val="FFFFFF"/>
-                </a:solidFill>
-              </a:defRPr>
-            </a:pPr>
-            <a:r>
-              <a:t>01</a:t>
-            </a:r>
-          </a:p>
-        </p:txBody>
-      </p:sp>
-      <p:sp>
-        <p:nvSpPr>
-          <p:cNvPr id="3" name="TextBox 2"/>
+              <a:defRPr sz="2600" b="1">
+                <a:solidFill>
+                  <a:srgbClr val="1B2A4A"/>
+                </a:solidFill>
+              </a:defRPr>
+            </a:pPr>
+            <a:r>
+              <a:t>BỐI CẢNH BÀI TOÁN</a:t>
+            </a:r>
+          </a:p>
+        </p:txBody>
+      </p:sp>
+      <p:sp>
+        <p:nvSpPr>
+          <p:cNvPr id="5" name="TextBox 4"/>
           <p:cNvSpPr txBox="1"/>
           <p:nvPr/>
         </p:nvSpPr>
         <p:spPr>
           <a:xfrm>
-            <a:off x="914400" y="3657600"/>
-            <a:ext cx="9144000" cy="1371600"/>
+            <a:off x="457200" y="1005840"/>
+            <a:ext cx="10972800" cy="5029200"/>
           </a:xfrm>
           <a:prstGeom prst="rect">
             <a:avLst/>
@@ -10302,14 +8187,131 @@
           <a:lstStyle/>
           <a:p>
             <a:pPr>
-              <a:defRPr sz="3200" b="1">
-                <a:solidFill>
-                  <a:srgbClr val="FFFFFF"/>
-                </a:solidFill>
-              </a:defRPr>
-            </a:pPr>
-            <a:r>
-              <a:t>MỞ ĐẦU</a:t>
+              <a:spcBef>
+                <a:spcPts val="500"/>
+              </a:spcBef>
+              <a:defRPr sz="1500">
+                <a:solidFill>
+                  <a:srgbClr val="2C3E50"/>
+                </a:solidFill>
+              </a:defRPr>
+            </a:pPr>
+            <a:r>
+              <a:t>• Hàng triệu giao dịch thương mại tại Việt Nam tạo ra hàng triệu tờ hóa đơn giấy</a:t>
+            </a:r>
+          </a:p>
+          <a:p>
+            <a:pPr>
+              <a:spcBef>
+                <a:spcPts val="500"/>
+              </a:spcBef>
+              <a:defRPr sz="1500">
+                <a:solidFill>
+                  <a:srgbClr val="2C3E50"/>
+                </a:solidFill>
+              </a:defRPr>
+            </a:pPr>
+            <a:r>
+              <a:t>• Kế toán viên gõ tay từng con số → sai sót nhập liệu thường xuyên</a:t>
+            </a:r>
+          </a:p>
+          <a:p>
+            <a:pPr>
+              <a:spcBef>
+                <a:spcPts val="500"/>
+              </a:spcBef>
+              <a:defRPr sz="1500">
+                <a:solidFill>
+                  <a:srgbClr val="2C3E50"/>
+                </a:solidFill>
+              </a:defRPr>
+            </a:pPr>
+          </a:p>
+          <a:p>
+            <a:pPr>
+              <a:spcBef>
+                <a:spcPts val="1400"/>
+              </a:spcBef>
+              <a:defRPr sz="1800" b="1">
+                <a:solidFill>
+                  <a:srgbClr val="2E86DE"/>
+                </a:solidFill>
+              </a:defRPr>
+            </a:pPr>
+            <a:r>
+              <a:t>Thách thức đọc hóa đơn thực tế:</a:t>
+            </a:r>
+          </a:p>
+          <a:p>
+            <a:pPr>
+              <a:spcBef>
+                <a:spcPts val="500"/>
+              </a:spcBef>
+              <a:defRPr sz="1500">
+                <a:solidFill>
+                  <a:srgbClr val="2C3E50"/>
+                </a:solidFill>
+              </a:defRPr>
+            </a:pPr>
+            <a:r>
+              <a:t>• Font chữ tùy ý, góc chụp nghiêng</a:t>
+            </a:r>
+          </a:p>
+          <a:p>
+            <a:pPr>
+              <a:spcBef>
+                <a:spcPts val="500"/>
+              </a:spcBef>
+              <a:defRPr sz="1500">
+                <a:solidFill>
+                  <a:srgbClr val="2C3E50"/>
+                </a:solidFill>
+              </a:defRPr>
+            </a:pPr>
+            <a:r>
+              <a:t>• Ánh sáng không đều</a:t>
+            </a:r>
+          </a:p>
+          <a:p>
+            <a:pPr>
+              <a:spcBef>
+                <a:spcPts val="500"/>
+              </a:spcBef>
+              <a:defRPr sz="1500">
+                <a:solidFill>
+                  <a:srgbClr val="2C3E50"/>
+                </a:solidFill>
+              </a:defRPr>
+            </a:pPr>
+            <a:r>
+              <a:t>• Tiếng Việt với đầy đủ dấu thanh</a:t>
+            </a:r>
+          </a:p>
+          <a:p>
+            <a:pPr>
+              <a:spcBef>
+                <a:spcPts val="500"/>
+              </a:spcBef>
+              <a:defRPr sz="1500">
+                <a:solidFill>
+                  <a:srgbClr val="2C3E50"/>
+                </a:solidFill>
+              </a:defRPr>
+            </a:pPr>
+          </a:p>
+          <a:p>
+            <a:pPr>
+              <a:spcBef>
+                <a:spcPts val="500"/>
+              </a:spcBef>
+              <a:defRPr sz="1500">
+                <a:solidFill>
+                  <a:srgbClr val="2C3E50"/>
+                </a:solidFill>
+              </a:defRPr>
+            </a:pPr>
+            <a:r>
+              <a:t>• Cần biến **ảnh hóa đơn** thành **dữ liệu có cấu trúc**</a:t>
             </a:r>
           </a:p>
         </p:txBody>
@@ -10319,9 +8321,6 @@
   <p:clrMapOvr>
     <a:masterClrMapping/>
   </p:clrMapOvr>
-  <p:transition spd="med" advTm="1000">
-    <p:fade/>
-  </p:transition>
 </p:sld>
 </file>
 
@@ -10425,7 +8424,7 @@
               </a:defRPr>
             </a:pPr>
             <a:r>
-              <a:t>Trích xuất Hóa đơn Tiếng Việt — Pipeline PaddleOCR • VietOCR • LayoutLMv3</a:t>
+              <a:t>Trích xuất Hóa đơn Tiếng Việt — PaddleOCR • VietOCR • LayoutLMv3</a:t>
             </a:r>
           </a:p>
         </p:txBody>
@@ -10460,21 +8459,348 @@
               </a:defRPr>
             </a:pPr>
             <a:r>
-              <a:t>BỐI CẢNH BÀI TOÁN</a:t>
-            </a:r>
-          </a:p>
-        </p:txBody>
-      </p:sp>
-      <p:sp>
-        <p:nvSpPr>
-          <p:cNvPr id="5" name="TextBox 4"/>
+              <a:t>CÁC TÌNH HUỐNG THỰC TẾ</a:t>
+            </a:r>
+          </a:p>
+        </p:txBody>
+      </p:sp>
+      <p:sp>
+        <p:nvSpPr>
+          <p:cNvPr id="5" name="Rounded Rectangle 4"/>
+          <p:cNvSpPr/>
+          <p:nvPr/>
+        </p:nvSpPr>
+        <p:spPr>
+          <a:xfrm>
+            <a:off x="457200" y="1188720"/>
+            <a:ext cx="10972800" cy="365760"/>
+          </a:xfrm>
+          <a:prstGeom prst="roundRect">
+            <a:avLst/>
+          </a:prstGeom>
+          <a:solidFill>
+            <a:srgbClr val="2E86DE"/>
+          </a:solidFill>
+          <a:ln>
+            <a:noFill/>
+          </a:ln>
+        </p:spPr>
+        <p:style>
+          <a:lnRef idx="1">
+            <a:schemeClr val="accent1"/>
+          </a:lnRef>
+          <a:fillRef idx="3">
+            <a:schemeClr val="accent1"/>
+          </a:fillRef>
+          <a:effectRef idx="2">
+            <a:schemeClr val="accent1"/>
+          </a:effectRef>
+          <a:fontRef idx="minor">
+            <a:schemeClr val="lt1"/>
+          </a:fontRef>
+        </p:style>
+        <p:txBody>
+          <a:bodyPr rtlCol="0" anchor="ctr"/>
+          <a:lstStyle/>
+          <a:p>
+            <a:pPr algn="ctr">
+              <a:defRPr sz="1300" b="1">
+                <a:solidFill>
+                  <a:srgbClr val="FFFFFF"/>
+                </a:solidFill>
+              </a:defRPr>
+            </a:pPr>
+            <a:r>
+              <a:t>Kịch bản A — Kế toán doanh nghiệp nhỏ</a:t>
+            </a:r>
+          </a:p>
+        </p:txBody>
+      </p:sp>
+      <p:sp>
+        <p:nvSpPr>
+          <p:cNvPr id="6" name="Rounded Rectangle 5"/>
+          <p:cNvSpPr/>
+          <p:nvPr/>
+        </p:nvSpPr>
+        <p:spPr>
+          <a:xfrm>
+            <a:off x="457200" y="1554480"/>
+            <a:ext cx="10972800" cy="822960"/>
+          </a:xfrm>
+          <a:prstGeom prst="roundRect">
+            <a:avLst/>
+          </a:prstGeom>
+          <a:solidFill>
+            <a:srgbClr val="D6EAF8"/>
+          </a:solidFill>
+          <a:ln w="12700">
+            <a:solidFill>
+              <a:srgbClr val="2E86DE"/>
+            </a:solidFill>
+          </a:ln>
+        </p:spPr>
+        <p:style>
+          <a:lnRef idx="1">
+            <a:schemeClr val="accent1"/>
+          </a:lnRef>
+          <a:fillRef idx="3">
+            <a:schemeClr val="accent1"/>
+          </a:fillRef>
+          <a:effectRef idx="2">
+            <a:schemeClr val="accent1"/>
+          </a:effectRef>
+          <a:fontRef idx="minor">
+            <a:schemeClr val="lt1"/>
+          </a:fontRef>
+        </p:style>
+        <p:txBody>
+          <a:bodyPr rtlCol="0" anchor="ctr" wrap="square" lIns="127000" tIns="63500"/>
+          <a:lstStyle/>
+          <a:p>
+            <a:pPr algn="ctr">
+              <a:spcBef>
+                <a:spcPts val="300"/>
+              </a:spcBef>
+              <a:defRPr sz="1200">
+                <a:solidFill>
+                  <a:srgbClr val="2C3E50"/>
+                </a:solidFill>
+              </a:defRPr>
+            </a:pPr>
+            <a:r>
+              <a:t>• 300 hóa đơn công tác phí, mất 2–3 ngày nhập thủ công</a:t>
+            </a:r>
+          </a:p>
+        </p:txBody>
+      </p:sp>
+      <p:sp>
+        <p:nvSpPr>
+          <p:cNvPr id="7" name="Rounded Rectangle 6"/>
+          <p:cNvSpPr/>
+          <p:nvPr/>
+        </p:nvSpPr>
+        <p:spPr>
+          <a:xfrm>
+            <a:off x="457200" y="2560320"/>
+            <a:ext cx="10972800" cy="365760"/>
+          </a:xfrm>
+          <a:prstGeom prst="roundRect">
+            <a:avLst/>
+          </a:prstGeom>
+          <a:solidFill>
+            <a:srgbClr val="27AE60"/>
+          </a:solidFill>
+          <a:ln>
+            <a:noFill/>
+          </a:ln>
+        </p:spPr>
+        <p:style>
+          <a:lnRef idx="1">
+            <a:schemeClr val="accent1"/>
+          </a:lnRef>
+          <a:fillRef idx="3">
+            <a:schemeClr val="accent1"/>
+          </a:fillRef>
+          <a:effectRef idx="2">
+            <a:schemeClr val="accent1"/>
+          </a:effectRef>
+          <a:fontRef idx="minor">
+            <a:schemeClr val="lt1"/>
+          </a:fontRef>
+        </p:style>
+        <p:txBody>
+          <a:bodyPr rtlCol="0" anchor="ctr"/>
+          <a:lstStyle/>
+          <a:p>
+            <a:pPr algn="ctr">
+              <a:defRPr sz="1300" b="1">
+                <a:solidFill>
+                  <a:srgbClr val="FFFFFF"/>
+                </a:solidFill>
+              </a:defRPr>
+            </a:pPr>
+            <a:r>
+              <a:t>Kịch bản B — Ứng dụng chi tiêu cá nhân</a:t>
+            </a:r>
+          </a:p>
+        </p:txBody>
+      </p:sp>
+      <p:sp>
+        <p:nvSpPr>
+          <p:cNvPr id="8" name="Rounded Rectangle 7"/>
+          <p:cNvSpPr/>
+          <p:nvPr/>
+        </p:nvSpPr>
+        <p:spPr>
+          <a:xfrm>
+            <a:off x="457200" y="2926080"/>
+            <a:ext cx="10972800" cy="822960"/>
+          </a:xfrm>
+          <a:prstGeom prst="roundRect">
+            <a:avLst/>
+          </a:prstGeom>
+          <a:solidFill>
+            <a:srgbClr val="E8F5E9"/>
+          </a:solidFill>
+          <a:ln w="12700">
+            <a:solidFill>
+              <a:srgbClr val="27AE60"/>
+            </a:solidFill>
+          </a:ln>
+        </p:spPr>
+        <p:style>
+          <a:lnRef idx="1">
+            <a:schemeClr val="accent1"/>
+          </a:lnRef>
+          <a:fillRef idx="3">
+            <a:schemeClr val="accent1"/>
+          </a:fillRef>
+          <a:effectRef idx="2">
+            <a:schemeClr val="accent1"/>
+          </a:effectRef>
+          <a:fontRef idx="minor">
+            <a:schemeClr val="lt1"/>
+          </a:fontRef>
+        </p:style>
+        <p:txBody>
+          <a:bodyPr rtlCol="0" anchor="ctr" wrap="square" lIns="127000" tIns="63500"/>
+          <a:lstStyle/>
+          <a:p>
+            <a:pPr algn="ctr">
+              <a:spcBef>
+                <a:spcPts val="300"/>
+              </a:spcBef>
+              <a:defRPr sz="1200">
+                <a:solidFill>
+                  <a:srgbClr val="2C3E50"/>
+                </a:solidFill>
+              </a:defRPr>
+            </a:pPr>
+            <a:r>
+              <a:t>• Chụp ảnh hóa đơn → tự động điền ngày, siêu thị, tổng tiền</a:t>
+            </a:r>
+          </a:p>
+        </p:txBody>
+      </p:sp>
+      <p:sp>
+        <p:nvSpPr>
+          <p:cNvPr id="9" name="Rounded Rectangle 8"/>
+          <p:cNvSpPr/>
+          <p:nvPr/>
+        </p:nvSpPr>
+        <p:spPr>
+          <a:xfrm>
+            <a:off x="457200" y="3931920"/>
+            <a:ext cx="10972800" cy="365760"/>
+          </a:xfrm>
+          <a:prstGeom prst="roundRect">
+            <a:avLst/>
+          </a:prstGeom>
+          <a:solidFill>
+            <a:srgbClr val="F39C12"/>
+          </a:solidFill>
+          <a:ln>
+            <a:noFill/>
+          </a:ln>
+        </p:spPr>
+        <p:style>
+          <a:lnRef idx="1">
+            <a:schemeClr val="accent1"/>
+          </a:lnRef>
+          <a:fillRef idx="3">
+            <a:schemeClr val="accent1"/>
+          </a:fillRef>
+          <a:effectRef idx="2">
+            <a:schemeClr val="accent1"/>
+          </a:effectRef>
+          <a:fontRef idx="minor">
+            <a:schemeClr val="lt1"/>
+          </a:fontRef>
+        </p:style>
+        <p:txBody>
+          <a:bodyPr rtlCol="0" anchor="ctr"/>
+          <a:lstStyle/>
+          <a:p>
+            <a:pPr algn="ctr">
+              <a:defRPr sz="1300" b="1">
+                <a:solidFill>
+                  <a:srgbClr val="FFFFFF"/>
+                </a:solidFill>
+              </a:defRPr>
+            </a:pPr>
+            <a:r>
+              <a:t>Kịch bản C — Kiểm toán &amp; Tuân thủ thuế</a:t>
+            </a:r>
+          </a:p>
+        </p:txBody>
+      </p:sp>
+      <p:sp>
+        <p:nvSpPr>
+          <p:cNvPr id="10" name="Rounded Rectangle 9"/>
+          <p:cNvSpPr/>
+          <p:nvPr/>
+        </p:nvSpPr>
+        <p:spPr>
+          <a:xfrm>
+            <a:off x="457200" y="4297680"/>
+            <a:ext cx="10972800" cy="822960"/>
+          </a:xfrm>
+          <a:prstGeom prst="roundRect">
+            <a:avLst/>
+          </a:prstGeom>
+          <a:solidFill>
+            <a:srgbClr val="FFF3E0"/>
+          </a:solidFill>
+          <a:ln w="12700">
+            <a:solidFill>
+              <a:srgbClr val="F39C12"/>
+            </a:solidFill>
+          </a:ln>
+        </p:spPr>
+        <p:style>
+          <a:lnRef idx="1">
+            <a:schemeClr val="accent1"/>
+          </a:lnRef>
+          <a:fillRef idx="3">
+            <a:schemeClr val="accent1"/>
+          </a:fillRef>
+          <a:effectRef idx="2">
+            <a:schemeClr val="accent1"/>
+          </a:effectRef>
+          <a:fontRef idx="minor">
+            <a:schemeClr val="lt1"/>
+          </a:fontRef>
+        </p:style>
+        <p:txBody>
+          <a:bodyPr rtlCol="0" anchor="ctr" wrap="square" lIns="127000" tIns="63500"/>
+          <a:lstStyle/>
+          <a:p>
+            <a:pPr algn="ctr">
+              <a:spcBef>
+                <a:spcPts val="300"/>
+              </a:spcBef>
+              <a:defRPr sz="1200">
+                <a:solidFill>
+                  <a:srgbClr val="2C3E50"/>
+                </a:solidFill>
+              </a:defRPr>
+            </a:pPr>
+            <a:r>
+              <a:t>• Xác minh hàng nghìn hóa đơn VAT tự động</a:t>
+            </a:r>
+          </a:p>
+        </p:txBody>
+      </p:sp>
+      <p:sp>
+        <p:nvSpPr>
+          <p:cNvPr id="11" name="TextBox 10"/>
           <p:cNvSpPr txBox="1"/>
           <p:nvPr/>
         </p:nvSpPr>
         <p:spPr>
           <a:xfrm>
-            <a:off x="457200" y="1005840"/>
-            <a:ext cx="10972800" cy="5029200"/>
+            <a:off x="457200" y="5486400"/>
+            <a:ext cx="10972800" cy="457200"/>
           </a:xfrm>
           <a:prstGeom prst="rect">
             <a:avLst/>
@@ -10482,57 +8808,12 @@
           <a:noFill/>
         </p:spPr>
         <p:txBody>
-          <a:bodyPr wrap="square">
+          <a:bodyPr wrap="none">
             <a:spAutoFit/>
           </a:bodyPr>
           <a:lstStyle/>
           <a:p>
-            <a:pPr>
-              <a:spcBef>
-                <a:spcPts val="500"/>
-              </a:spcBef>
-              <a:defRPr sz="1500">
-                <a:solidFill>
-                  <a:srgbClr val="2C3E50"/>
-                </a:solidFill>
-              </a:defRPr>
-            </a:pPr>
-            <a:r>
-              <a:t>• Mỗi ngày, hàng triệu giao dịch thương mại tại Việt Nam tạo ra hàng triệu tờ hóa đơn giấy</a:t>
-            </a:r>
-          </a:p>
-          <a:p>
-            <a:pPr>
-              <a:spcBef>
-                <a:spcPts val="500"/>
-              </a:spcBef>
-              <a:defRPr sz="1500">
-                <a:solidFill>
-                  <a:srgbClr val="2C3E50"/>
-                </a:solidFill>
-              </a:defRPr>
-            </a:pPr>
-            <a:r>
-              <a:t>• Kế toán viên gõ tay từng con số → sai sót nhập liệu thường xuyên</a:t>
-            </a:r>
-          </a:p>
-          <a:p>
-            <a:pPr>
-              <a:spcBef>
-                <a:spcPts val="500"/>
-              </a:spcBef>
-              <a:defRPr sz="1500">
-                <a:solidFill>
-                  <a:srgbClr val="2C3E50"/>
-                </a:solidFill>
-              </a:defRPr>
-            </a:pPr>
-          </a:p>
-          <a:p>
-            <a:pPr>
-              <a:spcBef>
-                <a:spcPts val="1400"/>
-              </a:spcBef>
+            <a:pPr algn="ctr">
               <a:defRPr sz="1800" b="1">
                 <a:solidFill>
                   <a:srgbClr val="2E86DE"/>
@@ -10540,79 +8821,7 @@
               </a:defRPr>
             </a:pPr>
             <a:r>
-              <a:t>Thách thức đọc hóa đơn thực tế:</a:t>
-            </a:r>
-          </a:p>
-          <a:p>
-            <a:pPr>
-              <a:spcBef>
-                <a:spcPts val="500"/>
-              </a:spcBef>
-              <a:defRPr sz="1500">
-                <a:solidFill>
-                  <a:srgbClr val="2C3E50"/>
-                </a:solidFill>
-              </a:defRPr>
-            </a:pPr>
-            <a:r>
-              <a:t>• Font chữ tùy ý, góc chụp nghiêng</a:t>
-            </a:r>
-          </a:p>
-          <a:p>
-            <a:pPr>
-              <a:spcBef>
-                <a:spcPts val="500"/>
-              </a:spcBef>
-              <a:defRPr sz="1500">
-                <a:solidFill>
-                  <a:srgbClr val="2C3E50"/>
-                </a:solidFill>
-              </a:defRPr>
-            </a:pPr>
-            <a:r>
-              <a:t>• Ánh sáng không đều</a:t>
-            </a:r>
-          </a:p>
-          <a:p>
-            <a:pPr>
-              <a:spcBef>
-                <a:spcPts val="500"/>
-              </a:spcBef>
-              <a:defRPr sz="1500">
-                <a:solidFill>
-                  <a:srgbClr val="2C3E50"/>
-                </a:solidFill>
-              </a:defRPr>
-            </a:pPr>
-            <a:r>
-              <a:t>• Tiếng Việt với đầy đủ dấu thanh</a:t>
-            </a:r>
-          </a:p>
-          <a:p>
-            <a:pPr>
-              <a:spcBef>
-                <a:spcPts val="500"/>
-              </a:spcBef>
-              <a:defRPr sz="1500">
-                <a:solidFill>
-                  <a:srgbClr val="2C3E50"/>
-                </a:solidFill>
-              </a:defRPr>
-            </a:pPr>
-          </a:p>
-          <a:p>
-            <a:pPr>
-              <a:spcBef>
-                <a:spcPts val="500"/>
-              </a:spcBef>
-              <a:defRPr sz="1500">
-                <a:solidFill>
-                  <a:srgbClr val="2C3E50"/>
-                </a:solidFill>
-              </a:defRPr>
-            </a:pPr>
-            <a:r>
-              <a:t>• Cần biến **ảnh hóa đơn** thành **dữ liệu có cấu trúc**</a:t>
+              <a:t>→ Nhu cầu chung: Document Information Extraction (DIE)</a:t>
             </a:r>
           </a:p>
         </p:txBody>
@@ -10622,9 +8831,6 @@
   <p:clrMapOvr>
     <a:masterClrMapping/>
   </p:clrMapOvr>
-  <p:transition spd="med" advTm="800">
-    <p:fade/>
-  </p:transition>
 </p:sld>
 </file>
 
@@ -10728,7 +8934,7 @@
               </a:defRPr>
             </a:pPr>
             <a:r>
-              <a:t>Trích xuất Hóa đơn Tiếng Việt — Pipeline PaddleOCR • VietOCR • LayoutLMv3</a:t>
+              <a:t>Trích xuất Hóa đơn Tiếng Việt — PaddleOCR • VietOCR • LayoutLMv3</a:t>
             </a:r>
           </a:p>
         </p:txBody>
@@ -10763,23 +8969,65 @@
               </a:defRPr>
             </a:pPr>
             <a:r>
-              <a:t>CÁC TÌNH HUỐNG THỰC TẾ</a:t>
-            </a:r>
-          </a:p>
-        </p:txBody>
-      </p:sp>
-      <p:sp>
-        <p:nvSpPr>
-          <p:cNvPr id="5" name="Rounded Rectangle 4"/>
+              <a:t>MÔ HÌNH HÓA — BA TẦNG XỬ LÝ</a:t>
+            </a:r>
+          </a:p>
+        </p:txBody>
+      </p:sp>
+      <p:pic>
+        <p:nvPicPr>
+          <p:cNvPr id="5" name="Picture 4" descr="three-tiers.png"/>
+          <p:cNvPicPr>
+            <a:picLocks noChangeAspect="1"/>
+          </p:cNvPicPr>
+          <p:nvPr/>
+        </p:nvPicPr>
+        <p:blipFill>
+          <a:blip r:embed="rId2"/>
+          <a:stretch>
+            <a:fillRect/>
+          </a:stretch>
+        </p:blipFill>
+        <p:spPr>
+          <a:xfrm>
+            <a:off x="1828800" y="1188720"/>
+            <a:ext cx="8229600" cy="5029200"/>
+          </a:xfrm>
+          <a:prstGeom prst="rect">
+            <a:avLst/>
+          </a:prstGeom>
+        </p:spPr>
+      </p:pic>
+    </p:spTree>
+  </p:cSld>
+  <p:clrMapOvr>
+    <a:masterClrMapping/>
+  </p:clrMapOvr>
+</p:sld>
+</file>
+
+<file path=ppt/slides/slide6.xml><?xml version="1.0" encoding="utf-8"?>
+<p:sld xmlns:a="http://schemas.openxmlformats.org/drawingml/2006/main" xmlns:p="http://schemas.openxmlformats.org/presentationml/2006/main" xmlns:r="http://schemas.openxmlformats.org/officeDocument/2006/relationships">
+  <p:cSld>
+    <p:spTree>
+      <p:nvGrpSpPr>
+        <p:cNvPr id="1" name=""/>
+        <p:cNvGrpSpPr/>
+        <p:nvPr/>
+      </p:nvGrpSpPr>
+      <p:grpSpPr/>
+      <p:sp>
+        <p:nvSpPr>
+          <p:cNvPr id="2" name="Rectangle 1"/>
           <p:cNvSpPr/>
           <p:nvPr/>
         </p:nvSpPr>
         <p:spPr>
           <a:xfrm>
-            <a:off x="457200" y="1188720"/>
-            <a:ext cx="10972800" cy="365760"/>
-          </a:xfrm>
-          <a:prstGeom prst="roundRect">
+            <a:off x="0" y="0"/>
+            <a:ext cx="12191695" cy="54864"/>
+          </a:xfrm>
+          <a:prstGeom prst="rect">
             <a:avLst/>
           </a:prstGeom>
           <a:solidFill>
@@ -10807,6 +9055,136 @@
           <a:bodyPr rtlCol="0" anchor="ctr"/>
           <a:lstStyle/>
           <a:p>
+            <a:pPr algn="ctr"/>
+          </a:p>
+        </p:txBody>
+      </p:sp>
+      <p:sp>
+        <p:nvSpPr>
+          <p:cNvPr id="3" name="Rectangle 2"/>
+          <p:cNvSpPr/>
+          <p:nvPr/>
+        </p:nvSpPr>
+        <p:spPr>
+          <a:xfrm>
+            <a:off x="0" y="6492240"/>
+            <a:ext cx="12191695" cy="365760"/>
+          </a:xfrm>
+          <a:prstGeom prst="rect">
+            <a:avLst/>
+          </a:prstGeom>
+          <a:solidFill>
+            <a:srgbClr val="1B2A4A"/>
+          </a:solidFill>
+          <a:ln>
+            <a:noFill/>
+          </a:ln>
+        </p:spPr>
+        <p:style>
+          <a:lnRef idx="1">
+            <a:schemeClr val="accent1"/>
+          </a:lnRef>
+          <a:fillRef idx="3">
+            <a:schemeClr val="accent1"/>
+          </a:fillRef>
+          <a:effectRef idx="2">
+            <a:schemeClr val="accent1"/>
+          </a:effectRef>
+          <a:fontRef idx="minor">
+            <a:schemeClr val="lt1"/>
+          </a:fontRef>
+        </p:style>
+        <p:txBody>
+          <a:bodyPr rtlCol="0" anchor="ctr"/>
+          <a:lstStyle/>
+          <a:p>
+            <a:pPr algn="ctr">
+              <a:defRPr sz="1000">
+                <a:solidFill>
+                  <a:srgbClr val="FFFFFF"/>
+                </a:solidFill>
+              </a:defRPr>
+            </a:pPr>
+            <a:r>
+              <a:t>Trích xuất Hóa đơn Tiếng Việt — PaddleOCR • VietOCR • LayoutLMv3</a:t>
+            </a:r>
+          </a:p>
+        </p:txBody>
+      </p:sp>
+      <p:sp>
+        <p:nvSpPr>
+          <p:cNvPr id="4" name="TextBox 3"/>
+          <p:cNvSpPr txBox="1"/>
+          <p:nvPr/>
+        </p:nvSpPr>
+        <p:spPr>
+          <a:xfrm>
+            <a:off x="457200" y="137160"/>
+            <a:ext cx="10972800" cy="731520"/>
+          </a:xfrm>
+          <a:prstGeom prst="rect">
+            <a:avLst/>
+          </a:prstGeom>
+          <a:noFill/>
+        </p:spPr>
+        <p:txBody>
+          <a:bodyPr wrap="none">
+            <a:spAutoFit/>
+          </a:bodyPr>
+          <a:lstStyle/>
+          <a:p>
+            <a:pPr>
+              <a:defRPr sz="2600" b="1">
+                <a:solidFill>
+                  <a:srgbClr val="1B2A4A"/>
+                </a:solidFill>
+              </a:defRPr>
+            </a:pPr>
+            <a:r>
+              <a:t>ĐẦU VÀO &amp; ĐẦU RA</a:t>
+            </a:r>
+          </a:p>
+        </p:txBody>
+      </p:sp>
+      <p:sp>
+        <p:nvSpPr>
+          <p:cNvPr id="5" name="Rounded Rectangle 4"/>
+          <p:cNvSpPr/>
+          <p:nvPr/>
+        </p:nvSpPr>
+        <p:spPr>
+          <a:xfrm>
+            <a:off x="457200" y="1188720"/>
+            <a:ext cx="10972800" cy="365760"/>
+          </a:xfrm>
+          <a:prstGeom prst="roundRect">
+            <a:avLst/>
+          </a:prstGeom>
+          <a:solidFill>
+            <a:srgbClr val="2E86DE"/>
+          </a:solidFill>
+          <a:ln>
+            <a:noFill/>
+          </a:ln>
+        </p:spPr>
+        <p:style>
+          <a:lnRef idx="1">
+            <a:schemeClr val="accent1"/>
+          </a:lnRef>
+          <a:fillRef idx="3">
+            <a:schemeClr val="accent1"/>
+          </a:fillRef>
+          <a:effectRef idx="2">
+            <a:schemeClr val="accent1"/>
+          </a:effectRef>
+          <a:fontRef idx="minor">
+            <a:schemeClr val="lt1"/>
+          </a:fontRef>
+        </p:style>
+        <p:txBody>
+          <a:bodyPr rtlCol="0" anchor="ctr"/>
+          <a:lstStyle/>
+          <a:p>
             <a:pPr algn="ctr">
               <a:defRPr sz="1300" b="1">
                 <a:solidFill>
@@ -10815,7 +9193,7 @@
               </a:defRPr>
             </a:pPr>
             <a:r>
-              <a:t>Kịch bản A — Kế toán doanh nghiệp nhỏ</a:t>
+              <a:t>Đầu vào</a:t>
             </a:r>
           </a:p>
         </p:txBody>
@@ -10829,7 +9207,7 @@
         <p:spPr>
           <a:xfrm>
             <a:off x="457200" y="1554480"/>
-            <a:ext cx="10972800" cy="822960"/>
+            <a:ext cx="10972800" cy="731520"/>
           </a:xfrm>
           <a:prstGeom prst="roundRect">
             <a:avLst/>
@@ -10858,7 +9236,7 @@
           </a:fontRef>
         </p:style>
         <p:txBody>
-          <a:bodyPr rtlCol="0" anchor="ctr" wrap="square" lIns="127000" rIns="127000" tIns="63500"/>
+          <a:bodyPr rtlCol="0" anchor="ctr" wrap="square" lIns="127000" tIns="63500"/>
           <a:lstStyle/>
           <a:p>
             <a:pPr algn="ctr">
@@ -10872,7 +9250,7 @@
               </a:defRPr>
             </a:pPr>
             <a:r>
-              <a:t>• 300 hóa đơn công tác phí, mất 2–3 ngày nhập thủ công</a:t>
+              <a:t>• Ảnh JPEG/PNG hóa đơn chụp bằng điện thoại (nghiêng, nhòe, ánh sáng không đều)</a:t>
             </a:r>
           </a:p>
         </p:txBody>
@@ -10885,7 +9263,7 @@
         </p:nvSpPr>
         <p:spPr>
           <a:xfrm>
-            <a:off x="457200" y="2560320"/>
+            <a:off x="457200" y="2743200"/>
             <a:ext cx="10972800" cy="365760"/>
           </a:xfrm>
           <a:prstGeom prst="roundRect">
@@ -10924,7 +9302,7 @@
               </a:defRPr>
             </a:pPr>
             <a:r>
-              <a:t>Kịch bản B — Ứng dụng chi tiêu cá nhân</a:t>
+              <a:t>Đầu ra — JSON có ngữ nghĩa</a:t>
             </a:r>
           </a:p>
         </p:txBody>
@@ -10937,8 +9315,8 @@
         </p:nvSpPr>
         <p:spPr>
           <a:xfrm>
-            <a:off x="457200" y="2926080"/>
-            <a:ext cx="10972800" cy="822960"/>
+            <a:off x="457200" y="3108960"/>
+            <a:ext cx="10972800" cy="2834640"/>
           </a:xfrm>
           <a:prstGeom prst="roundRect">
             <a:avLst/>
@@ -10967,7 +9345,7 @@
           </a:fontRef>
         </p:style>
         <p:txBody>
-          <a:bodyPr rtlCol="0" anchor="ctr" wrap="square" lIns="127000" rIns="127000" tIns="63500"/>
+          <a:bodyPr rtlCol="0" anchor="ctr" wrap="square" lIns="127000" tIns="63500"/>
           <a:lstStyle/>
           <a:p>
             <a:pPr algn="ctr">
@@ -10981,105 +9359,11 @@
               </a:defRPr>
             </a:pPr>
             <a:r>
-              <a:t>• Chụp ảnh hóa đơn → tự động điền ngày, siêu thị, tổng tiền</a:t>
-            </a:r>
-          </a:p>
-        </p:txBody>
-      </p:sp>
-      <p:sp>
-        <p:nvSpPr>
-          <p:cNvPr id="9" name="Rounded Rectangle 8"/>
-          <p:cNvSpPr/>
-          <p:nvPr/>
-        </p:nvSpPr>
-        <p:spPr>
-          <a:xfrm>
-            <a:off x="457200" y="3931920"/>
-            <a:ext cx="10972800" cy="365760"/>
-          </a:xfrm>
-          <a:prstGeom prst="roundRect">
-            <a:avLst/>
-          </a:prstGeom>
-          <a:solidFill>
-            <a:srgbClr val="F39C12"/>
-          </a:solidFill>
-          <a:ln>
-            <a:noFill/>
-          </a:ln>
-        </p:spPr>
-        <p:style>
-          <a:lnRef idx="1">
-            <a:schemeClr val="accent1"/>
-          </a:lnRef>
-          <a:fillRef idx="3">
-            <a:schemeClr val="accent1"/>
-          </a:fillRef>
-          <a:effectRef idx="2">
-            <a:schemeClr val="accent1"/>
-          </a:effectRef>
-          <a:fontRef idx="minor">
-            <a:schemeClr val="lt1"/>
-          </a:fontRef>
-        </p:style>
-        <p:txBody>
-          <a:bodyPr rtlCol="0" anchor="ctr"/>
-          <a:lstStyle/>
-          <a:p>
-            <a:pPr algn="ctr">
-              <a:defRPr sz="1300" b="1">
-                <a:solidFill>
-                  <a:srgbClr val="FFFFFF"/>
-                </a:solidFill>
-              </a:defRPr>
-            </a:pPr>
-            <a:r>
-              <a:t>Kịch bản C — Kiểm toán &amp; Tuân thủ thuế</a:t>
-            </a:r>
-          </a:p>
-        </p:txBody>
-      </p:sp>
-      <p:sp>
-        <p:nvSpPr>
-          <p:cNvPr id="10" name="Rounded Rectangle 9"/>
-          <p:cNvSpPr/>
-          <p:nvPr/>
-        </p:nvSpPr>
-        <p:spPr>
-          <a:xfrm>
-            <a:off x="457200" y="4297680"/>
-            <a:ext cx="10972800" cy="822960"/>
-          </a:xfrm>
-          <a:prstGeom prst="roundRect">
-            <a:avLst/>
-          </a:prstGeom>
-          <a:solidFill>
-            <a:srgbClr val="FFF3E0"/>
-          </a:solidFill>
-          <a:ln w="12700">
-            <a:solidFill>
-              <a:srgbClr val="F39C12"/>
-            </a:solidFill>
-          </a:ln>
-        </p:spPr>
-        <p:style>
-          <a:lnRef idx="1">
-            <a:schemeClr val="accent1"/>
-          </a:lnRef>
-          <a:fillRef idx="3">
-            <a:schemeClr val="accent1"/>
-          </a:fillRef>
-          <a:effectRef idx="2">
-            <a:schemeClr val="accent1"/>
-          </a:effectRef>
-          <a:fontRef idx="minor">
-            <a:schemeClr val="lt1"/>
-          </a:fontRef>
-        </p:style>
-        <p:txBody>
-          <a:bodyPr rtlCol="0" anchor="ctr" wrap="square" lIns="127000" rIns="127000" tIns="63500"/>
-          <a:lstStyle/>
-          <a:p>
-            <a:pPr algn="ctr">
+              <a:t>• { "store_name": "Circle K", "date": "2024-05-27", "total": 87000</a:t>
+            </a:r>
+          </a:p>
+          <a:p>
+            <a:pPr>
               <a:spcBef>
                 <a:spcPts val="300"/>
               </a:spcBef>
@@ -11090,42 +9374,7 @@
               </a:defRPr>
             </a:pPr>
             <a:r>
-              <a:t>• Xác minh hàng nghìn hóa đơn VAT tự động</a:t>
-            </a:r>
-          </a:p>
-        </p:txBody>
-      </p:sp>
-      <p:sp>
-        <p:nvSpPr>
-          <p:cNvPr id="11" name="TextBox 10"/>
-          <p:cNvSpPr txBox="1"/>
-          <p:nvPr/>
-        </p:nvSpPr>
-        <p:spPr>
-          <a:xfrm>
-            <a:off x="457200" y="5486400"/>
-            <a:ext cx="10972800" cy="457200"/>
-          </a:xfrm>
-          <a:prstGeom prst="rect">
-            <a:avLst/>
-          </a:prstGeom>
-          <a:noFill/>
-        </p:spPr>
-        <p:txBody>
-          <a:bodyPr wrap="none">
-            <a:spAutoFit/>
-          </a:bodyPr>
-          <a:lstStyle/>
-          <a:p>
-            <a:pPr algn="ctr">
-              <a:defRPr sz="1800" b="1">
-                <a:solidFill>
-                  <a:srgbClr val="2E86DE"/>
-                </a:solidFill>
-              </a:defRPr>
-            </a:pPr>
-            <a:r>
-              <a:t>→ Nhu cầu chung: Document Information Extraction (DIE)</a:t>
+              <a:t>•   "items": [ { "name": "Cafe sua da", "qty": 2, "price": 29000 }, ... ] }</a:t>
             </a:r>
           </a:p>
         </p:txBody>
@@ -11135,108 +9384,6 @@
   <p:clrMapOvr>
     <a:masterClrMapping/>
   </p:clrMapOvr>
-  <p:transition spd="med" advTm="800">
-    <p:fade/>
-  </p:transition>
-</p:sld>
-</file>
-
-<file path=ppt/slides/slide6.xml><?xml version="1.0" encoding="utf-8"?>
-<p:sld xmlns:a="http://schemas.openxmlformats.org/drawingml/2006/main" xmlns:p="http://schemas.openxmlformats.org/presentationml/2006/main" xmlns:r="http://schemas.openxmlformats.org/officeDocument/2006/relationships">
-  <p:cSld>
-    <p:bg>
-      <p:bgPr>
-        <a:solidFill>
-          <a:srgbClr val="2E86DE"/>
-        </a:solidFill>
-        <a:effectLst/>
-      </p:bgPr>
-    </p:bg>
-    <p:spTree>
-      <p:nvGrpSpPr>
-        <p:cNvPr id="1" name=""/>
-        <p:cNvGrpSpPr/>
-        <p:nvPr/>
-      </p:nvGrpSpPr>
-      <p:grpSpPr/>
-      <p:sp>
-        <p:nvSpPr>
-          <p:cNvPr id="2" name="TextBox 1"/>
-          <p:cNvSpPr txBox="1"/>
-          <p:nvPr/>
-        </p:nvSpPr>
-        <p:spPr>
-          <a:xfrm>
-            <a:off x="914400" y="2286000"/>
-            <a:ext cx="1828800" cy="1371600"/>
-          </a:xfrm>
-          <a:prstGeom prst="rect">
-            <a:avLst/>
-          </a:prstGeom>
-          <a:noFill/>
-        </p:spPr>
-        <p:txBody>
-          <a:bodyPr wrap="none">
-            <a:spAutoFit/>
-          </a:bodyPr>
-          <a:lstStyle/>
-          <a:p>
-            <a:pPr>
-              <a:defRPr sz="7200" b="1">
-                <a:solidFill>
-                  <a:srgbClr val="FFFFFF"/>
-                </a:solidFill>
-              </a:defRPr>
-            </a:pPr>
-            <a:r>
-              <a:t>02</a:t>
-            </a:r>
-          </a:p>
-        </p:txBody>
-      </p:sp>
-      <p:sp>
-        <p:nvSpPr>
-          <p:cNvPr id="3" name="TextBox 2"/>
-          <p:cNvSpPr txBox="1"/>
-          <p:nvPr/>
-        </p:nvSpPr>
-        <p:spPr>
-          <a:xfrm>
-            <a:off x="914400" y="3657600"/>
-            <a:ext cx="9144000" cy="1371600"/>
-          </a:xfrm>
-          <a:prstGeom prst="rect">
-            <a:avLst/>
-          </a:prstGeom>
-          <a:noFill/>
-        </p:spPr>
-        <p:txBody>
-          <a:bodyPr wrap="square">
-            <a:spAutoFit/>
-          </a:bodyPr>
-          <a:lstStyle/>
-          <a:p>
-            <a:pPr>
-              <a:defRPr sz="3200" b="1">
-                <a:solidFill>
-                  <a:srgbClr val="FFFFFF"/>
-                </a:solidFill>
-              </a:defRPr>
-            </a:pPr>
-            <a:r>
-              <a:t>TỔNG QUAN BÀI TOÁN</a:t>
-            </a:r>
-          </a:p>
-        </p:txBody>
-      </p:sp>
-    </p:spTree>
-  </p:cSld>
-  <p:clrMapOvr>
-    <a:masterClrMapping/>
-  </p:clrMapOvr>
-  <p:transition spd="med" advTm="1000">
-    <p:fade/>
-  </p:transition>
 </p:sld>
 </file>
 
@@ -11340,7 +9487,7 @@
               </a:defRPr>
             </a:pPr>
             <a:r>
-              <a:t>Trích xuất Hóa đơn Tiếng Việt — Pipeline PaddleOCR • VietOCR • LayoutLMv3</a:t>
+              <a:t>Trích xuất Hóa đơn Tiếng Việt — PaddleOCR • VietOCR • LayoutLMv3</a:t>
             </a:r>
           </a:p>
         </p:txBody>
@@ -11375,416 +9522,40 @@
               </a:defRPr>
             </a:pPr>
             <a:r>
-              <a:t>MÔ HÌNH HÓA — BA TẦNG XỬ LÝ</a:t>
-            </a:r>
-          </a:p>
-        </p:txBody>
-      </p:sp>
-      <p:sp>
-        <p:nvSpPr>
-          <p:cNvPr id="5" name="Rounded Rectangle 4"/>
-          <p:cNvSpPr/>
-          <p:nvPr/>
-        </p:nvSpPr>
-        <p:spPr>
-          <a:xfrm>
-            <a:off x="1371600" y="1188720"/>
-            <a:ext cx="9144000" cy="365760"/>
-          </a:xfrm>
-          <a:prstGeom prst="roundRect">
-            <a:avLst/>
-          </a:prstGeom>
-          <a:solidFill>
-            <a:srgbClr val="2E86DE"/>
-          </a:solidFill>
-          <a:ln>
-            <a:noFill/>
-          </a:ln>
-        </p:spPr>
-        <p:style>
-          <a:lnRef idx="1">
-            <a:schemeClr val="accent1"/>
-          </a:lnRef>
-          <a:fillRef idx="3">
-            <a:schemeClr val="accent1"/>
-          </a:fillRef>
-          <a:effectRef idx="2">
-            <a:schemeClr val="accent1"/>
-          </a:effectRef>
-          <a:fontRef idx="minor">
-            <a:schemeClr val="lt1"/>
-          </a:fontRef>
-        </p:style>
-        <p:txBody>
-          <a:bodyPr rtlCol="0" anchor="ctr"/>
-          <a:lstStyle/>
-          <a:p>
-            <a:pPr algn="ctr">
-              <a:defRPr sz="1300" b="1">
-                <a:solidFill>
-                  <a:srgbClr val="FFFFFF"/>
-                </a:solidFill>
-              </a:defRPr>
-            </a:pPr>
-            <a:r>
-              <a:t>Tầng 3: Trích xuất thực thể có cấu trúc (KIE)</a:t>
-            </a:r>
-          </a:p>
-        </p:txBody>
-      </p:sp>
-      <p:sp>
-        <p:nvSpPr>
-          <p:cNvPr id="6" name="Rounded Rectangle 5"/>
-          <p:cNvSpPr/>
-          <p:nvPr/>
-        </p:nvSpPr>
-        <p:spPr>
-          <a:xfrm>
-            <a:off x="1371600" y="1554480"/>
-            <a:ext cx="9144000" cy="1005840"/>
-          </a:xfrm>
-          <a:prstGeom prst="roundRect">
-            <a:avLst/>
-          </a:prstGeom>
-          <a:solidFill>
-            <a:srgbClr val="D6EAF8"/>
-          </a:solidFill>
-          <a:ln w="12700">
-            <a:solidFill>
-              <a:srgbClr val="2E86DE"/>
-            </a:solidFill>
-          </a:ln>
-        </p:spPr>
-        <p:style>
-          <a:lnRef idx="1">
-            <a:schemeClr val="accent1"/>
-          </a:lnRef>
-          <a:fillRef idx="3">
-            <a:schemeClr val="accent1"/>
-          </a:fillRef>
-          <a:effectRef idx="2">
-            <a:schemeClr val="accent1"/>
-          </a:effectRef>
-          <a:fontRef idx="minor">
-            <a:schemeClr val="lt1"/>
-          </a:fontRef>
-        </p:style>
-        <p:txBody>
-          <a:bodyPr rtlCol="0" anchor="ctr" wrap="square" lIns="127000" rIns="127000" tIns="63500"/>
-          <a:lstStyle/>
-          <a:p>
-            <a:pPr algn="ctr">
-              <a:spcBef>
-                <a:spcPts val="300"/>
-              </a:spcBef>
-              <a:defRPr sz="1200">
-                <a:solidFill>
-                  <a:srgbClr val="2C3E50"/>
-                </a:solidFill>
-              </a:defRPr>
-            </a:pPr>
-            <a:r>
-              <a:t>• LayoutLMv3 — Multi-modal Transformer</a:t>
-            </a:r>
-          </a:p>
-        </p:txBody>
-      </p:sp>
-      <p:sp>
-        <p:nvSpPr>
-          <p:cNvPr id="7" name="TextBox 6"/>
-          <p:cNvSpPr txBox="1"/>
-          <p:nvPr/>
-        </p:nvSpPr>
-        <p:spPr>
-          <a:xfrm>
-            <a:off x="5486400" y="2560320"/>
-            <a:ext cx="914400" cy="457200"/>
+              <a:t>PIPELINE XỬ LÝ</a:t>
+            </a:r>
+          </a:p>
+        </p:txBody>
+      </p:sp>
+      <p:pic>
+        <p:nvPicPr>
+          <p:cNvPr id="5" name="Picture 4" descr="pipeline.png"/>
+          <p:cNvPicPr>
+            <a:picLocks noChangeAspect="1"/>
+          </p:cNvPicPr>
+          <p:nvPr/>
+        </p:nvPicPr>
+        <p:blipFill>
+          <a:blip r:embed="rId2"/>
+          <a:stretch>
+            <a:fillRect/>
+          </a:stretch>
+        </p:blipFill>
+        <p:spPr>
+          <a:xfrm>
+            <a:off x="914400" y="1371600"/>
+            <a:ext cx="10058400" cy="4572000"/>
           </a:xfrm>
           <a:prstGeom prst="rect">
             <a:avLst/>
           </a:prstGeom>
-          <a:noFill/>
-        </p:spPr>
-        <p:txBody>
-          <a:bodyPr wrap="none">
-            <a:spAutoFit/>
-          </a:bodyPr>
-          <a:lstStyle/>
-          <a:p>
-            <a:pPr algn="ctr">
-              <a:defRPr sz="2400">
-                <a:solidFill>
-                  <a:srgbClr val="2E86DE"/>
-                </a:solidFill>
-              </a:defRPr>
-            </a:pPr>
-            <a:r>
-              <a:t>↓</a:t>
-            </a:r>
-          </a:p>
-        </p:txBody>
-      </p:sp>
-      <p:sp>
-        <p:nvSpPr>
-          <p:cNvPr id="8" name="Rounded Rectangle 7"/>
-          <p:cNvSpPr/>
-          <p:nvPr/>
-        </p:nvSpPr>
-        <p:spPr>
-          <a:xfrm>
-            <a:off x="1371600" y="2926080"/>
-            <a:ext cx="9144000" cy="365760"/>
-          </a:xfrm>
-          <a:prstGeom prst="roundRect">
-            <a:avLst/>
-          </a:prstGeom>
-          <a:solidFill>
-            <a:srgbClr val="1A5276"/>
-          </a:solidFill>
-          <a:ln>
-            <a:noFill/>
-          </a:ln>
-        </p:spPr>
-        <p:style>
-          <a:lnRef idx="1">
-            <a:schemeClr val="accent1"/>
-          </a:lnRef>
-          <a:fillRef idx="3">
-            <a:schemeClr val="accent1"/>
-          </a:fillRef>
-          <a:effectRef idx="2">
-            <a:schemeClr val="accent1"/>
-          </a:effectRef>
-          <a:fontRef idx="minor">
-            <a:schemeClr val="lt1"/>
-          </a:fontRef>
-        </p:style>
-        <p:txBody>
-          <a:bodyPr rtlCol="0" anchor="ctr"/>
-          <a:lstStyle/>
-          <a:p>
-            <a:pPr algn="ctr">
-              <a:defRPr sz="1300" b="1">
-                <a:solidFill>
-                  <a:srgbClr val="FFFFFF"/>
-                </a:solidFill>
-              </a:defRPr>
-            </a:pPr>
-            <a:r>
-              <a:t>Tầng 2: Nhận dạng ký tự (OCR Recognition)</a:t>
-            </a:r>
-          </a:p>
-        </p:txBody>
-      </p:sp>
-      <p:sp>
-        <p:nvSpPr>
-          <p:cNvPr id="9" name="Rounded Rectangle 8"/>
-          <p:cNvSpPr/>
-          <p:nvPr/>
-        </p:nvSpPr>
-        <p:spPr>
-          <a:xfrm>
-            <a:off x="1371600" y="3291840"/>
-            <a:ext cx="9144000" cy="1005840"/>
-          </a:xfrm>
-          <a:prstGeom prst="roundRect">
-            <a:avLst/>
-          </a:prstGeom>
-          <a:solidFill>
-            <a:srgbClr val="E3F2FD"/>
-          </a:solidFill>
-          <a:ln w="12700">
-            <a:solidFill>
-              <a:srgbClr val="1A5276"/>
-            </a:solidFill>
-          </a:ln>
-        </p:spPr>
-        <p:style>
-          <a:lnRef idx="1">
-            <a:schemeClr val="accent1"/>
-          </a:lnRef>
-          <a:fillRef idx="3">
-            <a:schemeClr val="accent1"/>
-          </a:fillRef>
-          <a:effectRef idx="2">
-            <a:schemeClr val="accent1"/>
-          </a:effectRef>
-          <a:fontRef idx="minor">
-            <a:schemeClr val="lt1"/>
-          </a:fontRef>
-        </p:style>
-        <p:txBody>
-          <a:bodyPr rtlCol="0" anchor="ctr" wrap="square" lIns="127000" rIns="127000" tIns="63500"/>
-          <a:lstStyle/>
-          <a:p>
-            <a:pPr algn="ctr">
-              <a:spcBef>
-                <a:spcPts val="300"/>
-              </a:spcBef>
-              <a:defRPr sz="1200">
-                <a:solidFill>
-                  <a:srgbClr val="2C3E50"/>
-                </a:solidFill>
-              </a:defRPr>
-            </a:pPr>
-            <a:r>
-              <a:t>• VietOCR — Seq2Seq + Attention</a:t>
-            </a:r>
-          </a:p>
-        </p:txBody>
-      </p:sp>
-      <p:sp>
-        <p:nvSpPr>
-          <p:cNvPr id="10" name="TextBox 9"/>
-          <p:cNvSpPr txBox="1"/>
-          <p:nvPr/>
-        </p:nvSpPr>
-        <p:spPr>
-          <a:xfrm>
-            <a:off x="5486400" y="4297680"/>
-            <a:ext cx="914400" cy="457200"/>
-          </a:xfrm>
-          <a:prstGeom prst="rect">
-            <a:avLst/>
-          </a:prstGeom>
-          <a:noFill/>
-        </p:spPr>
-        <p:txBody>
-          <a:bodyPr wrap="none">
-            <a:spAutoFit/>
-          </a:bodyPr>
-          <a:lstStyle/>
-          <a:p>
-            <a:pPr algn="ctr">
-              <a:defRPr sz="2400">
-                <a:solidFill>
-                  <a:srgbClr val="2E86DE"/>
-                </a:solidFill>
-              </a:defRPr>
-            </a:pPr>
-            <a:r>
-              <a:t>↓</a:t>
-            </a:r>
-          </a:p>
-        </p:txBody>
-      </p:sp>
-      <p:sp>
-        <p:nvSpPr>
-          <p:cNvPr id="11" name="Rounded Rectangle 10"/>
-          <p:cNvSpPr/>
-          <p:nvPr/>
-        </p:nvSpPr>
-        <p:spPr>
-          <a:xfrm>
-            <a:off x="1371600" y="4663440"/>
-            <a:ext cx="9144000" cy="365760"/>
-          </a:xfrm>
-          <a:prstGeom prst="roundRect">
-            <a:avLst/>
-          </a:prstGeom>
-          <a:solidFill>
-            <a:srgbClr val="1B2A4A"/>
-          </a:solidFill>
-          <a:ln>
-            <a:noFill/>
-          </a:ln>
-        </p:spPr>
-        <p:style>
-          <a:lnRef idx="1">
-            <a:schemeClr val="accent1"/>
-          </a:lnRef>
-          <a:fillRef idx="3">
-            <a:schemeClr val="accent1"/>
-          </a:fillRef>
-          <a:effectRef idx="2">
-            <a:schemeClr val="accent1"/>
-          </a:effectRef>
-          <a:fontRef idx="minor">
-            <a:schemeClr val="lt1"/>
-          </a:fontRef>
-        </p:style>
-        <p:txBody>
-          <a:bodyPr rtlCol="0" anchor="ctr"/>
-          <a:lstStyle/>
-          <a:p>
-            <a:pPr algn="ctr">
-              <a:defRPr sz="1300" b="1">
-                <a:solidFill>
-                  <a:srgbClr val="FFFFFF"/>
-                </a:solidFill>
-              </a:defRPr>
-            </a:pPr>
-            <a:r>
-              <a:t>Tầng 1: Phát hiện vùng chữ (Text Detection)</a:t>
-            </a:r>
-          </a:p>
-        </p:txBody>
-      </p:sp>
-      <p:sp>
-        <p:nvSpPr>
-          <p:cNvPr id="12" name="Rounded Rectangle 11"/>
-          <p:cNvSpPr/>
-          <p:nvPr/>
-        </p:nvSpPr>
-        <p:spPr>
-          <a:xfrm>
-            <a:off x="1371600" y="5029200"/>
-            <a:ext cx="9144000" cy="1005840"/>
-          </a:xfrm>
-          <a:prstGeom prst="roundRect">
-            <a:avLst/>
-          </a:prstGeom>
-          <a:solidFill>
-            <a:srgbClr val="F8F9FA"/>
-          </a:solidFill>
-          <a:ln w="12700">
-            <a:solidFill>
-              <a:srgbClr val="1B2A4A"/>
-            </a:solidFill>
-          </a:ln>
-        </p:spPr>
-        <p:style>
-          <a:lnRef idx="1">
-            <a:schemeClr val="accent1"/>
-          </a:lnRef>
-          <a:fillRef idx="3">
-            <a:schemeClr val="accent1"/>
-          </a:fillRef>
-          <a:effectRef idx="2">
-            <a:schemeClr val="accent1"/>
-          </a:effectRef>
-          <a:fontRef idx="minor">
-            <a:schemeClr val="lt1"/>
-          </a:fontRef>
-        </p:style>
-        <p:txBody>
-          <a:bodyPr rtlCol="0" anchor="ctr" wrap="square" lIns="127000" rIns="127000" tIns="63500"/>
-          <a:lstStyle/>
-          <a:p>
-            <a:pPr algn="ctr">
-              <a:spcBef>
-                <a:spcPts val="300"/>
-              </a:spcBef>
-              <a:defRPr sz="1200">
-                <a:solidFill>
-                  <a:srgbClr val="2C3E50"/>
-                </a:solidFill>
-              </a:defRPr>
-            </a:pPr>
-            <a:r>
-              <a:t>• PaddleOCR — DB (Differentiable Binarization)</a:t>
-            </a:r>
-          </a:p>
-        </p:txBody>
-      </p:sp>
+        </p:spPr>
+      </p:pic>
     </p:spTree>
   </p:cSld>
   <p:clrMapOvr>
     <a:masterClrMapping/>
   </p:clrMapOvr>
-  <p:transition spd="med" advTm="800">
-    <p:fade/>
-  </p:transition>
 </p:sld>
 </file>
 
@@ -11888,7 +9659,7 @@
               </a:defRPr>
             </a:pPr>
             <a:r>
-              <a:t>Trích xuất Hóa đơn Tiếng Việt — Pipeline PaddleOCR • VietOCR • LayoutLMv3</a:t>
+              <a:t>Trích xuất Hóa đơn Tiếng Việt — PaddleOCR • VietOCR • LayoutLMv3</a:t>
             </a:r>
           </a:p>
         </p:txBody>
@@ -11923,7 +9694,7 @@
               </a:defRPr>
             </a:pPr>
             <a:r>
-              <a:t>ĐẦU VÀO &amp; ĐẦU RA</a:t>
+              <a:t>TEXT DETECTION — Từ sliding window đến anchor-free</a:t>
             </a:r>
           </a:p>
         </p:txBody>
@@ -11936,8 +9707,286 @@
         </p:nvSpPr>
         <p:spPr>
           <a:xfrm>
-            <a:off x="457200" y="1188720"/>
-            <a:ext cx="10972800" cy="365760"/>
+            <a:off x="274320" y="1097280"/>
+            <a:ext cx="3657600" cy="365760"/>
+          </a:xfrm>
+          <a:prstGeom prst="roundRect">
+            <a:avLst/>
+          </a:prstGeom>
+          <a:solidFill>
+            <a:srgbClr val="7F8C8D"/>
+          </a:solidFill>
+          <a:ln>
+            <a:noFill/>
+          </a:ln>
+        </p:spPr>
+        <p:style>
+          <a:lnRef idx="1">
+            <a:schemeClr val="accent1"/>
+          </a:lnRef>
+          <a:fillRef idx="3">
+            <a:schemeClr val="accent1"/>
+          </a:fillRef>
+          <a:effectRef idx="2">
+            <a:schemeClr val="accent1"/>
+          </a:effectRef>
+          <a:fontRef idx="minor">
+            <a:schemeClr val="lt1"/>
+          </a:fontRef>
+        </p:style>
+        <p:txBody>
+          <a:bodyPr rtlCol="0" anchor="ctr"/>
+          <a:lstStyle/>
+          <a:p>
+            <a:pPr algn="ctr">
+              <a:defRPr sz="1300" b="1">
+                <a:solidFill>
+                  <a:srgbClr val="FFFFFF"/>
+                </a:solidFill>
+              </a:defRPr>
+            </a:pPr>
+            <a:r>
+              <a:t>Thế hệ 1 (trước 2015)</a:t>
+            </a:r>
+          </a:p>
+        </p:txBody>
+      </p:sp>
+      <p:sp>
+        <p:nvSpPr>
+          <p:cNvPr id="6" name="Rounded Rectangle 5"/>
+          <p:cNvSpPr/>
+          <p:nvPr/>
+        </p:nvSpPr>
+        <p:spPr>
+          <a:xfrm>
+            <a:off x="274320" y="1463040"/>
+            <a:ext cx="3657600" cy="1920240"/>
+          </a:xfrm>
+          <a:prstGeom prst="roundRect">
+            <a:avLst/>
+          </a:prstGeom>
+          <a:solidFill>
+            <a:srgbClr val="F8F9FA"/>
+          </a:solidFill>
+          <a:ln w="12700">
+            <a:solidFill>
+              <a:srgbClr val="7F8C8D"/>
+            </a:solidFill>
+          </a:ln>
+        </p:spPr>
+        <p:style>
+          <a:lnRef idx="1">
+            <a:schemeClr val="accent1"/>
+          </a:lnRef>
+          <a:fillRef idx="3">
+            <a:schemeClr val="accent1"/>
+          </a:fillRef>
+          <a:effectRef idx="2">
+            <a:schemeClr val="accent1"/>
+          </a:effectRef>
+          <a:fontRef idx="minor">
+            <a:schemeClr val="lt1"/>
+          </a:fontRef>
+        </p:style>
+        <p:txBody>
+          <a:bodyPr rtlCol="0" anchor="ctr" wrap="square" lIns="127000" tIns="63500"/>
+          <a:lstStyle/>
+          <a:p>
+            <a:pPr algn="ctr">
+              <a:spcBef>
+                <a:spcPts val="300"/>
+              </a:spcBef>
+              <a:defRPr sz="1200">
+                <a:solidFill>
+                  <a:srgbClr val="2C3E50"/>
+                </a:solidFill>
+              </a:defRPr>
+            </a:pPr>
+            <a:r>
+              <a:t>• MSER, SWT</a:t>
+            </a:r>
+          </a:p>
+          <a:p>
+            <a:pPr>
+              <a:spcBef>
+                <a:spcPts val="300"/>
+              </a:spcBef>
+              <a:defRPr sz="1200">
+                <a:solidFill>
+                  <a:srgbClr val="2C3E50"/>
+                </a:solidFill>
+              </a:defRPr>
+            </a:pPr>
+            <a:r>
+              <a:t>• Phân tích pixel theo màu sắc</a:t>
+            </a:r>
+          </a:p>
+          <a:p>
+            <a:pPr>
+              <a:spcBef>
+                <a:spcPts val="300"/>
+              </a:spcBef>
+              <a:defRPr sz="1200">
+                <a:solidFill>
+                  <a:srgbClr val="2C3E50"/>
+                </a:solidFill>
+              </a:defRPr>
+            </a:pPr>
+            <a:r>
+              <a:t>• Chỉ hoạt động với ảnh sạch</a:t>
+            </a:r>
+          </a:p>
+        </p:txBody>
+      </p:sp>
+      <p:sp>
+        <p:nvSpPr>
+          <p:cNvPr id="7" name="Rounded Rectangle 6"/>
+          <p:cNvSpPr/>
+          <p:nvPr/>
+        </p:nvSpPr>
+        <p:spPr>
+          <a:xfrm>
+            <a:off x="274320" y="3566160"/>
+            <a:ext cx="3657600" cy="365760"/>
+          </a:xfrm>
+          <a:prstGeom prst="roundRect">
+            <a:avLst/>
+          </a:prstGeom>
+          <a:solidFill>
+            <a:srgbClr val="F39C12"/>
+          </a:solidFill>
+          <a:ln>
+            <a:noFill/>
+          </a:ln>
+        </p:spPr>
+        <p:style>
+          <a:lnRef idx="1">
+            <a:schemeClr val="accent1"/>
+          </a:lnRef>
+          <a:fillRef idx="3">
+            <a:schemeClr val="accent1"/>
+          </a:fillRef>
+          <a:effectRef idx="2">
+            <a:schemeClr val="accent1"/>
+          </a:effectRef>
+          <a:fontRef idx="minor">
+            <a:schemeClr val="lt1"/>
+          </a:fontRef>
+        </p:style>
+        <p:txBody>
+          <a:bodyPr rtlCol="0" anchor="ctr"/>
+          <a:lstStyle/>
+          <a:p>
+            <a:pPr algn="ctr">
+              <a:defRPr sz="1300" b="1">
+                <a:solidFill>
+                  <a:srgbClr val="FFFFFF"/>
+                </a:solidFill>
+              </a:defRPr>
+            </a:pPr>
+            <a:r>
+              <a:t>Thế hệ 2 (2015–2017)</a:t>
+            </a:r>
+          </a:p>
+        </p:txBody>
+      </p:sp>
+      <p:sp>
+        <p:nvSpPr>
+          <p:cNvPr id="8" name="Rounded Rectangle 7"/>
+          <p:cNvSpPr/>
+          <p:nvPr/>
+        </p:nvSpPr>
+        <p:spPr>
+          <a:xfrm>
+            <a:off x="274320" y="3931920"/>
+            <a:ext cx="3657600" cy="1920240"/>
+          </a:xfrm>
+          <a:prstGeom prst="roundRect">
+            <a:avLst/>
+          </a:prstGeom>
+          <a:solidFill>
+            <a:srgbClr val="FFF3E0"/>
+          </a:solidFill>
+          <a:ln w="12700">
+            <a:solidFill>
+              <a:srgbClr val="F39C12"/>
+            </a:solidFill>
+          </a:ln>
+        </p:spPr>
+        <p:style>
+          <a:lnRef idx="1">
+            <a:schemeClr val="accent1"/>
+          </a:lnRef>
+          <a:fillRef idx="3">
+            <a:schemeClr val="accent1"/>
+          </a:fillRef>
+          <a:effectRef idx="2">
+            <a:schemeClr val="accent1"/>
+          </a:effectRef>
+          <a:fontRef idx="minor">
+            <a:schemeClr val="lt1"/>
+          </a:fontRef>
+        </p:style>
+        <p:txBody>
+          <a:bodyPr rtlCol="0" anchor="ctr" wrap="square" lIns="127000" tIns="63500"/>
+          <a:lstStyle/>
+          <a:p>
+            <a:pPr algn="ctr">
+              <a:spcBef>
+                <a:spcPts val="300"/>
+              </a:spcBef>
+              <a:defRPr sz="1200">
+                <a:solidFill>
+                  <a:srgbClr val="2C3E50"/>
+                </a:solidFill>
+              </a:defRPr>
+            </a:pPr>
+            <a:r>
+              <a:t>• CTPN, TextBoxes++, SegLink</a:t>
+            </a:r>
+          </a:p>
+          <a:p>
+            <a:pPr>
+              <a:spcBef>
+                <a:spcPts val="300"/>
+              </a:spcBef>
+              <a:defRPr sz="1200">
+                <a:solidFill>
+                  <a:srgbClr val="2C3E50"/>
+                </a:solidFill>
+              </a:defRPr>
+            </a:pPr>
+            <a:r>
+              <a:t>• CNN-based với Anchor Boxes</a:t>
+            </a:r>
+          </a:p>
+          <a:p>
+            <a:pPr>
+              <a:spcBef>
+                <a:spcPts val="300"/>
+              </a:spcBef>
+              <a:defRPr sz="1200">
+                <a:solidFill>
+                  <a:srgbClr val="2C3E50"/>
+                </a:solidFill>
+              </a:defRPr>
+            </a:pPr>
+            <a:r>
+              <a:t>• Khó phát hiện văn bản cong</a:t>
+            </a:r>
+          </a:p>
+        </p:txBody>
+      </p:sp>
+      <p:sp>
+        <p:nvSpPr>
+          <p:cNvPr id="9" name="Rounded Rectangle 8"/>
+          <p:cNvSpPr/>
+          <p:nvPr/>
+        </p:nvSpPr>
+        <p:spPr>
+          <a:xfrm>
+            <a:off x="4206240" y="1097280"/>
+            <a:ext cx="7680960" cy="365760"/>
           </a:xfrm>
           <a:prstGeom prst="roundRect">
             <a:avLst/>
@@ -11975,21 +10024,21 @@
               </a:defRPr>
             </a:pPr>
             <a:r>
-              <a:t>Đầu vào</a:t>
-            </a:r>
-          </a:p>
-        </p:txBody>
-      </p:sp>
-      <p:sp>
-        <p:nvSpPr>
-          <p:cNvPr id="6" name="Rounded Rectangle 5"/>
+              <a:t>★ Thế hệ 3 (2018–nay) — DB</a:t>
+            </a:r>
+          </a:p>
+        </p:txBody>
+      </p:sp>
+      <p:sp>
+        <p:nvSpPr>
+          <p:cNvPr id="10" name="Rounded Rectangle 9"/>
           <p:cNvSpPr/>
           <p:nvPr/>
         </p:nvSpPr>
         <p:spPr>
           <a:xfrm>
-            <a:off x="457200" y="1554480"/>
-            <a:ext cx="10972800" cy="731520"/>
+            <a:off x="4206240" y="1463040"/>
+            <a:ext cx="7680960" cy="4389120"/>
           </a:xfrm>
           <a:prstGeom prst="roundRect">
             <a:avLst/>
@@ -12018,7 +10067,7 @@
           </a:fontRef>
         </p:style>
         <p:txBody>
-          <a:bodyPr rtlCol="0" anchor="ctr" wrap="square" lIns="127000" rIns="127000" tIns="63500"/>
+          <a:bodyPr rtlCol="0" anchor="ctr" wrap="square" lIns="127000" tIns="63500"/>
           <a:lstStyle/>
           <a:p>
             <a:pPr algn="ctr">
@@ -12032,105 +10081,11 @@
               </a:defRPr>
             </a:pPr>
             <a:r>
-              <a:t>• Ảnh JPEG/PNG hóa đơn chụp bằng điện thoại (nghiêng, nhòe, ánh sáng không đều)</a:t>
-            </a:r>
-          </a:p>
-        </p:txBody>
-      </p:sp>
-      <p:sp>
-        <p:nvSpPr>
-          <p:cNvPr id="7" name="Rounded Rectangle 6"/>
-          <p:cNvSpPr/>
-          <p:nvPr/>
-        </p:nvSpPr>
-        <p:spPr>
-          <a:xfrm>
-            <a:off x="457200" y="2743200"/>
-            <a:ext cx="10972800" cy="365760"/>
-          </a:xfrm>
-          <a:prstGeom prst="roundRect">
-            <a:avLst/>
-          </a:prstGeom>
-          <a:solidFill>
-            <a:srgbClr val="27AE60"/>
-          </a:solidFill>
-          <a:ln>
-            <a:noFill/>
-          </a:ln>
-        </p:spPr>
-        <p:style>
-          <a:lnRef idx="1">
-            <a:schemeClr val="accent1"/>
-          </a:lnRef>
-          <a:fillRef idx="3">
-            <a:schemeClr val="accent1"/>
-          </a:fillRef>
-          <a:effectRef idx="2">
-            <a:schemeClr val="accent1"/>
-          </a:effectRef>
-          <a:fontRef idx="minor">
-            <a:schemeClr val="lt1"/>
-          </a:fontRef>
-        </p:style>
-        <p:txBody>
-          <a:bodyPr rtlCol="0" anchor="ctr"/>
-          <a:lstStyle/>
-          <a:p>
-            <a:pPr algn="ctr">
-              <a:defRPr sz="1300" b="1">
-                <a:solidFill>
-                  <a:srgbClr val="FFFFFF"/>
-                </a:solidFill>
-              </a:defRPr>
-            </a:pPr>
-            <a:r>
-              <a:t>Đầu ra — JSON có ngữ nghĩa</a:t>
-            </a:r>
-          </a:p>
-        </p:txBody>
-      </p:sp>
-      <p:sp>
-        <p:nvSpPr>
-          <p:cNvPr id="8" name="Rounded Rectangle 7"/>
-          <p:cNvSpPr/>
-          <p:nvPr/>
-        </p:nvSpPr>
-        <p:spPr>
-          <a:xfrm>
-            <a:off x="457200" y="3108960"/>
-            <a:ext cx="10972800" cy="2834640"/>
-          </a:xfrm>
-          <a:prstGeom prst="roundRect">
-            <a:avLst/>
-          </a:prstGeom>
-          <a:solidFill>
-            <a:srgbClr val="E8F5E9"/>
-          </a:solidFill>
-          <a:ln w="12700">
-            <a:solidFill>
-              <a:srgbClr val="27AE60"/>
-            </a:solidFill>
-          </a:ln>
-        </p:spPr>
-        <p:style>
-          <a:lnRef idx="1">
-            <a:schemeClr val="accent1"/>
-          </a:lnRef>
-          <a:fillRef idx="3">
-            <a:schemeClr val="accent1"/>
-          </a:fillRef>
-          <a:effectRef idx="2">
-            <a:schemeClr val="accent1"/>
-          </a:effectRef>
-          <a:fontRef idx="minor">
-            <a:schemeClr val="lt1"/>
-          </a:fontRef>
-        </p:style>
-        <p:txBody>
-          <a:bodyPr rtlCol="0" anchor="ctr" wrap="square" lIns="127000" rIns="127000" tIns="63500"/>
-          <a:lstStyle/>
-          <a:p>
-            <a:pPr algn="ctr">
+              <a:t>• DB (Differentiable Binarization)</a:t>
+            </a:r>
+          </a:p>
+          <a:p>
+            <a:pPr>
               <a:spcBef>
                 <a:spcPts val="300"/>
               </a:spcBef>
@@ -12141,7 +10096,7 @@
               </a:defRPr>
             </a:pPr>
             <a:r>
-              <a:t>• { "store_name": "Circle K", "date": "2024-05-27", "total": 87000</a:t>
+              <a:t>• Xương sống của PaddleOCR</a:t>
             </a:r>
           </a:p>
           <a:p>
@@ -12156,7 +10111,37 @@
               </a:defRPr>
             </a:pPr>
             <a:r>
-              <a:t>•   "items": [ { "name": "Cafe sua da", "qty": 2, "price": 29000 }, ... ] }</a:t>
+              <a:t>• Dự đoán probability map per pixel</a:t>
+            </a:r>
+          </a:p>
+          <a:p>
+            <a:pPr>
+              <a:spcBef>
+                <a:spcPts val="300"/>
+              </a:spcBef>
+              <a:defRPr sz="1200">
+                <a:solidFill>
+                  <a:srgbClr val="2C3E50"/>
+                </a:solidFill>
+              </a:defRPr>
+            </a:pPr>
+            <a:r>
+              <a:t>• Ngưỡng có thể học được (differentiable threshold)</a:t>
+            </a:r>
+          </a:p>
+          <a:p>
+            <a:pPr>
+              <a:spcBef>
+                <a:spcPts val="300"/>
+              </a:spcBef>
+              <a:defRPr sz="1200">
+                <a:solidFill>
+                  <a:srgbClr val="2C3E50"/>
+                </a:solidFill>
+              </a:defRPr>
+            </a:pPr>
+            <a:r>
+              <a:t>• Tối ưu cho CPU/mobile</a:t>
             </a:r>
           </a:p>
         </p:txBody>
@@ -12166,9 +10151,6 @@
   <p:clrMapOvr>
     <a:masterClrMapping/>
   </p:clrMapOvr>
-  <p:transition spd="med" advTm="800">
-    <p:fade/>
-  </p:transition>
 </p:sld>
 </file>
 
@@ -12272,7 +10254,7 @@
               </a:defRPr>
             </a:pPr>
             <a:r>
-              <a:t>Trích xuất Hóa đơn Tiếng Việt — Pipeline PaddleOCR • VietOCR • LayoutLMv3</a:t>
+              <a:t>Trích xuất Hóa đơn Tiếng Việt — PaddleOCR • VietOCR • LayoutLMv3</a:t>
             </a:r>
           </a:p>
         </p:txBody>
@@ -12307,7 +10289,7 @@
               </a:defRPr>
             </a:pPr>
             <a:r>
-              <a:t>PIPELINE XỬ LÝ</a:t>
+              <a:t>TEXT RECOGNITION — Từ template matching đến Attention</a:t>
             </a:r>
           </a:p>
         </p:txBody>
@@ -12320,19 +10302,17 @@
         </p:nvSpPr>
         <p:spPr>
           <a:xfrm>
-            <a:off x="274320" y="2286000"/>
-            <a:ext cx="1463040" cy="914400"/>
+            <a:off x="274320" y="1097280"/>
+            <a:ext cx="3657600" cy="365760"/>
           </a:xfrm>
           <a:prstGeom prst="roundRect">
             <a:avLst/>
           </a:prstGeom>
           <a:solidFill>
-            <a:srgbClr val="F8F9FA"/>
+            <a:srgbClr val="7F8C8D"/>
           </a:solidFill>
           <a:ln>
-            <a:solidFill>
-              <a:srgbClr val="1B2A4A"/>
-            </a:solidFill>
+            <a:noFill/>
           </a:ln>
         </p:spPr>
         <p:style>
@@ -12354,17 +10334,14 @@
           <a:lstStyle/>
           <a:p>
             <a:pPr algn="ctr">
-              <a:spcBef>
-                <a:spcPts val="0"/>
-              </a:spcBef>
-              <a:defRPr sz="1100" b="1">
-                <a:solidFill>
-                  <a:srgbClr val="2C3E50"/>
-                </a:solidFill>
-              </a:defRPr>
-            </a:pPr>
-            <a:r>
-              <a:t>Ảnh hóa đơn</a:t>
+              <a:defRPr sz="1300" b="1">
+                <a:solidFill>
+                  <a:srgbClr val="FFFFFF"/>
+                </a:solidFill>
+              </a:defRPr>
+            </a:pPr>
+            <a:r>
+              <a:t>Thế hệ 1 (trước 2014)</a:t>
             </a:r>
           </a:p>
         </p:txBody>
@@ -12377,18 +10354,18 @@
         </p:nvSpPr>
         <p:spPr>
           <a:xfrm>
-            <a:off x="1920240" y="2286000"/>
-            <a:ext cx="1463040" cy="914400"/>
+            <a:off x="274320" y="1463040"/>
+            <a:ext cx="3657600" cy="1920240"/>
           </a:xfrm>
           <a:prstGeom prst="roundRect">
             <a:avLst/>
           </a:prstGeom>
           <a:solidFill>
-            <a:srgbClr val="D6EAF8"/>
+            <a:srgbClr val="F8F9FA"/>
           </a:solidFill>
-          <a:ln>
+          <a:ln w="12700">
             <a:solidFill>
-              <a:srgbClr val="2E86DE"/>
+              <a:srgbClr val="7F8C8D"/>
             </a:solidFill>
           </a:ln>
         </p:spPr>
@@ -12407,25 +10384,51 @@
           </a:fontRef>
         </p:style>
         <p:txBody>
-          <a:bodyPr rtlCol="0" anchor="ctr"/>
+          <a:bodyPr rtlCol="0" anchor="ctr" wrap="square" lIns="127000" tIns="63500"/>
           <a:lstStyle/>
           <a:p>
             <a:pPr algn="ctr">
               <a:spcBef>
-                <a:spcPts val="0"/>
-              </a:spcBef>
-              <a:defRPr sz="1100" b="1">
+                <a:spcPts val="300"/>
+              </a:spcBef>
+              <a:defRPr sz="1200">
                 <a:solidFill>
                   <a:srgbClr val="2C3E50"/>
                 </a:solidFill>
               </a:defRPr>
             </a:pPr>
             <a:r>
-              <a:t>PaddleOCR</a:t>
-            </a:r>
-            <a:br/>
-            <a:r>
-              <a:t>Detection</a:t>
+              <a:t>• Tesseract v3, template matching</a:t>
+            </a:r>
+          </a:p>
+          <a:p>
+            <a:pPr>
+              <a:spcBef>
+                <a:spcPts val="300"/>
+              </a:spcBef>
+              <a:defRPr sz="1200">
+                <a:solidFill>
+                  <a:srgbClr val="2C3E50"/>
+                </a:solidFill>
+              </a:defRPr>
+            </a:pPr>
+            <a:r>
+              <a:t>• Tách từng ký tự</a:t>
+            </a:r>
+          </a:p>
+          <a:p>
+            <a:pPr>
+              <a:spcBef>
+                <a:spcPts val="300"/>
+              </a:spcBef>
+              <a:defRPr sz="1200">
+                <a:solidFill>
+                  <a:srgbClr val="2C3E50"/>
+                </a:solidFill>
+              </a:defRPr>
+            </a:pPr>
+            <a:r>
+              <a:t>• Yêu cầu font rõ ràng</a:t>
             </a:r>
           </a:p>
         </p:txBody>
@@ -12438,19 +10441,17 @@
         </p:nvSpPr>
         <p:spPr>
           <a:xfrm>
-            <a:off x="3566160" y="2286000"/>
-            <a:ext cx="1463040" cy="914400"/>
+            <a:off x="274320" y="3566160"/>
+            <a:ext cx="3657600" cy="365760"/>
           </a:xfrm>
           <a:prstGeom prst="roundRect">
             <a:avLst/>
           </a:prstGeom>
           <a:solidFill>
-            <a:srgbClr val="F8F9FA"/>
+            <a:srgbClr val="F39C12"/>
           </a:solidFill>
           <a:ln>
-            <a:solidFill>
-              <a:srgbClr val="1B2A4A"/>
-            </a:solidFill>
+            <a:noFill/>
           </a:ln>
         </p:spPr>
         <p:style>
@@ -12472,21 +10473,14 @@
           <a:lstStyle/>
           <a:p>
             <a:pPr algn="ctr">
-              <a:spcBef>
-                <a:spcPts val="0"/>
-              </a:spcBef>
-              <a:defRPr sz="1100" b="1">
-                <a:solidFill>
-                  <a:srgbClr val="2C3E50"/>
-                </a:solidFill>
-              </a:defRPr>
-            </a:pPr>
-            <a:r>
-              <a:t>Bounding</a:t>
-            </a:r>
-            <a:br/>
-            <a:r>
-              <a:t>Boxes</a:t>
+              <a:defRPr sz="1300" b="1">
+                <a:solidFill>
+                  <a:srgbClr val="FFFFFF"/>
+                </a:solidFill>
+              </a:defRPr>
+            </a:pPr>
+            <a:r>
+              <a:t>Thế hệ 2 (2015–2018)</a:t>
             </a:r>
           </a:p>
         </p:txBody>
@@ -12499,18 +10493,18 @@
         </p:nvSpPr>
         <p:spPr>
           <a:xfrm>
-            <a:off x="5212080" y="2286000"/>
-            <a:ext cx="1463040" cy="914400"/>
+            <a:off x="274320" y="3931920"/>
+            <a:ext cx="3657600" cy="1920240"/>
           </a:xfrm>
           <a:prstGeom prst="roundRect">
             <a:avLst/>
           </a:prstGeom>
           <a:solidFill>
-            <a:srgbClr val="D6EAF8"/>
+            <a:srgbClr val="FFF3E0"/>
           </a:solidFill>
-          <a:ln>
+          <a:ln w="12700">
             <a:solidFill>
-              <a:srgbClr val="2E86DE"/>
+              <a:srgbClr val="F39C12"/>
             </a:solidFill>
           </a:ln>
         </p:spPr>
@@ -12529,25 +10523,51 @@
           </a:fontRef>
         </p:style>
         <p:txBody>
-          <a:bodyPr rtlCol="0" anchor="ctr"/>
+          <a:bodyPr rtlCol="0" anchor="ctr" wrap="square" lIns="127000" tIns="63500"/>
           <a:lstStyle/>
           <a:p>
             <a:pPr algn="ctr">
               <a:spcBef>
-                <a:spcPts val="0"/>
-              </a:spcBef>
-              <a:defRPr sz="1100" b="1">
+                <a:spcPts val="300"/>
+              </a:spcBef>
+              <a:defRPr sz="1200">
                 <a:solidFill>
                   <a:srgbClr val="2C3E50"/>
                 </a:solidFill>
               </a:defRPr>
             </a:pPr>
             <a:r>
-              <a:t>VietOCR</a:t>
-            </a:r>
-            <a:br/>
-            <a:r>
-              <a:t>Recognition</a:t>
+              <a:t>• CRNN + CTC</a:t>
+            </a:r>
+          </a:p>
+          <a:p>
+            <a:pPr>
+              <a:spcBef>
+                <a:spcPts val="300"/>
+              </a:spcBef>
+              <a:defRPr sz="1200">
+                <a:solidFill>
+                  <a:srgbClr val="2C3E50"/>
+                </a:solidFill>
+              </a:defRPr>
+            </a:pPr>
+            <a:r>
+              <a:t>• CNN + BiLSTM + CTC loss</a:t>
+            </a:r>
+          </a:p>
+          <a:p>
+            <a:pPr>
+              <a:spcBef>
+                <a:spcPts val="300"/>
+              </a:spcBef>
+              <a:defRPr sz="1200">
+                <a:solidFill>
+                  <a:srgbClr val="2C3E50"/>
+                </a:solidFill>
+              </a:defRPr>
+            </a:pPr>
+            <a:r>
+              <a:t>• Nền tảng OCR hiện đại</a:t>
             </a:r>
           </a:p>
         </p:txBody>
@@ -12560,19 +10580,17 @@
         </p:nvSpPr>
         <p:spPr>
           <a:xfrm>
-            <a:off x="6858000" y="2286000"/>
-            <a:ext cx="1463040" cy="914400"/>
+            <a:off x="4206240" y="1097280"/>
+            <a:ext cx="7680960" cy="365760"/>
           </a:xfrm>
           <a:prstGeom prst="roundRect">
             <a:avLst/>
           </a:prstGeom>
           <a:solidFill>
-            <a:srgbClr val="F8F9FA"/>
+            <a:srgbClr val="2E86DE"/>
           </a:solidFill>
           <a:ln>
-            <a:solidFill>
-              <a:srgbClr val="1B2A4A"/>
-            </a:solidFill>
+            <a:noFill/>
           </a:ln>
         </p:spPr>
         <p:style>
@@ -12594,17 +10612,14 @@
           <a:lstStyle/>
           <a:p>
             <a:pPr algn="ctr">
-              <a:spcBef>
-                <a:spcPts val="0"/>
-              </a:spcBef>
-              <a:defRPr sz="1100" b="1">
-                <a:solidFill>
-                  <a:srgbClr val="2C3E50"/>
-                </a:solidFill>
-              </a:defRPr>
-            </a:pPr>
-            <a:r>
-              <a:t>Text + BBox</a:t>
+              <a:defRPr sz="1300" b="1">
+                <a:solidFill>
+                  <a:srgbClr val="FFFFFF"/>
+                </a:solidFill>
+              </a:defRPr>
+            </a:pPr>
+            <a:r>
+              <a:t>★ Thế hệ 3 (2018–nay) — VietOCR</a:t>
             </a:r>
           </a:p>
         </p:txBody>
@@ -12617,8 +10632,8 @@
         </p:nvSpPr>
         <p:spPr>
           <a:xfrm>
-            <a:off x="3657600" y="4572000"/>
-            <a:ext cx="1463040" cy="914400"/>
+            <a:off x="4206240" y="1463040"/>
+            <a:ext cx="7680960" cy="4389120"/>
           </a:xfrm>
           <a:prstGeom prst="roundRect">
             <a:avLst/>
@@ -12626,7 +10641,7 @@
           <a:solidFill>
             <a:srgbClr val="D6EAF8"/>
           </a:solidFill>
-          <a:ln>
+          <a:ln w="12700">
             <a:solidFill>
               <a:srgbClr val="2E86DE"/>
             </a:solidFill>
@@ -12647,296 +10662,81 @@
           </a:fontRef>
         </p:style>
         <p:txBody>
-          <a:bodyPr rtlCol="0" anchor="ctr"/>
+          <a:bodyPr rtlCol="0" anchor="ctr" wrap="square" lIns="127000" tIns="63500"/>
           <a:lstStyle/>
           <a:p>
             <a:pPr algn="ctr">
               <a:spcBef>
-                <a:spcPts val="0"/>
-              </a:spcBef>
-              <a:defRPr sz="1100" b="1">
+                <a:spcPts val="300"/>
+              </a:spcBef>
+              <a:defRPr sz="1200">
                 <a:solidFill>
                   <a:srgbClr val="2C3E50"/>
                 </a:solidFill>
               </a:defRPr>
             </a:pPr>
             <a:r>
-              <a:t>LayoutLMv3</a:t>
-            </a:r>
-            <a:br/>
-            <a:r>
-              <a:t>KIE</a:t>
-            </a:r>
-          </a:p>
-        </p:txBody>
-      </p:sp>
-      <p:sp>
-        <p:nvSpPr>
-          <p:cNvPr id="11" name="Rounded Rectangle 10"/>
-          <p:cNvSpPr/>
-          <p:nvPr/>
-        </p:nvSpPr>
-        <p:spPr>
-          <a:xfrm>
-            <a:off x="274320" y="4572000"/>
-            <a:ext cx="1463040" cy="914400"/>
-          </a:xfrm>
-          <a:prstGeom prst="roundRect">
-            <a:avLst/>
-          </a:prstGeom>
-          <a:solidFill>
-            <a:srgbClr val="E8F5E9"/>
-          </a:solidFill>
-          <a:ln>
-            <a:solidFill>
-              <a:srgbClr val="27AE60"/>
-            </a:solidFill>
-          </a:ln>
-        </p:spPr>
-        <p:style>
-          <a:lnRef idx="1">
-            <a:schemeClr val="accent1"/>
-          </a:lnRef>
-          <a:fillRef idx="3">
-            <a:schemeClr val="accent1"/>
-          </a:fillRef>
-          <a:effectRef idx="2">
-            <a:schemeClr val="accent1"/>
-          </a:effectRef>
-          <a:fontRef idx="minor">
-            <a:schemeClr val="lt1"/>
-          </a:fontRef>
-        </p:style>
-        <p:txBody>
-          <a:bodyPr rtlCol="0" anchor="ctr"/>
-          <a:lstStyle/>
-          <a:p>
-            <a:pPr algn="ctr">
-              <a:spcBef>
-                <a:spcPts val="0"/>
-              </a:spcBef>
-              <a:defRPr sz="1100" b="1">
+              <a:t>• Seq2Seq + Attention</a:t>
+            </a:r>
+          </a:p>
+          <a:p>
+            <a:pPr>
+              <a:spcBef>
+                <a:spcPts val="300"/>
+              </a:spcBef>
+              <a:defRPr sz="1200">
                 <a:solidFill>
                   <a:srgbClr val="2C3E50"/>
                 </a:solidFill>
               </a:defRPr>
             </a:pPr>
             <a:r>
-              <a:t>JSON</a:t>
-            </a:r>
-            <a:br/>
-            <a:r>
-              <a:t>Cấu trúc</a:t>
-            </a:r>
-          </a:p>
-        </p:txBody>
-      </p:sp>
-      <p:sp>
-        <p:nvSpPr>
-          <p:cNvPr id="12" name="TextBox 11"/>
-          <p:cNvSpPr txBox="1"/>
-          <p:nvPr/>
-        </p:nvSpPr>
-        <p:spPr>
-          <a:xfrm>
-            <a:off x="1737360" y="2468880"/>
-            <a:ext cx="274320" cy="457200"/>
-          </a:xfrm>
-          <a:prstGeom prst="rect">
-            <a:avLst/>
-          </a:prstGeom>
-          <a:noFill/>
-        </p:spPr>
-        <p:txBody>
-          <a:bodyPr wrap="none">
-            <a:spAutoFit/>
-          </a:bodyPr>
-          <a:lstStyle/>
-          <a:p>
-            <a:pPr>
-              <a:defRPr sz="1800">
-                <a:solidFill>
-                  <a:srgbClr val="2E86DE"/>
-                </a:solidFill>
-              </a:defRPr>
-            </a:pPr>
-            <a:r>
-              <a:t>→</a:t>
-            </a:r>
-          </a:p>
-        </p:txBody>
-      </p:sp>
-      <p:sp>
-        <p:nvSpPr>
-          <p:cNvPr id="13" name="TextBox 12"/>
-          <p:cNvSpPr txBox="1"/>
-          <p:nvPr/>
-        </p:nvSpPr>
-        <p:spPr>
-          <a:xfrm>
-            <a:off x="3383280" y="2468880"/>
-            <a:ext cx="274320" cy="457200"/>
-          </a:xfrm>
-          <a:prstGeom prst="rect">
-            <a:avLst/>
-          </a:prstGeom>
-          <a:noFill/>
-        </p:spPr>
-        <p:txBody>
-          <a:bodyPr wrap="none">
-            <a:spAutoFit/>
-          </a:bodyPr>
-          <a:lstStyle/>
-          <a:p>
-            <a:pPr>
-              <a:defRPr sz="1800">
-                <a:solidFill>
-                  <a:srgbClr val="2E86DE"/>
-                </a:solidFill>
-              </a:defRPr>
-            </a:pPr>
-            <a:r>
-              <a:t>→</a:t>
-            </a:r>
-          </a:p>
-        </p:txBody>
-      </p:sp>
-      <p:sp>
-        <p:nvSpPr>
-          <p:cNvPr id="14" name="TextBox 13"/>
-          <p:cNvSpPr txBox="1"/>
-          <p:nvPr/>
-        </p:nvSpPr>
-        <p:spPr>
-          <a:xfrm>
-            <a:off x="5029200" y="2468880"/>
-            <a:ext cx="274320" cy="457200"/>
-          </a:xfrm>
-          <a:prstGeom prst="rect">
-            <a:avLst/>
-          </a:prstGeom>
-          <a:noFill/>
-        </p:spPr>
-        <p:txBody>
-          <a:bodyPr wrap="none">
-            <a:spAutoFit/>
-          </a:bodyPr>
-          <a:lstStyle/>
-          <a:p>
-            <a:pPr>
-              <a:defRPr sz="1800">
-                <a:solidFill>
-                  <a:srgbClr val="2E86DE"/>
-                </a:solidFill>
-              </a:defRPr>
-            </a:pPr>
-            <a:r>
-              <a:t>→</a:t>
-            </a:r>
-          </a:p>
-        </p:txBody>
-      </p:sp>
-      <p:sp>
-        <p:nvSpPr>
-          <p:cNvPr id="15" name="TextBox 14"/>
-          <p:cNvSpPr txBox="1"/>
-          <p:nvPr/>
-        </p:nvSpPr>
-        <p:spPr>
-          <a:xfrm>
-            <a:off x="6675120" y="2468880"/>
-            <a:ext cx="274320" cy="457200"/>
-          </a:xfrm>
-          <a:prstGeom prst="rect">
-            <a:avLst/>
-          </a:prstGeom>
-          <a:noFill/>
-        </p:spPr>
-        <p:txBody>
-          <a:bodyPr wrap="none">
-            <a:spAutoFit/>
-          </a:bodyPr>
-          <a:lstStyle/>
-          <a:p>
-            <a:pPr>
-              <a:defRPr sz="1800">
-                <a:solidFill>
-                  <a:srgbClr val="2E86DE"/>
-                </a:solidFill>
-              </a:defRPr>
-            </a:pPr>
-            <a:r>
-              <a:t>→</a:t>
-            </a:r>
-          </a:p>
-        </p:txBody>
-      </p:sp>
-      <p:sp>
-        <p:nvSpPr>
-          <p:cNvPr id="16" name="TextBox 15"/>
-          <p:cNvSpPr txBox="1"/>
-          <p:nvPr/>
-        </p:nvSpPr>
-        <p:spPr>
-          <a:xfrm>
-            <a:off x="5029200" y="3383280"/>
-            <a:ext cx="914400" cy="457200"/>
-          </a:xfrm>
-          <a:prstGeom prst="rect">
-            <a:avLst/>
-          </a:prstGeom>
-          <a:noFill/>
-        </p:spPr>
-        <p:txBody>
-          <a:bodyPr wrap="none">
-            <a:spAutoFit/>
-          </a:bodyPr>
-          <a:lstStyle/>
-          <a:p>
-            <a:pPr algn="ctr">
-              <a:defRPr sz="2400">
-                <a:solidFill>
-                  <a:srgbClr val="2E86DE"/>
-                </a:solidFill>
-              </a:defRPr>
-            </a:pPr>
-            <a:r>
-              <a:t>↓</a:t>
-            </a:r>
-          </a:p>
-        </p:txBody>
-      </p:sp>
-      <p:sp>
-        <p:nvSpPr>
-          <p:cNvPr id="17" name="TextBox 16"/>
-          <p:cNvSpPr txBox="1"/>
-          <p:nvPr/>
-        </p:nvSpPr>
-        <p:spPr>
-          <a:xfrm>
-            <a:off x="3200400" y="4754880"/>
-            <a:ext cx="457200" cy="457200"/>
-          </a:xfrm>
-          <a:prstGeom prst="rect">
-            <a:avLst/>
-          </a:prstGeom>
-          <a:noFill/>
-        </p:spPr>
-        <p:txBody>
-          <a:bodyPr wrap="none">
-            <a:spAutoFit/>
-          </a:bodyPr>
-          <a:lstStyle/>
-          <a:p>
-            <a:pPr>
-              <a:defRPr sz="1800">
-                <a:solidFill>
-                  <a:srgbClr val="2E86DE"/>
-                </a:solidFill>
-              </a:defRPr>
-            </a:pPr>
-            <a:r>
-              <a:t>←</a:t>
+              <a:t>• VGG/ResNet encoder + Transformer decoder</a:t>
+            </a:r>
+          </a:p>
+          <a:p>
+            <a:pPr>
+              <a:spcBef>
+                <a:spcPts val="300"/>
+              </a:spcBef>
+              <a:defRPr sz="1200">
+                <a:solidFill>
+                  <a:srgbClr val="2C3E50"/>
+                </a:solidFill>
+              </a:defRPr>
+            </a:pPr>
+            <a:r>
+              <a:t>• Xử lý dấu thanh tiếng Việt tốt hơn</a:t>
+            </a:r>
+          </a:p>
+          <a:p>
+            <a:pPr>
+              <a:spcBef>
+                <a:spcPts val="300"/>
+              </a:spcBef>
+              <a:defRPr sz="1200">
+                <a:solidFill>
+                  <a:srgbClr val="2C3E50"/>
+                </a:solidFill>
+              </a:defRPr>
+            </a:pPr>
+            <a:r>
+              <a:t>• Pretrain trên 5M+ ảnh text tiếng Việt</a:t>
+            </a:r>
+          </a:p>
+          <a:p>
+            <a:pPr>
+              <a:spcBef>
+                <a:spcPts val="300"/>
+              </a:spcBef>
+              <a:defRPr sz="1200">
+                <a:solidFill>
+                  <a:srgbClr val="2C3E50"/>
+                </a:solidFill>
+              </a:defRPr>
+            </a:pPr>
+            <a:r>
+              <a:t>• 60+ font chữ thông dụng</a:t>
             </a:r>
           </a:p>
         </p:txBody>
@@ -12946,9 +10746,6 @@
   <p:clrMapOvr>
     <a:masterClrMapping/>
   </p:clrMapOvr>
-  <p:transition spd="med" advTm="800">
-    <p:wipe/>
-  </p:transition>
 </p:sld>
 </file>
 
